--- a/.claude/skills/code-review/templates/PRJ-Sponsor Brief.pptx
+++ b/.claude/skills/code-review/templates/PRJ-Sponsor Brief.pptx
@@ -13,7 +13,7 @@
     <p:sldId id="3668" r:id="rId7"/>
     <p:sldId id="3669" r:id="rId8"/>
     <p:sldId id="300" r:id="rId9"/>
-    <p:sldId id="3670" r:id="rId10"/>
+    <p:sldId id="3673" r:id="rId10"/>
     <p:sldId id="293" r:id="rId11"/>
     <p:sldId id="3671" r:id="rId12"/>
     <p:sldId id="3672" r:id="rId13"/>
@@ -146,421 +146,10 @@
 <file path=ppt/revisionInfo.xml><?xml version="1.0" encoding="utf-8"?>
 <p1510:revInfo xmlns:a="http://schemas.openxmlformats.org/drawingml/2006/main" xmlns:r="http://schemas.openxmlformats.org/officeDocument/2006/relationships" xmlns:p1510="http://schemas.microsoft.com/office/powerpoint/2015/10/main">
   <p1510:revLst>
+    <p1510:client id="{045C732D-CB4F-41AE-97A4-6FB188482F11}" v="73" dt="2026-06-23T01:04:47.823"/>
     <p1510:client id="{4987AFDA-82AF-47A3-A1D7-AEBA9D1DC281}" v="16" dt="2026-06-22T02:51:42.236"/>
   </p1510:revLst>
 </p1510:revInfo>
-</file>
-
-<file path=ppt/changesInfos/changesInfo1.xml><?xml version="1.0" encoding="utf-8"?>
-<pc:chgInfo xmlns:a="http://schemas.openxmlformats.org/drawingml/2006/main" xmlns:r="http://schemas.openxmlformats.org/officeDocument/2006/relationships" xmlns:ac="http://schemas.microsoft.com/office/drawing/2013/main/command" xmlns:pc="http://schemas.microsoft.com/office/powerpoint/2013/main/command">
-  <pc:docChgLst>
-    <pc:chgData name="Chris Pavlinovich" userId="9a9a62b5-5996-4596-85d8-0c147ac5ab4c" providerId="ADAL" clId="{79A8C479-5594-4A85-BD3F-160DC631008E}"/>
-    <pc:docChg chg="undo custSel addSld delSld modSld">
-      <pc:chgData name="Chris Pavlinovich" userId="9a9a62b5-5996-4596-85d8-0c147ac5ab4c" providerId="ADAL" clId="{79A8C479-5594-4A85-BD3F-160DC631008E}" dt="2026-06-22T03:45:22.519" v="331" actId="14734"/>
-      <pc:docMkLst>
-        <pc:docMk/>
-      </pc:docMkLst>
-      <pc:sldChg chg="addSp delSp modSp mod">
-        <pc:chgData name="Chris Pavlinovich" userId="9a9a62b5-5996-4596-85d8-0c147ac5ab4c" providerId="ADAL" clId="{79A8C479-5594-4A85-BD3F-160DC631008E}" dt="2026-06-22T02:21:32.511" v="30" actId="478"/>
-        <pc:sldMkLst>
-          <pc:docMk/>
-          <pc:sldMk cId="3631878462" sldId="285"/>
-        </pc:sldMkLst>
-        <pc:spChg chg="mod">
-          <ac:chgData name="Chris Pavlinovich" userId="9a9a62b5-5996-4596-85d8-0c147ac5ab4c" providerId="ADAL" clId="{79A8C479-5594-4A85-BD3F-160DC631008E}" dt="2026-06-22T01:51:10.275" v="16" actId="21"/>
-          <ac:spMkLst>
-            <pc:docMk/>
-            <pc:sldMk cId="3631878462" sldId="285"/>
-            <ac:spMk id="2" creationId="{7E748469-ABB5-3342-B173-EEB52D88371F}"/>
-          </ac:spMkLst>
-        </pc:spChg>
-        <pc:spChg chg="del">
-          <ac:chgData name="Chris Pavlinovich" userId="9a9a62b5-5996-4596-85d8-0c147ac5ab4c" providerId="ADAL" clId="{79A8C479-5594-4A85-BD3F-160DC631008E}" dt="2026-06-22T02:20:28.115" v="17" actId="478"/>
-          <ac:spMkLst>
-            <pc:docMk/>
-            <pc:sldMk cId="3631878462" sldId="285"/>
-            <ac:spMk id="3" creationId="{2E0D9726-2DE5-DD4F-8BB9-4F07F93CEE25}"/>
-          </ac:spMkLst>
-        </pc:spChg>
-        <pc:spChg chg="del">
-          <ac:chgData name="Chris Pavlinovich" userId="9a9a62b5-5996-4596-85d8-0c147ac5ab4c" providerId="ADAL" clId="{79A8C479-5594-4A85-BD3F-160DC631008E}" dt="2026-06-22T02:21:32.511" v="30" actId="478"/>
-          <ac:spMkLst>
-            <pc:docMk/>
-            <pc:sldMk cId="3631878462" sldId="285"/>
-            <ac:spMk id="5" creationId="{F04B4038-584F-81CD-AB5F-CCFD769FFF8B}"/>
-          </ac:spMkLst>
-        </pc:spChg>
-        <pc:spChg chg="add del mod">
-          <ac:chgData name="Chris Pavlinovich" userId="9a9a62b5-5996-4596-85d8-0c147ac5ab4c" providerId="ADAL" clId="{79A8C479-5594-4A85-BD3F-160DC631008E}" dt="2026-06-22T02:20:30.511" v="18" actId="478"/>
-          <ac:spMkLst>
-            <pc:docMk/>
-            <pc:sldMk cId="3631878462" sldId="285"/>
-            <ac:spMk id="6" creationId="{100605AA-314F-E240-8CC7-6033F988FFF9}"/>
-          </ac:spMkLst>
-        </pc:spChg>
-        <pc:spChg chg="add mod">
-          <ac:chgData name="Chris Pavlinovich" userId="9a9a62b5-5996-4596-85d8-0c147ac5ab4c" providerId="ADAL" clId="{79A8C479-5594-4A85-BD3F-160DC631008E}" dt="2026-06-22T02:21:16.177" v="29" actId="20577"/>
-          <ac:spMkLst>
-            <pc:docMk/>
-            <pc:sldMk cId="3631878462" sldId="285"/>
-            <ac:spMk id="8" creationId="{39A79543-4308-8D68-44B9-3DB7BF448B71}"/>
-          </ac:spMkLst>
-        </pc:spChg>
-      </pc:sldChg>
-      <pc:sldChg chg="del">
-        <pc:chgData name="Chris Pavlinovich" userId="9a9a62b5-5996-4596-85d8-0c147ac5ab4c" providerId="ADAL" clId="{79A8C479-5594-4A85-BD3F-160DC631008E}" dt="2026-06-22T01:47:11.143" v="14" actId="47"/>
-        <pc:sldMkLst>
-          <pc:docMk/>
-          <pc:sldMk cId="1756385572" sldId="291"/>
-        </pc:sldMkLst>
-      </pc:sldChg>
-      <pc:sldChg chg="addSp delSp modSp mod">
-        <pc:chgData name="Chris Pavlinovich" userId="9a9a62b5-5996-4596-85d8-0c147ac5ab4c" providerId="ADAL" clId="{79A8C479-5594-4A85-BD3F-160DC631008E}" dt="2026-06-22T03:45:22.519" v="331" actId="14734"/>
-        <pc:sldMkLst>
-          <pc:docMk/>
-          <pc:sldMk cId="3300051750" sldId="293"/>
-        </pc:sldMkLst>
-        <pc:spChg chg="mod">
-          <ac:chgData name="Chris Pavlinovich" userId="9a9a62b5-5996-4596-85d8-0c147ac5ab4c" providerId="ADAL" clId="{79A8C479-5594-4A85-BD3F-160DC631008E}" dt="2026-06-22T01:45:02.640" v="3" actId="20577"/>
-          <ac:spMkLst>
-            <pc:docMk/>
-            <pc:sldMk cId="3300051750" sldId="293"/>
-            <ac:spMk id="2" creationId="{7E748469-ABB5-3342-B173-EEB52D88371F}"/>
-          </ac:spMkLst>
-        </pc:spChg>
-        <pc:spChg chg="del">
-          <ac:chgData name="Chris Pavlinovich" userId="9a9a62b5-5996-4596-85d8-0c147ac5ab4c" providerId="ADAL" clId="{79A8C479-5594-4A85-BD3F-160DC631008E}" dt="2026-06-22T02:22:31.767" v="37" actId="478"/>
-          <ac:spMkLst>
-            <pc:docMk/>
-            <pc:sldMk cId="3300051750" sldId="293"/>
-            <ac:spMk id="3" creationId="{EC6E6F9B-FB52-992D-2BE1-2BE6F061B8CF}"/>
-          </ac:spMkLst>
-        </pc:spChg>
-        <pc:spChg chg="add del">
-          <ac:chgData name="Chris Pavlinovich" userId="9a9a62b5-5996-4596-85d8-0c147ac5ab4c" providerId="ADAL" clId="{79A8C479-5594-4A85-BD3F-160DC631008E}" dt="2026-06-22T02:57:05.149" v="315" actId="478"/>
-          <ac:spMkLst>
-            <pc:docMk/>
-            <pc:sldMk cId="3300051750" sldId="293"/>
-            <ac:spMk id="5" creationId="{E27A4D06-7DF6-AAE9-6CD5-DD44ED3C9643}"/>
-          </ac:spMkLst>
-        </pc:spChg>
-        <pc:spChg chg="add del">
-          <ac:chgData name="Chris Pavlinovich" userId="9a9a62b5-5996-4596-85d8-0c147ac5ab4c" providerId="ADAL" clId="{79A8C479-5594-4A85-BD3F-160DC631008E}" dt="2026-06-22T02:55:45.969" v="313" actId="22"/>
-          <ac:spMkLst>
-            <pc:docMk/>
-            <pc:sldMk cId="3300051750" sldId="293"/>
-            <ac:spMk id="7" creationId="{0B0DEAD6-BA5C-B56A-DCF2-DB0AAA552102}"/>
-          </ac:spMkLst>
-        </pc:spChg>
-        <pc:graphicFrameChg chg="del">
-          <ac:chgData name="Chris Pavlinovich" userId="9a9a62b5-5996-4596-85d8-0c147ac5ab4c" providerId="ADAL" clId="{79A8C479-5594-4A85-BD3F-160DC631008E}" dt="2026-06-22T01:45:08.249" v="4" actId="478"/>
-          <ac:graphicFrameMkLst>
-            <pc:docMk/>
-            <pc:sldMk cId="3300051750" sldId="293"/>
-            <ac:graphicFrameMk id="5" creationId="{01274282-CD83-27E0-84CA-05EC3405D268}"/>
-          </ac:graphicFrameMkLst>
-        </pc:graphicFrameChg>
-        <pc:graphicFrameChg chg="del">
-          <ac:chgData name="Chris Pavlinovich" userId="9a9a62b5-5996-4596-85d8-0c147ac5ab4c" providerId="ADAL" clId="{79A8C479-5594-4A85-BD3F-160DC631008E}" dt="2026-06-22T01:45:10.465" v="5" actId="478"/>
-          <ac:graphicFrameMkLst>
-            <pc:docMk/>
-            <pc:sldMk cId="3300051750" sldId="293"/>
-            <ac:graphicFrameMk id="7" creationId="{EEF24F08-7010-D62E-D79D-ECBF83B9B520}"/>
-          </ac:graphicFrameMkLst>
-        </pc:graphicFrameChg>
-        <pc:graphicFrameChg chg="mod modGraphic">
-          <ac:chgData name="Chris Pavlinovich" userId="9a9a62b5-5996-4596-85d8-0c147ac5ab4c" providerId="ADAL" clId="{79A8C479-5594-4A85-BD3F-160DC631008E}" dt="2026-06-22T03:45:22.519" v="331" actId="14734"/>
-          <ac:graphicFrameMkLst>
-            <pc:docMk/>
-            <pc:sldMk cId="3300051750" sldId="293"/>
-            <ac:graphicFrameMk id="8" creationId="{095934E6-E823-65CF-D7A7-B02FC3506990}"/>
-          </ac:graphicFrameMkLst>
-        </pc:graphicFrameChg>
-      </pc:sldChg>
-      <pc:sldChg chg="addSp delSp modSp mod">
-        <pc:chgData name="Chris Pavlinovich" userId="9a9a62b5-5996-4596-85d8-0c147ac5ab4c" providerId="ADAL" clId="{79A8C479-5594-4A85-BD3F-160DC631008E}" dt="2026-06-22T02:58:22.338" v="319" actId="2710"/>
-        <pc:sldMkLst>
-          <pc:docMk/>
-          <pc:sldMk cId="1694207720" sldId="300"/>
-        </pc:sldMkLst>
-        <pc:spChg chg="add del mod">
-          <ac:chgData name="Chris Pavlinovich" userId="9a9a62b5-5996-4596-85d8-0c147ac5ab4c" providerId="ADAL" clId="{79A8C479-5594-4A85-BD3F-160DC631008E}" dt="2026-06-22T02:58:22.338" v="319" actId="2710"/>
-          <ac:spMkLst>
-            <pc:docMk/>
-            <pc:sldMk cId="1694207720" sldId="300"/>
-            <ac:spMk id="3" creationId="{21F02DA5-4A63-675A-F2DA-AEA37FAD45A3}"/>
-          </ac:spMkLst>
-        </pc:spChg>
-        <pc:spChg chg="del">
-          <ac:chgData name="Chris Pavlinovich" userId="9a9a62b5-5996-4596-85d8-0c147ac5ab4c" providerId="ADAL" clId="{79A8C479-5594-4A85-BD3F-160DC631008E}" dt="2026-06-22T02:21:53.171" v="33" actId="478"/>
-          <ac:spMkLst>
-            <pc:docMk/>
-            <pc:sldMk cId="1694207720" sldId="300"/>
-            <ac:spMk id="4" creationId="{5F44B972-C44B-6EDA-6981-71911AEC6199}"/>
-          </ac:spMkLst>
-        </pc:spChg>
-        <pc:spChg chg="mod">
-          <ac:chgData name="Chris Pavlinovich" userId="9a9a62b5-5996-4596-85d8-0c147ac5ab4c" providerId="ADAL" clId="{79A8C479-5594-4A85-BD3F-160DC631008E}" dt="2026-06-22T02:58:14.821" v="318" actId="2710"/>
-          <ac:spMkLst>
-            <pc:docMk/>
-            <pc:sldMk cId="1694207720" sldId="300"/>
-            <ac:spMk id="6" creationId="{CDB45A7B-BE98-7503-7E1A-4F91AF84AD66}"/>
-          </ac:spMkLst>
-        </pc:spChg>
-        <pc:spChg chg="add del mod">
-          <ac:chgData name="Chris Pavlinovich" userId="9a9a62b5-5996-4596-85d8-0c147ac5ab4c" providerId="ADAL" clId="{79A8C479-5594-4A85-BD3F-160DC631008E}" dt="2026-06-22T02:37:07.676" v="57" actId="478"/>
-          <ac:spMkLst>
-            <pc:docMk/>
-            <pc:sldMk cId="1694207720" sldId="300"/>
-            <ac:spMk id="7" creationId="{167F04C1-CB10-13E3-C401-4013ADA6D7C5}"/>
-          </ac:spMkLst>
-        </pc:spChg>
-      </pc:sldChg>
-      <pc:sldChg chg="del">
-        <pc:chgData name="Chris Pavlinovich" userId="9a9a62b5-5996-4596-85d8-0c147ac5ab4c" providerId="ADAL" clId="{79A8C479-5594-4A85-BD3F-160DC631008E}" dt="2026-06-22T01:44:38.519" v="0" actId="2696"/>
-        <pc:sldMkLst>
-          <pc:docMk/>
-          <pc:sldMk cId="1700371273" sldId="3667"/>
-        </pc:sldMkLst>
-      </pc:sldChg>
-      <pc:sldChg chg="addSp delSp modSp mod">
-        <pc:chgData name="Chris Pavlinovich" userId="9a9a62b5-5996-4596-85d8-0c147ac5ab4c" providerId="ADAL" clId="{79A8C479-5594-4A85-BD3F-160DC631008E}" dt="2026-06-22T02:35:46.159" v="46" actId="20577"/>
-        <pc:sldMkLst>
-          <pc:docMk/>
-          <pc:sldMk cId="305650755" sldId="3668"/>
-        </pc:sldMkLst>
-        <pc:spChg chg="del">
-          <ac:chgData name="Chris Pavlinovich" userId="9a9a62b5-5996-4596-85d8-0c147ac5ab4c" providerId="ADAL" clId="{79A8C479-5594-4A85-BD3F-160DC631008E}" dt="2026-06-22T02:34:13.307" v="38" actId="478"/>
-          <ac:spMkLst>
-            <pc:docMk/>
-            <pc:sldMk cId="305650755" sldId="3668"/>
-            <ac:spMk id="3" creationId="{2E0D9726-2DE5-DD4F-8BB9-4F07F93CEE25}"/>
-          </ac:spMkLst>
-        </pc:spChg>
-        <pc:spChg chg="add del mod">
-          <ac:chgData name="Chris Pavlinovich" userId="9a9a62b5-5996-4596-85d8-0c147ac5ab4c" providerId="ADAL" clId="{79A8C479-5594-4A85-BD3F-160DC631008E}" dt="2026-06-22T02:34:43.507" v="39" actId="478"/>
-          <ac:spMkLst>
-            <pc:docMk/>
-            <pc:sldMk cId="305650755" sldId="3668"/>
-            <ac:spMk id="5" creationId="{39FDD0B6-0B8E-2F58-BBE8-BCF706EC446B}"/>
-          </ac:spMkLst>
-        </pc:spChg>
-        <pc:spChg chg="del">
-          <ac:chgData name="Chris Pavlinovich" userId="9a9a62b5-5996-4596-85d8-0c147ac5ab4c" providerId="ADAL" clId="{79A8C479-5594-4A85-BD3F-160DC631008E}" dt="2026-06-22T02:21:38.764" v="31" actId="478"/>
-          <ac:spMkLst>
-            <pc:docMk/>
-            <pc:sldMk cId="305650755" sldId="3668"/>
-            <ac:spMk id="5" creationId="{F04B4038-584F-81CD-AB5F-CCFD769FFF8B}"/>
-          </ac:spMkLst>
-        </pc:spChg>
-        <pc:spChg chg="add mod">
-          <ac:chgData name="Chris Pavlinovich" userId="9a9a62b5-5996-4596-85d8-0c147ac5ab4c" providerId="ADAL" clId="{79A8C479-5594-4A85-BD3F-160DC631008E}" dt="2026-06-22T02:35:46.159" v="46" actId="20577"/>
-          <ac:spMkLst>
-            <pc:docMk/>
-            <pc:sldMk cId="305650755" sldId="3668"/>
-            <ac:spMk id="6" creationId="{5EF8B253-9AAA-FE08-1EE7-63A28388F15B}"/>
-          </ac:spMkLst>
-        </pc:spChg>
-      </pc:sldChg>
-      <pc:sldChg chg="addSp delSp modSp mod">
-        <pc:chgData name="Chris Pavlinovich" userId="9a9a62b5-5996-4596-85d8-0c147ac5ab4c" providerId="ADAL" clId="{79A8C479-5594-4A85-BD3F-160DC631008E}" dt="2026-06-22T02:36:39.700" v="53" actId="20577"/>
-        <pc:sldMkLst>
-          <pc:docMk/>
-          <pc:sldMk cId="2689087596" sldId="3669"/>
-        </pc:sldMkLst>
-        <pc:spChg chg="del">
-          <ac:chgData name="Chris Pavlinovich" userId="9a9a62b5-5996-4596-85d8-0c147ac5ab4c" providerId="ADAL" clId="{79A8C479-5594-4A85-BD3F-160DC631008E}" dt="2026-06-22T02:36:00.474" v="47" actId="478"/>
-          <ac:spMkLst>
-            <pc:docMk/>
-            <pc:sldMk cId="2689087596" sldId="3669"/>
-            <ac:spMk id="3" creationId="{2E0D9726-2DE5-DD4F-8BB9-4F07F93CEE25}"/>
-          </ac:spMkLst>
-        </pc:spChg>
-        <pc:spChg chg="add del mod">
-          <ac:chgData name="Chris Pavlinovich" userId="9a9a62b5-5996-4596-85d8-0c147ac5ab4c" providerId="ADAL" clId="{79A8C479-5594-4A85-BD3F-160DC631008E}" dt="2026-06-22T02:36:04.959" v="48" actId="478"/>
-          <ac:spMkLst>
-            <pc:docMk/>
-            <pc:sldMk cId="2689087596" sldId="3669"/>
-            <ac:spMk id="5" creationId="{58E5E285-7A60-F586-5FDF-AF15284AF49C}"/>
-          </ac:spMkLst>
-        </pc:spChg>
-        <pc:spChg chg="del">
-          <ac:chgData name="Chris Pavlinovich" userId="9a9a62b5-5996-4596-85d8-0c147ac5ab4c" providerId="ADAL" clId="{79A8C479-5594-4A85-BD3F-160DC631008E}" dt="2026-06-22T02:21:45.677" v="32" actId="478"/>
-          <ac:spMkLst>
-            <pc:docMk/>
-            <pc:sldMk cId="2689087596" sldId="3669"/>
-            <ac:spMk id="5" creationId="{F04B4038-584F-81CD-AB5F-CCFD769FFF8B}"/>
-          </ac:spMkLst>
-        </pc:spChg>
-        <pc:spChg chg="add mod">
-          <ac:chgData name="Chris Pavlinovich" userId="9a9a62b5-5996-4596-85d8-0c147ac5ab4c" providerId="ADAL" clId="{79A8C479-5594-4A85-BD3F-160DC631008E}" dt="2026-06-22T02:36:39.700" v="53" actId="20577"/>
-          <ac:spMkLst>
-            <pc:docMk/>
-            <pc:sldMk cId="2689087596" sldId="3669"/>
-            <ac:spMk id="6" creationId="{01BDD19F-C9EF-F361-65DE-5F30E27113A1}"/>
-          </ac:spMkLst>
-        </pc:spChg>
-      </pc:sldChg>
-      <pc:sldChg chg="addSp delSp modSp mod">
-        <pc:chgData name="Chris Pavlinovich" userId="9a9a62b5-5996-4596-85d8-0c147ac5ab4c" providerId="ADAL" clId="{79A8C479-5594-4A85-BD3F-160DC631008E}" dt="2026-06-22T02:45:31.349" v="183" actId="113"/>
-        <pc:sldMkLst>
-          <pc:docMk/>
-          <pc:sldMk cId="4020006647" sldId="3670"/>
-        </pc:sldMkLst>
-        <pc:spChg chg="del mod">
-          <ac:chgData name="Chris Pavlinovich" userId="9a9a62b5-5996-4596-85d8-0c147ac5ab4c" providerId="ADAL" clId="{79A8C479-5594-4A85-BD3F-160DC631008E}" dt="2026-06-22T02:40:14.935" v="101" actId="478"/>
-          <ac:spMkLst>
-            <pc:docMk/>
-            <pc:sldMk cId="4020006647" sldId="3670"/>
-            <ac:spMk id="3" creationId="{2E0D9726-2DE5-DD4F-8BB9-4F07F93CEE25}"/>
-          </ac:spMkLst>
-        </pc:spChg>
-        <pc:spChg chg="add del mod">
-          <ac:chgData name="Chris Pavlinovich" userId="9a9a62b5-5996-4596-85d8-0c147ac5ab4c" providerId="ADAL" clId="{79A8C479-5594-4A85-BD3F-160DC631008E}" dt="2026-06-22T02:40:19.040" v="102" actId="478"/>
-          <ac:spMkLst>
-            <pc:docMk/>
-            <pc:sldMk cId="4020006647" sldId="3670"/>
-            <ac:spMk id="5" creationId="{A7E662FF-13F0-FBD6-3D63-5BD6B00C0323}"/>
-          </ac:spMkLst>
-        </pc:spChg>
-        <pc:spChg chg="del">
-          <ac:chgData name="Chris Pavlinovich" userId="9a9a62b5-5996-4596-85d8-0c147ac5ab4c" providerId="ADAL" clId="{79A8C479-5594-4A85-BD3F-160DC631008E}" dt="2026-06-22T02:22:01.594" v="34" actId="478"/>
-          <ac:spMkLst>
-            <pc:docMk/>
-            <pc:sldMk cId="4020006647" sldId="3670"/>
-            <ac:spMk id="5" creationId="{F04B4038-584F-81CD-AB5F-CCFD769FFF8B}"/>
-          </ac:spMkLst>
-        </pc:spChg>
-        <pc:spChg chg="add mod">
-          <ac:chgData name="Chris Pavlinovich" userId="9a9a62b5-5996-4596-85d8-0c147ac5ab4c" providerId="ADAL" clId="{79A8C479-5594-4A85-BD3F-160DC631008E}" dt="2026-06-22T02:45:31.349" v="183" actId="113"/>
-          <ac:spMkLst>
-            <pc:docMk/>
-            <pc:sldMk cId="4020006647" sldId="3670"/>
-            <ac:spMk id="6" creationId="{BDF56D42-2B01-C24B-E0E0-7C01F8509242}"/>
-          </ac:spMkLst>
-        </pc:spChg>
-      </pc:sldChg>
-      <pc:sldChg chg="addSp delSp modSp add mod">
-        <pc:chgData name="Chris Pavlinovich" userId="9a9a62b5-5996-4596-85d8-0c147ac5ab4c" providerId="ADAL" clId="{79A8C479-5594-4A85-BD3F-160DC631008E}" dt="2026-06-22T02:55:04.137" v="310" actId="113"/>
-        <pc:sldMkLst>
-          <pc:docMk/>
-          <pc:sldMk cId="3639955807" sldId="3671"/>
-        </pc:sldMkLst>
-        <pc:spChg chg="mod">
-          <ac:chgData name="Chris Pavlinovich" userId="9a9a62b5-5996-4596-85d8-0c147ac5ab4c" providerId="ADAL" clId="{79A8C479-5594-4A85-BD3F-160DC631008E}" dt="2026-06-22T01:45:20.433" v="7" actId="6549"/>
-          <ac:spMkLst>
-            <pc:docMk/>
-            <pc:sldMk cId="3639955807" sldId="3671"/>
-            <ac:spMk id="2" creationId="{1F55B25A-8220-7C00-8AFF-B2D1DED6DEA1}"/>
-          </ac:spMkLst>
-        </pc:spChg>
-        <pc:spChg chg="del">
-          <ac:chgData name="Chris Pavlinovich" userId="9a9a62b5-5996-4596-85d8-0c147ac5ab4c" providerId="ADAL" clId="{79A8C479-5594-4A85-BD3F-160DC631008E}" dt="2026-06-22T02:22:23.660" v="36" actId="478"/>
-          <ac:spMkLst>
-            <pc:docMk/>
-            <pc:sldMk cId="3639955807" sldId="3671"/>
-            <ac:spMk id="3" creationId="{42A420A7-8232-9559-7F7A-E26B11E1D117}"/>
-          </ac:spMkLst>
-        </pc:spChg>
-        <pc:spChg chg="add mod">
-          <ac:chgData name="Chris Pavlinovich" userId="9a9a62b5-5996-4596-85d8-0c147ac5ab4c" providerId="ADAL" clId="{79A8C479-5594-4A85-BD3F-160DC631008E}" dt="2026-06-22T02:55:04.137" v="310" actId="113"/>
-          <ac:spMkLst>
-            <pc:docMk/>
-            <pc:sldMk cId="3639955807" sldId="3671"/>
-            <ac:spMk id="3" creationId="{5B964B81-5724-7D25-162E-440E723A01D9}"/>
-          </ac:spMkLst>
-        </pc:spChg>
-        <pc:graphicFrameChg chg="del mod modGraphic">
-          <ac:chgData name="Chris Pavlinovich" userId="9a9a62b5-5996-4596-85d8-0c147ac5ab4c" providerId="ADAL" clId="{79A8C479-5594-4A85-BD3F-160DC631008E}" dt="2026-06-22T02:47:40.842" v="215" actId="478"/>
-          <ac:graphicFrameMkLst>
-            <pc:docMk/>
-            <pc:sldMk cId="3639955807" sldId="3671"/>
-            <ac:graphicFrameMk id="5" creationId="{2980540D-B378-40D9-0E1B-5609FBEF418D}"/>
-          </ac:graphicFrameMkLst>
-        </pc:graphicFrameChg>
-        <pc:graphicFrameChg chg="del">
-          <ac:chgData name="Chris Pavlinovich" userId="9a9a62b5-5996-4596-85d8-0c147ac5ab4c" providerId="ADAL" clId="{79A8C479-5594-4A85-BD3F-160DC631008E}" dt="2026-06-22T01:46:26.199" v="12" actId="478"/>
-          <ac:graphicFrameMkLst>
-            <pc:docMk/>
-            <pc:sldMk cId="3639955807" sldId="3671"/>
-            <ac:graphicFrameMk id="7" creationId="{BF17A271-1541-9E8B-63C4-0484326E52E1}"/>
-          </ac:graphicFrameMkLst>
-        </pc:graphicFrameChg>
-        <pc:graphicFrameChg chg="del">
-          <ac:chgData name="Chris Pavlinovich" userId="9a9a62b5-5996-4596-85d8-0c147ac5ab4c" providerId="ADAL" clId="{79A8C479-5594-4A85-BD3F-160DC631008E}" dt="2026-06-22T01:46:20.588" v="11" actId="478"/>
-          <ac:graphicFrameMkLst>
-            <pc:docMk/>
-            <pc:sldMk cId="3639955807" sldId="3671"/>
-            <ac:graphicFrameMk id="8" creationId="{251DFFC7-A842-2CE5-BBBA-3942F4F06BB9}"/>
-          </ac:graphicFrameMkLst>
-        </pc:graphicFrameChg>
-      </pc:sldChg>
-      <pc:sldChg chg="addSp delSp modSp add mod">
-        <pc:chgData name="Chris Pavlinovich" userId="9a9a62b5-5996-4596-85d8-0c147ac5ab4c" providerId="ADAL" clId="{79A8C479-5594-4A85-BD3F-160DC631008E}" dt="2026-06-22T02:54:22.632" v="303" actId="20577"/>
-        <pc:sldMkLst>
-          <pc:docMk/>
-          <pc:sldMk cId="1854433194" sldId="3672"/>
-        </pc:sldMkLst>
-        <pc:spChg chg="mod">
-          <ac:chgData name="Chris Pavlinovich" userId="9a9a62b5-5996-4596-85d8-0c147ac5ab4c" providerId="ADAL" clId="{79A8C479-5594-4A85-BD3F-160DC631008E}" dt="2026-06-22T02:47:51.806" v="217" actId="20577"/>
-          <ac:spMkLst>
-            <pc:docMk/>
-            <pc:sldMk cId="1854433194" sldId="3672"/>
-            <ac:spMk id="2" creationId="{E6085265-FC4A-DFD8-4ECC-8CABB0EA2AD9}"/>
-          </ac:spMkLst>
-        </pc:spChg>
-        <pc:spChg chg="add mod">
-          <ac:chgData name="Chris Pavlinovich" userId="9a9a62b5-5996-4596-85d8-0c147ac5ab4c" providerId="ADAL" clId="{79A8C479-5594-4A85-BD3F-160DC631008E}" dt="2026-06-22T02:54:22.632" v="303" actId="20577"/>
-          <ac:spMkLst>
-            <pc:docMk/>
-            <pc:sldMk cId="1854433194" sldId="3672"/>
-            <ac:spMk id="3" creationId="{69027C4C-647A-775A-6585-AB3492B00AAC}"/>
-          </ac:spMkLst>
-        </pc:spChg>
-        <pc:spChg chg="del">
-          <ac:chgData name="Chris Pavlinovich" userId="9a9a62b5-5996-4596-85d8-0c147ac5ab4c" providerId="ADAL" clId="{79A8C479-5594-4A85-BD3F-160DC631008E}" dt="2026-06-22T02:22:18.483" v="35" actId="478"/>
-          <ac:spMkLst>
-            <pc:docMk/>
-            <pc:sldMk cId="1854433194" sldId="3672"/>
-            <ac:spMk id="3" creationId="{D782CBEC-4989-533C-7556-6918ADE937D0}"/>
-          </ac:spMkLst>
-        </pc:spChg>
-        <pc:spChg chg="add mod">
-          <ac:chgData name="Chris Pavlinovich" userId="9a9a62b5-5996-4596-85d8-0c147ac5ab4c" providerId="ADAL" clId="{79A8C479-5594-4A85-BD3F-160DC631008E}" dt="2026-06-22T02:48:11.989" v="220"/>
-          <ac:spMkLst>
-            <pc:docMk/>
-            <pc:sldMk cId="1854433194" sldId="3672"/>
-            <ac:spMk id="5" creationId="{036F7C2F-AB6F-AFED-BE7F-9789A073C30B}"/>
-          </ac:spMkLst>
-        </pc:spChg>
-        <pc:graphicFrameChg chg="del">
-          <ac:chgData name="Chris Pavlinovich" userId="9a9a62b5-5996-4596-85d8-0c147ac5ab4c" providerId="ADAL" clId="{79A8C479-5594-4A85-BD3F-160DC631008E}" dt="2026-06-22T01:46:09.735" v="9" actId="478"/>
-          <ac:graphicFrameMkLst>
-            <pc:docMk/>
-            <pc:sldMk cId="1854433194" sldId="3672"/>
-            <ac:graphicFrameMk id="5" creationId="{D2B51567-7C96-3C71-E2E7-8B8A20215AE3}"/>
-          </ac:graphicFrameMkLst>
-        </pc:graphicFrameChg>
-        <pc:graphicFrameChg chg="del mod">
-          <ac:chgData name="Chris Pavlinovich" userId="9a9a62b5-5996-4596-85d8-0c147ac5ab4c" providerId="ADAL" clId="{79A8C479-5594-4A85-BD3F-160DC631008E}" dt="2026-06-22T02:47:46.722" v="216" actId="478"/>
-          <ac:graphicFrameMkLst>
-            <pc:docMk/>
-            <pc:sldMk cId="1854433194" sldId="3672"/>
-            <ac:graphicFrameMk id="7" creationId="{DF5CBAED-9C8F-5421-E2C8-DF3CDCB9FB05}"/>
-          </ac:graphicFrameMkLst>
-        </pc:graphicFrameChg>
-        <pc:graphicFrameChg chg="del">
-          <ac:chgData name="Chris Pavlinovich" userId="9a9a62b5-5996-4596-85d8-0c147ac5ab4c" providerId="ADAL" clId="{79A8C479-5594-4A85-BD3F-160DC631008E}" dt="2026-06-22T01:46:04.525" v="8" actId="478"/>
-          <ac:graphicFrameMkLst>
-            <pc:docMk/>
-            <pc:sldMk cId="1854433194" sldId="3672"/>
-            <ac:graphicFrameMk id="8" creationId="{A44AD3D0-F59F-37E3-2764-23E80E2C8B71}"/>
-          </ac:graphicFrameMkLst>
-        </pc:graphicFrameChg>
-      </pc:sldChg>
-    </pc:docChg>
-  </pc:docChgLst>
-</pc:chgInfo>
 </file>
 
 <file path=ppt/notesMasters/notesMaster1.xml><?xml version="1.0" encoding="utf-8"?>
@@ -645,7 +234,7 @@
           <a:p>
             <a:fld id="{CD74376D-74B9-6547-AA3E-A7DC2BEFB314}" type="datetimeFigureOut">
               <a:rPr lang="en-US" smtClean="0"/>
-              <a:t>6/22/2026</a:t>
+              <a:t>6/23/2026</a:t>
             </a:fld>
             <a:endParaRPr lang="en-US"/>
           </a:p>
@@ -1199,110 +788,6 @@
     <p:extLst>
       <p:ext uri="{BB962C8B-B14F-4D97-AF65-F5344CB8AC3E}">
         <p14:creationId xmlns:p14="http://schemas.microsoft.com/office/powerpoint/2010/main" val="4045813814"/>
-      </p:ext>
-    </p:extLst>
-  </p:cSld>
-  <p:clrMapOvr>
-    <a:masterClrMapping/>
-  </p:clrMapOvr>
-</p:notes>
-</file>
-
-<file path=ppt/notesSlides/notesSlide4.xml><?xml version="1.0" encoding="utf-8"?>
-<p:notes xmlns:a="http://schemas.openxmlformats.org/drawingml/2006/main" xmlns:r="http://schemas.openxmlformats.org/officeDocument/2006/relationships" xmlns:p="http://schemas.openxmlformats.org/presentationml/2006/main">
-  <p:cSld>
-    <p:spTree>
-      <p:nvGrpSpPr>
-        <p:cNvPr id="1" name=""/>
-        <p:cNvGrpSpPr/>
-        <p:nvPr/>
-      </p:nvGrpSpPr>
-      <p:grpSpPr>
-        <a:xfrm>
-          <a:off x="0" y="0"/>
-          <a:ext cx="0" cy="0"/>
-          <a:chOff x="0" y="0"/>
-          <a:chExt cx="0" cy="0"/>
-        </a:xfrm>
-      </p:grpSpPr>
-      <p:sp>
-        <p:nvSpPr>
-          <p:cNvPr id="2" name="Slide Image Placeholder 1"/>
-          <p:cNvSpPr>
-            <a:spLocks noGrp="1" noRot="1" noChangeAspect="1"/>
-          </p:cNvSpPr>
-          <p:nvPr>
-            <p:ph type="sldImg"/>
-          </p:nvPr>
-        </p:nvSpPr>
-        <p:spPr/>
-      </p:sp>
-      <p:sp>
-        <p:nvSpPr>
-          <p:cNvPr id="3" name="Notes Placeholder 2"/>
-          <p:cNvSpPr>
-            <a:spLocks noGrp="1"/>
-          </p:cNvSpPr>
-          <p:nvPr>
-            <p:ph type="body" idx="1"/>
-          </p:nvPr>
-        </p:nvSpPr>
-        <p:spPr/>
-        <p:txBody>
-          <a:bodyPr/>
-          <a:lstStyle/>
-          <a:p>
-            <a:pPr marL="0" marR="0" lvl="0" indent="0" algn="l" defTabSz="914400" rtl="0" eaLnBrk="1" fontAlgn="auto" latinLnBrk="0" hangingPunct="1">
-              <a:lnSpc>
-                <a:spcPct val="100000"/>
-              </a:lnSpc>
-              <a:spcBef>
-                <a:spcPts val="0"/>
-              </a:spcBef>
-              <a:spcAft>
-                <a:spcPts val="0"/>
-              </a:spcAft>
-              <a:buClrTx/>
-              <a:buSzTx/>
-              <a:buFontTx/>
-              <a:buNone/>
-              <a:tabLst/>
-              <a:defRPr/>
-            </a:pPr>
-            <a:r>
-              <a:rPr lang="en-AU"/>
-              <a:t>Please remove all blue text once you have entered your data.</a:t>
-            </a:r>
-          </a:p>
-        </p:txBody>
-      </p:sp>
-      <p:sp>
-        <p:nvSpPr>
-          <p:cNvPr id="4" name="Slide Number Placeholder 3"/>
-          <p:cNvSpPr>
-            <a:spLocks noGrp="1"/>
-          </p:cNvSpPr>
-          <p:nvPr>
-            <p:ph type="sldNum" sz="quarter" idx="5"/>
-          </p:nvPr>
-        </p:nvSpPr>
-        <p:spPr/>
-        <p:txBody>
-          <a:bodyPr/>
-          <a:lstStyle/>
-          <a:p>
-            <a:fld id="{98128553-142E-6347-8609-974AC43432CA}" type="slidenum">
-              <a:rPr lang="en-US" smtClean="0"/>
-              <a:t>6</a:t>
-            </a:fld>
-            <a:endParaRPr lang="en-US"/>
-          </a:p>
-        </p:txBody>
-      </p:sp>
-    </p:spTree>
-    <p:extLst>
-      <p:ext uri="{BB962C8B-B14F-4D97-AF65-F5344CB8AC3E}">
-        <p14:creationId xmlns:p14="http://schemas.microsoft.com/office/powerpoint/2010/main" val="418316855"/>
       </p:ext>
     </p:extLst>
   </p:cSld>
@@ -2952,7 +2437,7 @@
               </a:lnSpc>
             </a:pPr>
             <a:r>
-              <a:rPr lang="en-AU" sz="4700" b="1">
+              <a:rPr lang="en-AU" sz="4700" b="1" dirty="0">
                 <a:solidFill>
                   <a:srgbClr val="CE372F"/>
                 </a:solidFill>
@@ -2967,12 +2452,12 @@
               </a:lnSpc>
             </a:pPr>
             <a:r>
-              <a:rPr lang="en-US" sz="2400">
+              <a:rPr lang="en-US" sz="2400" dirty="0">
                 <a:solidFill>
                   <a:schemeClr val="bg1"/>
                 </a:solidFill>
               </a:rPr>
-              <a:t>&lt;Insert project Name&gt;</a:t>
+              <a:t>Contractor Management - Safety</a:t>
             </a:r>
           </a:p>
         </p:txBody>
@@ -3238,7 +2723,7 @@
           <p:nvPr>
             <p:extLst>
               <p:ext uri="{D42A27DB-BD31-4B8C-83A1-F6EECF244321}">
-                <p14:modId xmlns:p14="http://schemas.microsoft.com/office/powerpoint/2010/main" val="3943327685"/>
+                <p14:modId xmlns:p14="http://schemas.microsoft.com/office/powerpoint/2010/main" val="2840767406"/>
               </p:ext>
             </p:extLst>
           </p:nvPr>
@@ -3381,7 +2866,15 @@
                     <a:bodyPr/>
                     <a:lstStyle/>
                     <a:p>
-                      <a:endParaRPr lang="en-AU" sz="800" baseline="0">
+                      <a:r>
+                        <a:rPr lang="en-US" sz="800" baseline="0" dirty="0">
+                          <a:solidFill>
+                            <a:schemeClr val="bg1"/>
+                          </a:solidFill>
+                        </a:rPr>
+                        <a:t>C. Pavlinovich</a:t>
+                      </a:r>
+                      <a:endParaRPr lang="en-AU" sz="800" baseline="0" dirty="0">
                         <a:solidFill>
                           <a:schemeClr val="bg1"/>
                         </a:solidFill>
@@ -3395,7 +2888,15 @@
                     <a:bodyPr/>
                     <a:lstStyle/>
                     <a:p>
-                      <a:endParaRPr lang="en-AU" sz="800" baseline="0">
+                      <a:r>
+                        <a:rPr lang="en-US" sz="800" baseline="0" dirty="0">
+                          <a:solidFill>
+                            <a:schemeClr val="bg1"/>
+                          </a:solidFill>
+                        </a:rPr>
+                        <a:t>23/06/2026</a:t>
+                      </a:r>
+                      <a:endParaRPr lang="en-AU" sz="800" baseline="0" dirty="0">
                         <a:solidFill>
                           <a:schemeClr val="bg1"/>
                         </a:solidFill>
@@ -3478,7 +2979,7 @@
                     <a:bodyPr/>
                     <a:lstStyle/>
                     <a:p>
-                      <a:endParaRPr lang="en-AU" sz="800" baseline="0">
+                      <a:endParaRPr lang="en-AU" sz="800" baseline="0" dirty="0">
                         <a:solidFill>
                           <a:schemeClr val="bg1"/>
                         </a:solidFill>
@@ -3635,11 +3136,110 @@
               <a:buNone/>
             </a:pPr>
             <a:r>
-              <a:rPr lang="en-AU" sz="1200" dirty="0">
-                <a:latin typeface="+mn-lt"/>
-                <a:cs typeface="Times New Roman" panose="02020603050405020304" pitchFamily="18" charset="0"/>
-              </a:rPr>
-              <a:t>MinRes currently manages supplier prequalification through a manual document review process. </a:t>
+              <a:rPr lang="en-AU" sz="1200" dirty="0"/>
+              <a:t>The current supplier prequalification process at Mineral Resources Limited relies on </a:t>
+            </a:r>
+            <a:r>
+              <a:rPr lang="en-AU" sz="1200" b="1" dirty="0"/>
+              <a:t>manual review </a:t>
+            </a:r>
+            <a:r>
+              <a:rPr lang="en-AU" sz="1200" dirty="0"/>
+              <a:t>of supplier documentation by </a:t>
+            </a:r>
+            <a:r>
+              <a:rPr lang="en-AU" sz="1200" b="1" dirty="0"/>
+              <a:t>dedicated personnel</a:t>
+            </a:r>
+            <a:r>
+              <a:rPr lang="en-AU" sz="1200" dirty="0"/>
+              <a:t>. This traditional approach requires human experts to:</a:t>
+            </a:r>
+          </a:p>
+          <a:p>
+            <a:pPr lvl="2" algn="just">
+              <a:lnSpc>
+                <a:spcPct val="150000"/>
+              </a:lnSpc>
+              <a:spcBef>
+                <a:spcPts val="1200"/>
+              </a:spcBef>
+            </a:pPr>
+            <a:r>
+              <a:rPr lang="en-AU" sz="1200" b="1" dirty="0"/>
+              <a:t>Manually</a:t>
+            </a:r>
+            <a:r>
+              <a:rPr lang="en-AU" sz="1200" dirty="0"/>
+              <a:t> read and interpret supplier documentation across </a:t>
+            </a:r>
+            <a:r>
+              <a:rPr lang="en-AU" sz="1200" b="1" dirty="0"/>
+              <a:t>multiple formats</a:t>
+            </a:r>
+          </a:p>
+          <a:p>
+            <a:pPr lvl="2" algn="just">
+              <a:lnSpc>
+                <a:spcPct val="150000"/>
+              </a:lnSpc>
+              <a:spcBef>
+                <a:spcPts val="1200"/>
+              </a:spcBef>
+            </a:pPr>
+            <a:r>
+              <a:rPr lang="en-AU" sz="1200" dirty="0"/>
+              <a:t>Compare supplier systems and processes against </a:t>
+            </a:r>
+            <a:r>
+              <a:rPr lang="en-AU" sz="1200" b="1" dirty="0"/>
+              <a:t>category-specific requirements</a:t>
+            </a:r>
+          </a:p>
+          <a:p>
+            <a:pPr lvl="2" algn="just">
+              <a:lnSpc>
+                <a:spcPct val="150000"/>
+              </a:lnSpc>
+              <a:spcBef>
+                <a:spcPts val="1200"/>
+              </a:spcBef>
+            </a:pPr>
+            <a:r>
+              <a:rPr lang="en-AU" sz="1200" dirty="0"/>
+              <a:t>Assess alignment with the organization's safety management system</a:t>
+            </a:r>
+          </a:p>
+          <a:p>
+            <a:pPr lvl="2" algn="just">
+              <a:lnSpc>
+                <a:spcPct val="150000"/>
+              </a:lnSpc>
+              <a:spcBef>
+                <a:spcPts val="1200"/>
+              </a:spcBef>
+            </a:pPr>
+            <a:r>
+              <a:rPr lang="en-AU" sz="1200" dirty="0"/>
+              <a:t>Benchmark supplier critical risk programs against </a:t>
+            </a:r>
+            <a:r>
+              <a:rPr lang="en-AU" sz="1200" b="1" dirty="0"/>
+              <a:t>Critical Risk standards</a:t>
+            </a:r>
+          </a:p>
+          <a:p>
+            <a:pPr lvl="2" algn="just">
+              <a:lnSpc>
+                <a:spcPct val="150000"/>
+              </a:lnSpc>
+              <a:spcBef>
+                <a:spcPts val="1200"/>
+              </a:spcBef>
+            </a:pPr>
+            <a:r>
+              <a:rPr lang="en-AU" sz="1200" dirty="0"/>
+              <a:t>Generate prequalification reports and verification outcomes</a:t>
             </a:r>
           </a:p>
           <a:p>
@@ -3653,75 +3253,41 @@
               <a:buNone/>
             </a:pPr>
             <a:r>
-              <a:rPr lang="en-AU" sz="1200" dirty="0">
-                <a:latin typeface="+mn-lt"/>
-                <a:cs typeface="Times New Roman" panose="02020603050405020304" pitchFamily="18" charset="0"/>
-              </a:rPr>
-              <a:t>Suppliers submit documentation detailing their systems, processes, and safety management capabilities. </a:t>
-            </a:r>
-          </a:p>
-          <a:p>
-            <a:pPr marL="0" indent="0" algn="just">
-              <a:lnSpc>
-                <a:spcPct val="150000"/>
-              </a:lnSpc>
-              <a:spcBef>
-                <a:spcPts val="1200"/>
-              </a:spcBef>
-              <a:buNone/>
-            </a:pPr>
-            <a:r>
-              <a:rPr lang="en-AU" sz="1200" dirty="0">
-                <a:latin typeface="+mn-lt"/>
-                <a:cs typeface="Times New Roman" panose="02020603050405020304" pitchFamily="18" charset="0"/>
-              </a:rPr>
-              <a:t>Dedicated personnel conduct manual reviews of these submissions, benchmarking supplier capabilities against MinRes category-specific requirements and safety management system standards. </a:t>
-            </a:r>
-          </a:p>
-          <a:p>
-            <a:pPr marL="0" indent="0" algn="just">
-              <a:lnSpc>
-                <a:spcPct val="150000"/>
-              </a:lnSpc>
-              <a:spcBef>
-                <a:spcPts val="1200"/>
-              </a:spcBef>
-              <a:buNone/>
-            </a:pPr>
-            <a:r>
-              <a:rPr lang="en-AU" sz="1200" dirty="0">
-                <a:latin typeface="+mn-lt"/>
-                <a:cs typeface="Times New Roman" panose="02020603050405020304" pitchFamily="18" charset="0"/>
-              </a:rPr>
-              <a:t>The review process involves individual assessments of supplier critical risk programs, compliance verification, and generation of prequalification reports. This manual approach requires significant reviewer expertise to ensure consistency in evaluating supplier documentation and determining prequalification outcomes. </a:t>
-            </a:r>
-          </a:p>
-          <a:p>
-            <a:pPr marL="0" indent="0" algn="just">
-              <a:lnSpc>
-                <a:spcPct val="150000"/>
-              </a:lnSpc>
-              <a:spcBef>
-                <a:spcPts val="1200"/>
-              </a:spcBef>
-              <a:buNone/>
-            </a:pPr>
-            <a:r>
-              <a:rPr lang="en-AU" sz="1200" dirty="0">
-                <a:latin typeface="+mn-lt"/>
-                <a:cs typeface="Times New Roman" panose="02020603050405020304" pitchFamily="18" charset="0"/>
-              </a:rPr>
-              <a:t>The proposed process supports onboarding of new suppliers across MinRes operations, with reviewers responsible for validating supplier alignment with organizational procurement and safety standards before approval for engagement.</a:t>
-            </a:r>
-          </a:p>
-          <a:p>
-            <a:pPr marL="0" indent="0" algn="just">
-              <a:spcBef>
-                <a:spcPts val="600"/>
-              </a:spcBef>
-              <a:buNone/>
-            </a:pPr>
-            <a:endParaRPr lang="en-US" dirty="0"/>
+              <a:rPr lang="en-AU" sz="1200" dirty="0"/>
+              <a:t>The process involves managing </a:t>
+            </a:r>
+            <a:r>
+              <a:rPr lang="en-AU" sz="1200" b="1" dirty="0"/>
+              <a:t>high volumes </a:t>
+            </a:r>
+            <a:r>
+              <a:rPr lang="en-AU" sz="1200" dirty="0"/>
+              <a:t>of new suppliers, with outcomes </a:t>
+            </a:r>
+            <a:r>
+              <a:rPr lang="en-AU" sz="1200" b="1" dirty="0"/>
+              <a:t>dependent on individual reviewer expertise and availability</a:t>
+            </a:r>
+            <a:r>
+              <a:rPr lang="en-AU" sz="1200" dirty="0"/>
+              <a:t>. Prequalification activities create a </a:t>
+            </a:r>
+            <a:r>
+              <a:rPr lang="en-AU" sz="1200" b="1" dirty="0"/>
+              <a:t>gateway</a:t>
+            </a:r>
+            <a:r>
+              <a:rPr lang="en-AU" sz="1200" dirty="0"/>
+              <a:t> </a:t>
+            </a:r>
+            <a:r>
+              <a:rPr lang="en-AU" sz="1200" b="1" dirty="0"/>
+              <a:t>in the supplier onboarding pipeline</a:t>
+            </a:r>
+            <a:r>
+              <a:rPr lang="en-AU" sz="1200" dirty="0"/>
+              <a:t>, with resource allocation focused on document analysis, risk assessment, and compliance verification.</a:t>
+            </a:r>
           </a:p>
         </p:txBody>
       </p:sp>
@@ -3867,7 +3433,107 @@
                 <a:latin typeface="+mn-lt"/>
                 <a:cs typeface="Times New Roman" panose="02020603050405020304" pitchFamily="18" charset="0"/>
               </a:rPr>
-              <a:t>The current supplier prequalification process creates significant operational challenges. </a:t>
+              <a:t>The current supplier prequalification process faces four critical challenges that impact operational efficiency and supplier onboarding:</a:t>
+            </a:r>
+          </a:p>
+          <a:p>
+            <a:pPr marL="530231" lvl="3" indent="0" algn="just">
+              <a:lnSpc>
+                <a:spcPct val="150000"/>
+              </a:lnSpc>
+              <a:spcBef>
+                <a:spcPts val="1200"/>
+              </a:spcBef>
+              <a:buNone/>
+            </a:pPr>
+            <a:r>
+              <a:rPr lang="en-AU" sz="1200" b="1" dirty="0">
+                <a:latin typeface="+mn-lt"/>
+                <a:cs typeface="Times New Roman" panose="02020603050405020304" pitchFamily="18" charset="0"/>
+              </a:rPr>
+              <a:t>Time-intensive operations</a:t>
+            </a:r>
+            <a:r>
+              <a:rPr lang="en-AU" sz="1200" dirty="0">
+                <a:latin typeface="+mn-lt"/>
+                <a:cs typeface="Times New Roman" panose="02020603050405020304" pitchFamily="18" charset="0"/>
+              </a:rPr>
+              <a:t>: Manual review of supplier documentation creates bottlenecks and delays in the onboarding process, preventing rapid supplier engagement when business needs demand it.</a:t>
+            </a:r>
+          </a:p>
+          <a:p>
+            <a:pPr marL="530231" lvl="3" indent="0" algn="just">
+              <a:lnSpc>
+                <a:spcPct val="150000"/>
+              </a:lnSpc>
+              <a:spcBef>
+                <a:spcPts val="1200"/>
+              </a:spcBef>
+              <a:buNone/>
+            </a:pPr>
+            <a:r>
+              <a:rPr lang="en-AU" sz="1200" b="1" dirty="0">
+                <a:latin typeface="+mn-lt"/>
+                <a:cs typeface="Times New Roman" panose="02020603050405020304" pitchFamily="18" charset="0"/>
+              </a:rPr>
+              <a:t>Inconsistent outcomes: </a:t>
+            </a:r>
+            <a:r>
+              <a:rPr lang="en-AU" sz="1200" dirty="0">
+                <a:latin typeface="+mn-lt"/>
+                <a:cs typeface="Times New Roman" panose="02020603050405020304" pitchFamily="18" charset="0"/>
+              </a:rPr>
+              <a:t>Prequalification results vary depending on which individual conducts the review, leading to unpredictable assessment outcomes and potential compliance risks.</a:t>
+            </a:r>
+          </a:p>
+          <a:p>
+            <a:pPr marL="530231" lvl="3" indent="0" algn="just">
+              <a:lnSpc>
+                <a:spcPct val="150000"/>
+              </a:lnSpc>
+              <a:spcBef>
+                <a:spcPts val="1200"/>
+              </a:spcBef>
+              <a:buNone/>
+            </a:pPr>
+            <a:r>
+              <a:rPr lang="en-AU" sz="1200" b="1" dirty="0">
+                <a:latin typeface="+mn-lt"/>
+                <a:cs typeface="Times New Roman" panose="02020603050405020304" pitchFamily="18" charset="0"/>
+              </a:rPr>
+              <a:t>Resource-heavy requirements: </a:t>
+            </a:r>
+            <a:r>
+              <a:rPr lang="en-AU" sz="1200" dirty="0">
+                <a:latin typeface="+mn-lt"/>
+                <a:cs typeface="Times New Roman" panose="02020603050405020304" pitchFamily="18" charset="0"/>
+              </a:rPr>
+              <a:t>Dedicated personnel with specialized expertise are required to manage and execute prequalification's, limiting capacity and creating dependency on specific individuals.</a:t>
+            </a:r>
+          </a:p>
+          <a:p>
+            <a:pPr marL="530231" lvl="3" indent="0" algn="just">
+              <a:lnSpc>
+                <a:spcPct val="150000"/>
+              </a:lnSpc>
+              <a:spcBef>
+                <a:spcPts val="1200"/>
+              </a:spcBef>
+              <a:buNone/>
+            </a:pPr>
+            <a:r>
+              <a:rPr lang="en-AU" sz="1200" b="1" dirty="0">
+                <a:latin typeface="+mn-lt"/>
+                <a:cs typeface="Times New Roman" panose="02020603050405020304" pitchFamily="18" charset="0"/>
+              </a:rPr>
+              <a:t>Unscalable model: </a:t>
+            </a:r>
+            <a:r>
+              <a:rPr lang="en-AU" sz="1200" dirty="0">
+                <a:latin typeface="+mn-lt"/>
+                <a:cs typeface="Times New Roman" panose="02020603050405020304" pitchFamily="18" charset="0"/>
+              </a:rPr>
+              <a:t>The current volume of new suppliers cannot be efficiently managed under the existing manual approach, preventing the business from responding to growth opportunities or market demands.</a:t>
             </a:r>
           </a:p>
           <a:p>
@@ -3885,7 +3551,7 @@
                 <a:latin typeface="+mn-lt"/>
                 <a:cs typeface="Times New Roman" panose="02020603050405020304" pitchFamily="18" charset="0"/>
               </a:rPr>
-              <a:t>Manual review of supplier documentation is time-intensive, creating bottlenecks and delays in supplier onboarding. </a:t>
+              <a:t>These limitations create operational risk through delayed supplier onboarding, inconsistent quality assurance, and an inability to scale operations to meet business demand.</a:t>
             </a:r>
           </a:p>
           <a:p>
@@ -3898,96 +3564,10 @@
               </a:spcBef>
               <a:buNone/>
             </a:pPr>
-            <a:r>
-              <a:rPr lang="en-AU" sz="1200" dirty="0">
-                <a:latin typeface="+mn-lt"/>
-                <a:cs typeface="Times New Roman" panose="02020603050405020304" pitchFamily="18" charset="0"/>
-              </a:rPr>
-              <a:t>Prequalification outcomes are inconsistent, varying based on individual reviewer interpretation and expertise. </a:t>
-            </a:r>
-          </a:p>
-          <a:p>
-            <a:pPr marL="0" indent="0" algn="just">
-              <a:lnSpc>
-                <a:spcPct val="150000"/>
-              </a:lnSpc>
-              <a:spcBef>
-                <a:spcPts val="1200"/>
-              </a:spcBef>
-              <a:buNone/>
-            </a:pPr>
-            <a:r>
-              <a:rPr lang="en-AU" sz="1200" dirty="0">
-                <a:latin typeface="+mn-lt"/>
-                <a:cs typeface="Times New Roman" panose="02020603050405020304" pitchFamily="18" charset="0"/>
-              </a:rPr>
-              <a:t>The process is resource-heavy, requiring dedicated personnel to manage and execute </a:t>
-            </a:r>
-            <a:r>
-              <a:rPr lang="en-AU" sz="1200" dirty="0" err="1">
-                <a:latin typeface="+mn-lt"/>
-                <a:cs typeface="Times New Roman" panose="02020603050405020304" pitchFamily="18" charset="0"/>
-              </a:rPr>
-              <a:t>prequalifications</a:t>
-            </a:r>
-            <a:r>
-              <a:rPr lang="en-AU" sz="1200" dirty="0">
-                <a:latin typeface="+mn-lt"/>
-                <a:cs typeface="Times New Roman" panose="02020603050405020304" pitchFamily="18" charset="0"/>
-              </a:rPr>
-              <a:t> across all stages. </a:t>
-            </a:r>
-          </a:p>
-          <a:p>
-            <a:pPr marL="0" indent="0" algn="just">
-              <a:lnSpc>
-                <a:spcPct val="150000"/>
-              </a:lnSpc>
-              <a:spcBef>
-                <a:spcPts val="1200"/>
-              </a:spcBef>
-              <a:buNone/>
-            </a:pPr>
-            <a:r>
-              <a:rPr lang="en-AU" sz="1200" dirty="0">
-                <a:latin typeface="+mn-lt"/>
-                <a:cs typeface="Times New Roman" panose="02020603050405020304" pitchFamily="18" charset="0"/>
-              </a:rPr>
-              <a:t>As supplier volumes increase, the current manual mode cannot scale efficiently, limiting </a:t>
-            </a:r>
-            <a:r>
-              <a:rPr lang="en-AU" sz="1200" dirty="0" err="1">
-                <a:latin typeface="+mn-lt"/>
-                <a:cs typeface="Times New Roman" panose="02020603050405020304" pitchFamily="18" charset="0"/>
-              </a:rPr>
-              <a:t>MinRes's</a:t>
-            </a:r>
-            <a:r>
-              <a:rPr lang="en-AU" sz="1200" dirty="0">
-                <a:latin typeface="+mn-lt"/>
-                <a:cs typeface="Times New Roman" panose="02020603050405020304" pitchFamily="18" charset="0"/>
-              </a:rPr>
-              <a:t> ability to onboard new suppliers at the required pace. </a:t>
-            </a:r>
-          </a:p>
-          <a:p>
-            <a:pPr marL="0" indent="0" algn="just">
-              <a:lnSpc>
-                <a:spcPct val="150000"/>
-              </a:lnSpc>
-              <a:spcBef>
-                <a:spcPts val="1200"/>
-              </a:spcBef>
-              <a:buNone/>
-            </a:pPr>
-            <a:r>
-              <a:rPr lang="en-AU" sz="1200" dirty="0">
-                <a:latin typeface="+mn-lt"/>
-                <a:cs typeface="Times New Roman" panose="02020603050405020304" pitchFamily="18" charset="0"/>
-              </a:rPr>
-              <a:t>These inefficiencies impact both operational agility and resource allocation across the procurement function.</a:t>
-            </a:r>
-            <a:endParaRPr lang="en-US" dirty="0"/>
+            <a:endParaRPr lang="en-US" sz="1200" dirty="0">
+              <a:latin typeface="+mn-lt"/>
+              <a:cs typeface="Times New Roman" panose="02020603050405020304" pitchFamily="18" charset="0"/>
+            </a:endParaRPr>
           </a:p>
         </p:txBody>
       </p:sp>
@@ -4108,7 +3688,7 @@
         </p:spPr>
         <p:txBody>
           <a:bodyPr vert="horz" lIns="72000" tIns="0" rIns="72000" bIns="0" rtlCol="0" anchor="t">
-            <a:normAutofit/>
+            <a:normAutofit fontScale="92500" lnSpcReduction="20000"/>
           </a:bodyPr>
           <a:lstStyle/>
           <a:p>
@@ -4122,11 +3702,8 @@
               <a:buNone/>
             </a:pPr>
             <a:r>
-              <a:rPr lang="en-AU" sz="1200" dirty="0">
-                <a:latin typeface="+mn-lt"/>
-                <a:cs typeface="Times New Roman" panose="02020603050405020304" pitchFamily="18" charset="0"/>
-              </a:rPr>
-              <a:t>MinRes will develop a phased AI-powered supplier prequalification platform to automate document analysis and assessment. </a:t>
+              <a:rPr lang="en-AU" sz="1200" dirty="0"/>
+              <a:t>An AI-powered platform will automate supplier prequalification document analysis while retaining human oversight at critical decision points. The solution automates document reading, interpretation, and mapping of supplier systems against category-specific requirements and safety management system standards.</a:t>
             </a:r>
           </a:p>
           <a:p>
@@ -4140,11 +3717,86 @@
               <a:buNone/>
             </a:pPr>
             <a:r>
-              <a:rPr lang="en-AU" sz="1200" dirty="0">
-                <a:latin typeface="+mn-lt"/>
-                <a:cs typeface="Times New Roman" panose="02020603050405020304" pitchFamily="18" charset="0"/>
-              </a:rPr>
-              <a:t>Phase 1 establishes the core engine: suppliers submit documentation which the AI reads, interprets, and benchmarks against category-specific and safety management requirements, generating structured prequalification reports with human validation. </a:t>
+              <a:rPr lang="en-AU" sz="1200" b="1" dirty="0"/>
+              <a:t>How it works:</a:t>
+            </a:r>
+          </a:p>
+          <a:p>
+            <a:pPr lvl="3" algn="just">
+              <a:lnSpc>
+                <a:spcPct val="150000"/>
+              </a:lnSpc>
+              <a:spcBef>
+                <a:spcPts val="1200"/>
+              </a:spcBef>
+            </a:pPr>
+            <a:r>
+              <a:rPr lang="en-AU" sz="1200" dirty="0"/>
+              <a:t>Suppliers provide documentation through existing channels</a:t>
+            </a:r>
+          </a:p>
+          <a:p>
+            <a:pPr lvl="3" algn="just">
+              <a:lnSpc>
+                <a:spcPct val="150000"/>
+              </a:lnSpc>
+              <a:spcBef>
+                <a:spcPts val="1200"/>
+              </a:spcBef>
+            </a:pPr>
+            <a:r>
+              <a:rPr lang="en-AU" sz="1200" dirty="0"/>
+              <a:t>The AI platform </a:t>
+            </a:r>
+            <a:r>
+              <a:rPr lang="en-AU" sz="1200" dirty="0" err="1"/>
+              <a:t>analyzes</a:t>
+            </a:r>
+            <a:r>
+              <a:rPr lang="en-AU" sz="1200" dirty="0"/>
+              <a:t> documents and maps supplier systems against requirements</a:t>
+            </a:r>
+          </a:p>
+          <a:p>
+            <a:pPr lvl="3" algn="just">
+              <a:lnSpc>
+                <a:spcPct val="150000"/>
+              </a:lnSpc>
+              <a:spcBef>
+                <a:spcPts val="1200"/>
+              </a:spcBef>
+            </a:pPr>
+            <a:r>
+              <a:rPr lang="en-AU" sz="1200" dirty="0"/>
+              <a:t>The platform benchmarks critical risk programs against organizational standards</a:t>
+            </a:r>
+          </a:p>
+          <a:p>
+            <a:pPr lvl="3" algn="just">
+              <a:lnSpc>
+                <a:spcPct val="150000"/>
+              </a:lnSpc>
+              <a:spcBef>
+                <a:spcPts val="1200"/>
+              </a:spcBef>
+            </a:pPr>
+            <a:r>
+              <a:rPr lang="en-AU" sz="1200" dirty="0"/>
+              <a:t> System generates structured prequalification reports and verification outcomes</a:t>
+            </a:r>
+          </a:p>
+          <a:p>
+            <a:pPr lvl="3" algn="just">
+              <a:lnSpc>
+                <a:spcPct val="150000"/>
+              </a:lnSpc>
+              <a:spcBef>
+                <a:spcPts val="1200"/>
+              </a:spcBef>
+            </a:pPr>
+            <a:r>
+              <a:rPr lang="en-AU" sz="1200" dirty="0"/>
+              <a:t> Human reviewers validate and approve outputs before finalization</a:t>
             </a:r>
           </a:p>
           <a:p>
@@ -4158,11 +3810,62 @@
               <a:buNone/>
             </a:pPr>
             <a:r>
-              <a:rPr lang="en-AU" sz="1200" dirty="0">
-                <a:latin typeface="+mn-lt"/>
-                <a:cs typeface="Times New Roman" panose="02020603050405020304" pitchFamily="18" charset="0"/>
-              </a:rPr>
-              <a:t>Phase 2 automates Critical Risk verification, mapping supplier programs against MinRes standards with automated gap analysis. </a:t>
+              <a:rPr lang="en-AU" sz="1200" b="1" dirty="0"/>
+              <a:t>Phased delivery:</a:t>
+            </a:r>
+          </a:p>
+          <a:p>
+            <a:pPr lvl="3" algn="just">
+              <a:lnSpc>
+                <a:spcPct val="150000"/>
+              </a:lnSpc>
+              <a:spcBef>
+                <a:spcPts val="1200"/>
+              </a:spcBef>
+            </a:pPr>
+            <a:r>
+              <a:rPr lang="en-AU" sz="1200" b="1" dirty="0"/>
+              <a:t>Phase 1: </a:t>
+            </a:r>
+            <a:r>
+              <a:rPr lang="en-AU" sz="1200" dirty="0"/>
+              <a:t>Core prequalification engine with document analysis and automated report generation</a:t>
+            </a:r>
+          </a:p>
+          <a:p>
+            <a:pPr lvl="3" algn="just">
+              <a:lnSpc>
+                <a:spcPct val="150000"/>
+              </a:lnSpc>
+              <a:spcBef>
+                <a:spcPts val="1200"/>
+              </a:spcBef>
+            </a:pPr>
+            <a:r>
+              <a:rPr lang="en-AU" sz="1200" b="1" dirty="0"/>
+              <a:t>Phase 2: </a:t>
+            </a:r>
+            <a:r>
+              <a:rPr lang="en-AU" sz="1200" dirty="0"/>
+              <a:t>Critical Risk verification with automated gap analysis</a:t>
+            </a:r>
+          </a:p>
+          <a:p>
+            <a:pPr lvl="3" algn="just">
+              <a:lnSpc>
+                <a:spcPct val="150000"/>
+              </a:lnSpc>
+              <a:spcBef>
+                <a:spcPts val="1200"/>
+              </a:spcBef>
+            </a:pPr>
+            <a:r>
+              <a:rPr lang="en-AU" sz="1200" b="1" dirty="0"/>
+              <a:t>Phase 3: </a:t>
+            </a:r>
+            <a:r>
+              <a:rPr lang="en-AU" sz="1200" dirty="0"/>
+              <a:t>Supplier-specific overviews and infield verification tool generation</a:t>
             </a:r>
           </a:p>
           <a:p>
@@ -4176,13 +3879,10 @@
               <a:buNone/>
             </a:pPr>
             <a:r>
-              <a:rPr lang="en-AU" sz="1200" dirty="0">
-                <a:latin typeface="+mn-lt"/>
-                <a:cs typeface="Times New Roman" panose="02020603050405020304" pitchFamily="18" charset="0"/>
-              </a:rPr>
-              <a:t>Phase 3 delivers advanced capabilities, generating customized infield verification tools and audit checklists mapped to supplier-specific risk controls. The platform retains human oversight at key decision points while delivering automation, consistency, and scalability across the prequalification lifecycle.</a:t>
-            </a:r>
-            <a:endParaRPr lang="en-US" dirty="0"/>
+              <a:rPr lang="en-AU" sz="1200" dirty="0"/>
+              <a:t>The platform is designed to be self-sufficient, minimizing human input beyond defined touchpoints (supplier contact, document collection, and output validation). An initial trial period will calibrate AI outputs for consistency and accuracy before full deployment</a:t>
+            </a:r>
+            <a:endParaRPr lang="en-US" sz="1200" dirty="0"/>
           </a:p>
         </p:txBody>
       </p:sp>
@@ -4262,13 +3962,13 @@
         </p:nvSpPr>
         <p:spPr>
           <a:xfrm>
-            <a:off x="623889" y="1191492"/>
+            <a:off x="623888" y="1169721"/>
             <a:ext cx="5256000" cy="4869872"/>
           </a:xfrm>
         </p:spPr>
         <p:txBody>
           <a:bodyPr vert="horz" lIns="0" tIns="0" rIns="0" bIns="0" rtlCol="0" anchor="t">
-            <a:normAutofit/>
+            <a:normAutofit fontScale="92500" lnSpcReduction="20000"/>
           </a:bodyPr>
           <a:lstStyle/>
           <a:p>
@@ -4282,7 +3982,7 @@
               <a:buNone/>
             </a:pPr>
             <a:r>
-              <a:rPr lang="en-AU" dirty="0">
+              <a:rPr lang="en-AU" sz="1300" dirty="0">
                 <a:solidFill>
                   <a:schemeClr val="accent1"/>
                 </a:solidFill>
@@ -4293,112 +3993,158 @@
             </a:r>
           </a:p>
           <a:p>
-            <a:pPr marL="0" indent="0">
-              <a:spcBef>
-                <a:spcPts val="600"/>
-              </a:spcBef>
-              <a:buNone/>
-            </a:pPr>
-            <a:r>
-              <a:rPr lang="en-AU" sz="1200" dirty="0">
-                <a:latin typeface="Arial"/>
-                <a:cs typeface="Arial"/>
-              </a:rPr>
-              <a:t>The following is the high-level scope for the DTS Project Delivery team:</a:t>
-            </a:r>
-          </a:p>
-          <a:p>
-            <a:pPr marL="569595" indent="-285750">
+            <a:pPr marL="144145" indent="-144145">
               <a:lnSpc>
                 <a:spcPct val="150000"/>
               </a:lnSpc>
-            </a:pPr>
-            <a:r>
-              <a:rPr lang="en-AU" sz="1200" dirty="0">
-                <a:latin typeface="Arial"/>
-                <a:cs typeface="Arial"/>
-              </a:rPr>
-              <a:t>AI-powered document upload, interpretation, and analysis platform</a:t>
-            </a:r>
-          </a:p>
-          <a:p>
-            <a:pPr marL="569595" indent="-285750">
-              <a:lnSpc>
-                <a:spcPct val="150000"/>
-              </a:lnSpc>
-            </a:pPr>
-            <a:r>
-              <a:rPr lang="en-AU" sz="1200" dirty="0">
-                <a:latin typeface="Arial"/>
-                <a:cs typeface="Arial"/>
-              </a:rPr>
-              <a:t>Automated benchmarking against category-specific requirements and safety management standards</a:t>
-            </a:r>
-          </a:p>
-          <a:p>
-            <a:pPr marL="569595" indent="-285750">
-              <a:lnSpc>
-                <a:spcPct val="150000"/>
-              </a:lnSpc>
-            </a:pPr>
-            <a:r>
-              <a:rPr lang="en-AU" sz="1200" dirty="0">
-                <a:latin typeface="Arial"/>
-                <a:cs typeface="Arial"/>
-              </a:rPr>
-              <a:t>Structured prequalification report generation with human validation workflow- Critical Risk verification and automated gap analysis (Phase 2)</a:t>
-            </a:r>
-          </a:p>
-          <a:p>
-            <a:pPr marL="569595" indent="-285750">
-              <a:lnSpc>
-                <a:spcPct val="150000"/>
-              </a:lnSpc>
-            </a:pPr>
-            <a:r>
-              <a:rPr lang="en-AU" sz="1200" dirty="0">
-                <a:latin typeface="Arial"/>
-                <a:cs typeface="Arial"/>
-              </a:rPr>
-              <a:t>Custom infield verification tool generation: audit checklists and assessment frameworks (Phase 3)</a:t>
-            </a:r>
-          </a:p>
-          <a:p>
-            <a:pPr marL="569595" indent="-285750">
-              <a:lnSpc>
-                <a:spcPct val="150000"/>
-              </a:lnSpc>
-            </a:pPr>
-            <a:r>
-              <a:rPr lang="en-AU" sz="1200" dirty="0">
-                <a:latin typeface="Arial"/>
-                <a:cs typeface="Arial"/>
-              </a:rPr>
-              <a:t> Integration with existing supplier management workflows- Audit trail and compliance tracking capabilities</a:t>
-            </a:r>
-          </a:p>
-          <a:p>
-            <a:pPr marL="569595" indent="-285750">
-              <a:lnSpc>
-                <a:spcPct val="150000"/>
-              </a:lnSpc>
-            </a:pPr>
-            <a:r>
-              <a:rPr lang="en-AU" sz="1200" dirty="0">
-                <a:latin typeface="Arial"/>
-                <a:cs typeface="Arial"/>
-              </a:rPr>
-              <a:t>Trial period for testing, calibration, and refinement of AI outputs</a:t>
-            </a:r>
-            <a:endParaRPr lang="en-AU" sz="1200" dirty="0"/>
-          </a:p>
-          <a:p>
-            <a:pPr marL="144145" indent="-144145">
               <a:spcBef>
                 <a:spcPts val="600"/>
               </a:spcBef>
             </a:pPr>
-            <a:endParaRPr lang="en-AU" dirty="0"/>
+            <a:r>
+              <a:rPr lang="en-AU" sz="1300" dirty="0"/>
+              <a:t>Development of AI-powered document analysis engine for supplier prequalification</a:t>
+            </a:r>
+          </a:p>
+          <a:p>
+            <a:pPr marL="144145" indent="-144145">
+              <a:lnSpc>
+                <a:spcPct val="150000"/>
+              </a:lnSpc>
+              <a:spcBef>
+                <a:spcPts val="600"/>
+              </a:spcBef>
+            </a:pPr>
+            <a:r>
+              <a:rPr lang="en-AU" sz="1300" dirty="0"/>
+              <a:t>Automated mapping of supplier systems and processes against category-specific requirements</a:t>
+            </a:r>
+          </a:p>
+          <a:p>
+            <a:pPr marL="144145" indent="-144145">
+              <a:lnSpc>
+                <a:spcPct val="150000"/>
+              </a:lnSpc>
+              <a:spcBef>
+                <a:spcPts val="600"/>
+              </a:spcBef>
+            </a:pPr>
+            <a:r>
+              <a:rPr lang="en-AU" sz="1300" dirty="0"/>
+              <a:t>Automated benchmarking against organizational safety management system</a:t>
+            </a:r>
+          </a:p>
+          <a:p>
+            <a:pPr marL="144145" indent="-144145">
+              <a:lnSpc>
+                <a:spcPct val="150000"/>
+              </a:lnSpc>
+              <a:spcBef>
+                <a:spcPts val="600"/>
+              </a:spcBef>
+            </a:pPr>
+            <a:r>
+              <a:rPr lang="en-AU" sz="1300" dirty="0"/>
+              <a:t>Critical Risk verification capability with automated gap analysis</a:t>
+            </a:r>
+          </a:p>
+          <a:p>
+            <a:pPr marL="144145" indent="-144145">
+              <a:lnSpc>
+                <a:spcPct val="150000"/>
+              </a:lnSpc>
+              <a:spcBef>
+                <a:spcPts val="600"/>
+              </a:spcBef>
+            </a:pPr>
+            <a:r>
+              <a:rPr lang="en-AU" sz="1300" dirty="0"/>
+              <a:t>Generation of structured prequalification reports and verification outcomes</a:t>
+            </a:r>
+          </a:p>
+          <a:p>
+            <a:pPr marL="144145" indent="-144145">
+              <a:lnSpc>
+                <a:spcPct val="150000"/>
+              </a:lnSpc>
+              <a:spcBef>
+                <a:spcPts val="600"/>
+              </a:spcBef>
+            </a:pPr>
+            <a:r>
+              <a:rPr lang="en-AU" sz="1300" dirty="0"/>
+              <a:t>Human review and approval workflow for AI-generated outputs</a:t>
+            </a:r>
+          </a:p>
+          <a:p>
+            <a:pPr marL="144145" indent="-144145">
+              <a:lnSpc>
+                <a:spcPct val="150000"/>
+              </a:lnSpc>
+              <a:spcBef>
+                <a:spcPts val="600"/>
+              </a:spcBef>
+            </a:pPr>
+            <a:r>
+              <a:rPr lang="en-AU" sz="1300" dirty="0"/>
+              <a:t>Trial and calibration period for AI output refinement</a:t>
+            </a:r>
+          </a:p>
+          <a:p>
+            <a:pPr marL="144145" indent="-144145">
+              <a:lnSpc>
+                <a:spcPct val="150000"/>
+              </a:lnSpc>
+              <a:spcBef>
+                <a:spcPts val="600"/>
+              </a:spcBef>
+            </a:pPr>
+            <a:r>
+              <a:rPr lang="en-AU" sz="1300" dirty="0"/>
+              <a:t>Supplier-specific overview and profiling capability</a:t>
+            </a:r>
+          </a:p>
+          <a:p>
+            <a:pPr marL="144145" indent="-144145">
+              <a:lnSpc>
+                <a:spcPct val="150000"/>
+              </a:lnSpc>
+              <a:spcBef>
+                <a:spcPts val="600"/>
+              </a:spcBef>
+            </a:pPr>
+            <a:r>
+              <a:rPr lang="en-AU" sz="1300" dirty="0"/>
+              <a:t>Generation of customized infield audit checklists and assessment frameworks</a:t>
+            </a:r>
+          </a:p>
+          <a:p>
+            <a:pPr marL="144145" indent="-144145">
+              <a:lnSpc>
+                <a:spcPct val="150000"/>
+              </a:lnSpc>
+              <a:spcBef>
+                <a:spcPts val="600"/>
+              </a:spcBef>
+            </a:pPr>
+            <a:r>
+              <a:rPr lang="en-AU" sz="1300" dirty="0"/>
+              <a:t>Support for multiple document formats and unstructured supplier documentation</a:t>
+            </a:r>
+          </a:p>
+          <a:p>
+            <a:pPr marL="144145" indent="-144145">
+              <a:lnSpc>
+                <a:spcPct val="150000"/>
+              </a:lnSpc>
+              <a:spcBef>
+                <a:spcPts val="600"/>
+              </a:spcBef>
+            </a:pPr>
+            <a:r>
+              <a:rPr lang="en-AU" sz="1300" dirty="0"/>
+              <a:t>Audit trail of AI decisions and human validations</a:t>
+            </a:r>
           </a:p>
           <a:p>
             <a:pPr marL="317500" lvl="1" indent="-172720">
@@ -4502,7 +4248,7 @@
               <a:buNone/>
             </a:pPr>
             <a:r>
-              <a:rPr lang="en-AU" dirty="0">
+              <a:rPr lang="en-AU" sz="1200" dirty="0">
                 <a:solidFill>
                   <a:schemeClr val="accent1"/>
                 </a:solidFill>
@@ -4526,7 +4272,7 @@
                 <a:latin typeface="Arial"/>
                 <a:cs typeface="Arial"/>
               </a:rPr>
-              <a:t>Initial supplier contact and document collection (remains manual touchpoint)</a:t>
+              <a:t>Supplier contact and initial document collection (remains human-executed)</a:t>
             </a:r>
           </a:p>
           <a:p>
@@ -4543,7 +4289,7 @@
                 <a:latin typeface="Arial"/>
                 <a:cs typeface="Arial"/>
               </a:rPr>
-              <a:t>Complete replacement of human review and professional judgement</a:t>
+              <a:t>Replacement of human verification at key decision points</a:t>
             </a:r>
           </a:p>
           <a:p>
@@ -4560,7 +4306,7 @@
                 <a:latin typeface="Arial"/>
                 <a:cs typeface="Arial"/>
               </a:rPr>
-              <a:t>Supplier performance monitoring and ongoing assurance (future capability)</a:t>
+              <a:t>Integration with external supplier management platforms (Phase 1)</a:t>
             </a:r>
           </a:p>
           <a:p>
@@ -4577,7 +4323,7 @@
                 <a:latin typeface="Arial"/>
                 <a:cs typeface="Arial"/>
               </a:rPr>
-              <a:t>Modifications to existing supplier management systems- Supplier relationship management functions</a:t>
+              <a:t>Real-time supplier performance monitoring</a:t>
             </a:r>
           </a:p>
           <a:p>
@@ -4594,7 +4340,7 @@
                 <a:latin typeface="Arial"/>
                 <a:cs typeface="Arial"/>
               </a:rPr>
-              <a:t>Contract negotiation and commercial terms</a:t>
+              <a:t>Automated supplier risk scoring beyond prequalification phase</a:t>
             </a:r>
           </a:p>
           <a:p>
@@ -4611,7 +4357,41 @@
                 <a:latin typeface="Arial"/>
                 <a:cs typeface="Arial"/>
               </a:rPr>
-              <a:t>Supplier payment and invoice processing</a:t>
+              <a:t>Supplier relationship management capabilities</a:t>
+            </a:r>
+          </a:p>
+          <a:p>
+            <a:pPr marL="144145" indent="-144145">
+              <a:lnSpc>
+                <a:spcPct val="150000"/>
+              </a:lnSpc>
+              <a:spcBef>
+                <a:spcPts val="600"/>
+              </a:spcBef>
+            </a:pPr>
+            <a:r>
+              <a:rPr lang="en-AU" sz="1200" dirty="0">
+                <a:latin typeface="Arial"/>
+                <a:cs typeface="Arial"/>
+              </a:rPr>
+              <a:t>Contract management functionality</a:t>
+            </a:r>
+          </a:p>
+          <a:p>
+            <a:pPr marL="144145" indent="-144145">
+              <a:lnSpc>
+                <a:spcPct val="150000"/>
+              </a:lnSpc>
+              <a:spcBef>
+                <a:spcPts val="600"/>
+              </a:spcBef>
+            </a:pPr>
+            <a:r>
+              <a:rPr lang="en-AU" sz="1200" dirty="0">
+                <a:latin typeface="Arial"/>
+                <a:cs typeface="Arial"/>
+              </a:rPr>
+              <a:t>Supplier payment or financial processing</a:t>
             </a:r>
             <a:endParaRPr lang="en-US" sz="1200" dirty="0">
               <a:latin typeface="Arial"/>
@@ -4655,7 +4435,7 @@
           <p:cNvPr id="2" name="Title 1">
             <a:extLst>
               <a:ext uri="{FF2B5EF4-FFF2-40B4-BE49-F238E27FC236}">
-                <a16:creationId xmlns:a16="http://schemas.microsoft.com/office/drawing/2014/main" id="{7E748469-ABB5-3342-B173-EEB52D88371F}"/>
+                <a16:creationId xmlns:a16="http://schemas.microsoft.com/office/drawing/2014/main" id="{5D3B1534-FEA8-E466-0613-85746D640261}"/>
               </a:ext>
             </a:extLst>
           </p:cNvPr>
@@ -4672,31 +4452,18 @@
           <a:lstStyle/>
           <a:p>
             <a:r>
-              <a:rPr lang="en-US">
-                <a:solidFill>
-                  <a:srgbClr val="CE372F"/>
-                </a:solidFill>
-                <a:latin typeface="Arial"/>
-                <a:cs typeface="Arial"/>
-              </a:rPr>
-              <a:t>Business </a:t>
-            </a:r>
-            <a:r>
-              <a:rPr lang="en-US">
-                <a:latin typeface="Arial"/>
-                <a:cs typeface="Arial"/>
-              </a:rPr>
-              <a:t>Benefits / Value</a:t>
+              <a:rPr lang="en-AU" noProof="0" dirty="0"/>
+              <a:t>Business Drivers</a:t>
             </a:r>
           </a:p>
         </p:txBody>
       </p:sp>
       <p:sp>
         <p:nvSpPr>
-          <p:cNvPr id="7" name="Slide Number Placeholder 6">
+          <p:cNvPr id="5" name="Slide Number Placeholder 4">
             <a:extLst>
               <a:ext uri="{FF2B5EF4-FFF2-40B4-BE49-F238E27FC236}">
-                <a16:creationId xmlns:a16="http://schemas.microsoft.com/office/drawing/2014/main" id="{3BA677B6-C3F7-7C04-A4C1-F39311C45BFF}"/>
+                <a16:creationId xmlns:a16="http://schemas.microsoft.com/office/drawing/2014/main" id="{78930CB9-71B9-AB55-CA52-45D6C807488B}"/>
               </a:ext>
             </a:extLst>
           </p:cNvPr>
@@ -4713,233 +4480,955 @@
           <a:lstStyle/>
           <a:p>
             <a:fld id="{4B10911F-F04E-7D45-9841-71E6CFD429FE}" type="slidenum">
-              <a:rPr lang="en-US" smtClean="0"/>
+              <a:rPr lang="en-AU" noProof="0" smtClean="0"/>
               <a:t>6</a:t>
             </a:fld>
-            <a:endParaRPr lang="en-US"/>
+            <a:endParaRPr lang="en-AU" noProof="0" dirty="0"/>
           </a:p>
         </p:txBody>
       </p:sp>
-      <p:sp>
-        <p:nvSpPr>
-          <p:cNvPr id="6" name="Content Placeholder 2">
+      <p:graphicFrame>
+        <p:nvGraphicFramePr>
+          <p:cNvPr id="8" name="Table 7">
             <a:extLst>
               <a:ext uri="{FF2B5EF4-FFF2-40B4-BE49-F238E27FC236}">
-                <a16:creationId xmlns:a16="http://schemas.microsoft.com/office/drawing/2014/main" id="{BDF56D42-2B01-C24B-E0E0-7C01F8509242}"/>
+                <a16:creationId xmlns:a16="http://schemas.microsoft.com/office/drawing/2014/main" id="{085D7A5E-3226-C493-8463-464AD3840322}"/>
               </a:ext>
             </a:extLst>
           </p:cNvPr>
-          <p:cNvSpPr>
-            <a:spLocks noGrp="1"/>
-          </p:cNvSpPr>
+          <p:cNvGraphicFramePr>
+            <a:graphicFrameLocks noGrp="1"/>
+          </p:cNvGraphicFramePr>
           <p:nvPr>
-            <p:ph idx="1"/>
+            <p:extLst>
+              <p:ext uri="{D42A27DB-BD31-4B8C-83A1-F6EECF244321}">
+                <p14:modId xmlns:p14="http://schemas.microsoft.com/office/powerpoint/2010/main" val="3533492386"/>
+              </p:ext>
+            </p:extLst>
           </p:nvPr>
-        </p:nvSpPr>
-        <p:spPr>
-          <a:xfrm>
-            <a:off x="623888" y="1151164"/>
-            <a:ext cx="10873698" cy="4931229"/>
-          </a:xfrm>
-        </p:spPr>
-        <p:txBody>
-          <a:bodyPr vert="horz" lIns="72000" tIns="0" rIns="72000" bIns="0" rtlCol="0" anchor="t">
-            <a:normAutofit/>
-          </a:bodyPr>
-          <a:lstStyle/>
-          <a:p>
-            <a:pPr marL="0" indent="0" algn="just">
-              <a:lnSpc>
-                <a:spcPct val="150000"/>
-              </a:lnSpc>
-              <a:spcBef>
-                <a:spcPts val="1200"/>
-              </a:spcBef>
-              <a:buNone/>
-            </a:pPr>
-            <a:r>
-              <a:rPr lang="en-AU" sz="1200" dirty="0">
-                <a:latin typeface="+mn-lt"/>
-                <a:cs typeface="Times New Roman" panose="02020603050405020304" pitchFamily="18" charset="0"/>
-              </a:rPr>
-              <a:t>If we implement this AI-powered platform, then MinRes will achieve:</a:t>
-            </a:r>
-          </a:p>
-          <a:p>
-            <a:pPr algn="just">
-              <a:lnSpc>
-                <a:spcPct val="150000"/>
-              </a:lnSpc>
-              <a:spcBef>
-                <a:spcPts val="1200"/>
-              </a:spcBef>
-            </a:pPr>
-            <a:r>
-              <a:rPr lang="en-AU" sz="1200" b="1" dirty="0">
-                <a:latin typeface="+mn-lt"/>
-                <a:cs typeface="Times New Roman" panose="02020603050405020304" pitchFamily="18" charset="0"/>
-              </a:rPr>
-              <a:t>Time Reduction: </a:t>
-            </a:r>
-            <a:r>
-              <a:rPr lang="en-AU" sz="1200" dirty="0">
-                <a:latin typeface="+mn-lt"/>
-                <a:cs typeface="Times New Roman" panose="02020603050405020304" pitchFamily="18" charset="0"/>
-              </a:rPr>
-              <a:t>Significant decrease in manual review time per supplier prequalification, accelerating supplier onboarding cycles</a:t>
-            </a:r>
-          </a:p>
-          <a:p>
-            <a:pPr algn="just">
-              <a:lnSpc>
-                <a:spcPct val="150000"/>
-              </a:lnSpc>
-              <a:spcBef>
-                <a:spcPts val="1200"/>
-              </a:spcBef>
-            </a:pPr>
-            <a:r>
-              <a:rPr lang="en-AU" sz="1200" b="1" dirty="0">
-                <a:latin typeface="+mn-lt"/>
-                <a:cs typeface="Times New Roman" panose="02020603050405020304" pitchFamily="18" charset="0"/>
-              </a:rPr>
-              <a:t>Cost Savings: </a:t>
-            </a:r>
-            <a:r>
-              <a:rPr lang="en-AU" sz="1200" dirty="0">
-                <a:latin typeface="+mn-lt"/>
-                <a:cs typeface="Times New Roman" panose="02020603050405020304" pitchFamily="18" charset="0"/>
-              </a:rPr>
-              <a:t>Reduced resource requirements through automation, minimizing need for dedicated prequalification personnel</a:t>
-            </a:r>
-          </a:p>
-          <a:p>
-            <a:pPr algn="just">
-              <a:lnSpc>
-                <a:spcPct val="150000"/>
-              </a:lnSpc>
-              <a:spcBef>
-                <a:spcPts val="1200"/>
-              </a:spcBef>
-            </a:pPr>
-            <a:r>
-              <a:rPr lang="en-AU" sz="1200" b="1" dirty="0">
-                <a:latin typeface="+mn-lt"/>
-                <a:cs typeface="Times New Roman" panose="02020603050405020304" pitchFamily="18" charset="0"/>
-              </a:rPr>
-              <a:t>Consistency Improvement: </a:t>
-            </a:r>
-            <a:r>
-              <a:rPr lang="en-AU" sz="1200" dirty="0">
-                <a:latin typeface="+mn-lt"/>
-                <a:cs typeface="Times New Roman" panose="02020603050405020304" pitchFamily="18" charset="0"/>
-              </a:rPr>
-              <a:t>Standardized assessment outcomes independent of individual reviewer expertise or interpretation</a:t>
-            </a:r>
-          </a:p>
-          <a:p>
-            <a:pPr algn="just">
-              <a:lnSpc>
-                <a:spcPct val="150000"/>
-              </a:lnSpc>
-              <a:spcBef>
-                <a:spcPts val="1200"/>
-              </a:spcBef>
-            </a:pPr>
-            <a:r>
-              <a:rPr lang="en-AU" sz="1200" b="1" dirty="0">
-                <a:latin typeface="+mn-lt"/>
-                <a:cs typeface="Times New Roman" panose="02020603050405020304" pitchFamily="18" charset="0"/>
-              </a:rPr>
-              <a:t>Scalability</a:t>
-            </a:r>
-            <a:r>
-              <a:rPr lang="en-AU" sz="1200" dirty="0">
-                <a:latin typeface="+mn-lt"/>
-                <a:cs typeface="Times New Roman" panose="02020603050405020304" pitchFamily="18" charset="0"/>
-              </a:rPr>
-              <a:t>: Efficient processing of increased supplier volumes without proportional resource increases</a:t>
-            </a:r>
-          </a:p>
-          <a:p>
-            <a:pPr algn="just">
-              <a:lnSpc>
-                <a:spcPct val="150000"/>
-              </a:lnSpc>
-              <a:spcBef>
-                <a:spcPts val="1200"/>
-              </a:spcBef>
-            </a:pPr>
-            <a:r>
-              <a:rPr lang="en-AU" sz="1200" b="1" dirty="0">
-                <a:latin typeface="+mn-lt"/>
-                <a:cs typeface="Times New Roman" panose="02020603050405020304" pitchFamily="18" charset="0"/>
-              </a:rPr>
-              <a:t>Risk Mitigation: </a:t>
-            </a:r>
-            <a:r>
-              <a:rPr lang="en-AU" sz="1200" dirty="0">
-                <a:latin typeface="+mn-lt"/>
-                <a:cs typeface="Times New Roman" panose="02020603050405020304" pitchFamily="18" charset="0"/>
-              </a:rPr>
-              <a:t>Enhanced accuracy in Critical Risk verification and gap analysis, improving supplier safety compliance</a:t>
-            </a:r>
-          </a:p>
-          <a:p>
-            <a:pPr algn="just">
-              <a:lnSpc>
-                <a:spcPct val="150000"/>
-              </a:lnSpc>
-              <a:spcBef>
-                <a:spcPts val="1200"/>
-              </a:spcBef>
-            </a:pPr>
-            <a:r>
-              <a:rPr lang="en-AU" sz="1200" b="1" dirty="0">
-                <a:latin typeface="+mn-lt"/>
-                <a:cs typeface="Times New Roman" panose="02020603050405020304" pitchFamily="18" charset="0"/>
-              </a:rPr>
-              <a:t>Operational Efficiency: </a:t>
-            </a:r>
-            <a:r>
-              <a:rPr lang="en-AU" sz="1200" dirty="0">
-                <a:latin typeface="+mn-lt"/>
-                <a:cs typeface="Times New Roman" panose="02020603050405020304" pitchFamily="18" charset="0"/>
-              </a:rPr>
-              <a:t>Automated generation of field verification tools, enabling faster and more structured supplier audits</a:t>
-            </a:r>
-          </a:p>
-          <a:p>
-            <a:pPr algn="just">
-              <a:lnSpc>
-                <a:spcPct val="150000"/>
-              </a:lnSpc>
-              <a:spcBef>
-                <a:spcPts val="1200"/>
-              </a:spcBef>
-            </a:pPr>
-            <a:r>
-              <a:rPr lang="en-AU" sz="1200" b="1" dirty="0">
-                <a:latin typeface="+mn-lt"/>
-                <a:cs typeface="Times New Roman" panose="02020603050405020304" pitchFamily="18" charset="0"/>
-              </a:rPr>
-              <a:t>Quality Assurance: </a:t>
-            </a:r>
-            <a:r>
-              <a:rPr lang="en-AU" sz="1200" dirty="0">
-                <a:latin typeface="+mn-lt"/>
-                <a:cs typeface="Times New Roman" panose="02020603050405020304" pitchFamily="18" charset="0"/>
-              </a:rPr>
-              <a:t>Maintained human oversight at decision points while reducing manual effort by [XX]%</a:t>
-            </a:r>
-            <a:endParaRPr lang="en-US" dirty="0"/>
-          </a:p>
-        </p:txBody>
-      </p:sp>
+        </p:nvGraphicFramePr>
+        <p:xfrm>
+          <a:off x="327488" y="969146"/>
+          <a:ext cx="11537023" cy="5800186"/>
+        </p:xfrm>
+        <a:graphic>
+          <a:graphicData uri="http://schemas.openxmlformats.org/drawingml/2006/table">
+            <a:tbl>
+              <a:tblPr firstRow="1" bandRow="1">
+                <a:tableStyleId>{5C22544A-7EE6-4342-B048-85BDC9FD1C3A}</a:tableStyleId>
+              </a:tblPr>
+              <a:tblGrid>
+                <a:gridCol w="4443295">
+                  <a:extLst>
+                    <a:ext uri="{9D8B030D-6E8A-4147-A177-3AD203B41FA5}">
+                      <a16:colId xmlns:a16="http://schemas.microsoft.com/office/drawing/2014/main" val="1338830246"/>
+                    </a:ext>
+                  </a:extLst>
+                </a:gridCol>
+                <a:gridCol w="2790907">
+                  <a:extLst>
+                    <a:ext uri="{9D8B030D-6E8A-4147-A177-3AD203B41FA5}">
+                      <a16:colId xmlns:a16="http://schemas.microsoft.com/office/drawing/2014/main" val="4015640779"/>
+                    </a:ext>
+                  </a:extLst>
+                </a:gridCol>
+                <a:gridCol w="4302821">
+                  <a:extLst>
+                    <a:ext uri="{9D8B030D-6E8A-4147-A177-3AD203B41FA5}">
+                      <a16:colId xmlns:a16="http://schemas.microsoft.com/office/drawing/2014/main" val="2116091680"/>
+                    </a:ext>
+                  </a:extLst>
+                </a:gridCol>
+              </a:tblGrid>
+              <a:tr h="370840">
+                <a:tc>
+                  <a:txBody>
+                    <a:bodyPr/>
+                    <a:lstStyle/>
+                    <a:p>
+                      <a:r>
+                        <a:rPr lang="en-AU" sz="1000" noProof="0" dirty="0"/>
+                        <a:t>Business Driver</a:t>
+                      </a:r>
+                    </a:p>
+                  </a:txBody>
+                  <a:tcPr anchor="ctr"/>
+                </a:tc>
+                <a:tc>
+                  <a:txBody>
+                    <a:bodyPr/>
+                    <a:lstStyle/>
+                    <a:p>
+                      <a:r>
+                        <a:rPr lang="en-AU" sz="1000" noProof="0" dirty="0"/>
+                        <a:t>Business Goal</a:t>
+                      </a:r>
+                    </a:p>
+                  </a:txBody>
+                  <a:tcPr anchor="ctr"/>
+                </a:tc>
+                <a:tc>
+                  <a:txBody>
+                    <a:bodyPr/>
+                    <a:lstStyle/>
+                    <a:p>
+                      <a:r>
+                        <a:rPr lang="en-AU" sz="1000" noProof="0"/>
+                        <a:t>Business Objective</a:t>
+                      </a:r>
+                      <a:endParaRPr lang="en-AU" sz="1000" noProof="0" dirty="0"/>
+                    </a:p>
+                  </a:txBody>
+                  <a:tcPr anchor="ctr"/>
+                </a:tc>
+                <a:extLst>
+                  <a:ext uri="{0D108BD9-81ED-4DB2-BD59-A6C34878D82A}">
+                    <a16:rowId xmlns:a16="http://schemas.microsoft.com/office/drawing/2014/main" val="2142193599"/>
+                  </a:ext>
+                </a:extLst>
+              </a:tr>
+              <a:tr h="356606">
+                <a:tc>
+                  <a:txBody>
+                    <a:bodyPr/>
+                    <a:lstStyle/>
+                    <a:p>
+                      <a:pPr>
+                        <a:buNone/>
+                      </a:pPr>
+                      <a:r>
+                        <a:rPr lang="en-AU" sz="1000" b="1" dirty="0"/>
+                        <a:t>1. Process Efficiency &amp; Operational Speed </a:t>
+                      </a:r>
+                      <a:r>
+                        <a:rPr lang="en-AU" sz="1000" dirty="0"/>
+                        <a:t>Critical need to eliminate bottlenecks in supplier onboarding and reduce manual effort required for document analysis and prequalification assessment</a:t>
+                      </a:r>
+                      <a:endParaRPr lang="en-US" sz="1000" dirty="0"/>
+                    </a:p>
+                  </a:txBody>
+                  <a:tcPr anchor="ctr"/>
+                </a:tc>
+                <a:tc>
+                  <a:txBody>
+                    <a:bodyPr/>
+                    <a:lstStyle/>
+                    <a:p>
+                      <a:pPr>
+                        <a:buNone/>
+                      </a:pPr>
+                      <a:r>
+                        <a:rPr lang="en-AU" sz="1000" b="1" dirty="0"/>
+                        <a:t>1.1 </a:t>
+                      </a:r>
+                      <a:r>
+                        <a:rPr lang="en-AU" sz="1000" b="0" dirty="0"/>
+                        <a:t> Accelerate Supplier Onboarding Timeline</a:t>
+                      </a:r>
+                      <a:endParaRPr lang="en-US" sz="1000" b="0" dirty="0"/>
+                    </a:p>
+                  </a:txBody>
+                  <a:tcPr anchor="ctr"/>
+                </a:tc>
+                <a:tc>
+                  <a:txBody>
+                    <a:bodyPr/>
+                    <a:lstStyle/>
+                    <a:p>
+                      <a:pPr>
+                        <a:buNone/>
+                      </a:pPr>
+                      <a:r>
+                        <a:rPr lang="en-US" sz="1000" b="1" dirty="0"/>
+                        <a:t>1.1.1</a:t>
+                      </a:r>
+                      <a:r>
+                        <a:rPr lang="en-US" sz="1000" dirty="0"/>
+                        <a:t> </a:t>
+                      </a:r>
+                      <a:r>
+                        <a:rPr lang="en-AU" sz="1000" dirty="0"/>
+                        <a:t>Reduce manual document review time by 70% through automated AI analysis and interpretation by Phase 1 completion</a:t>
+                      </a:r>
+                      <a:endParaRPr lang="en-US" sz="1000" dirty="0"/>
+                    </a:p>
+                  </a:txBody>
+                  <a:tcPr anchor="ctr"/>
+                </a:tc>
+                <a:extLst>
+                  <a:ext uri="{0D108BD9-81ED-4DB2-BD59-A6C34878D82A}">
+                    <a16:rowId xmlns:a16="http://schemas.microsoft.com/office/drawing/2014/main" val="458273923"/>
+                  </a:ext>
+                </a:extLst>
+              </a:tr>
+              <a:tr h="356606">
+                <a:tc>
+                  <a:txBody>
+                    <a:bodyPr/>
+                    <a:lstStyle/>
+                    <a:p>
+                      <a:pPr>
+                        <a:buNone/>
+                      </a:pPr>
+                      <a:endParaRPr lang="en-US" sz="1000" dirty="0"/>
+                    </a:p>
+                  </a:txBody>
+                  <a:tcPr anchor="ctr"/>
+                </a:tc>
+                <a:tc>
+                  <a:txBody>
+                    <a:bodyPr/>
+                    <a:lstStyle/>
+                    <a:p>
+                      <a:pPr>
+                        <a:buNone/>
+                      </a:pPr>
+                      <a:endParaRPr lang="en-US" sz="1000" dirty="0"/>
+                    </a:p>
+                  </a:txBody>
+                  <a:tcPr anchor="ctr"/>
+                </a:tc>
+                <a:tc>
+                  <a:txBody>
+                    <a:bodyPr/>
+                    <a:lstStyle/>
+                    <a:p>
+                      <a:pPr>
+                        <a:buNone/>
+                      </a:pPr>
+                      <a:r>
+                        <a:rPr lang="en-AU" sz="1000" b="1" dirty="0"/>
+                        <a:t>1.1.2</a:t>
+                      </a:r>
+                      <a:r>
+                        <a:rPr lang="en-AU" sz="1000" dirty="0"/>
+                        <a:t> Eliminate prequalification bottlenecks enabling faster supplier engagement and time-to-operation</a:t>
+                      </a:r>
+                      <a:endParaRPr lang="en-US" sz="1000" dirty="0"/>
+                    </a:p>
+                  </a:txBody>
+                  <a:tcPr anchor="ctr"/>
+                </a:tc>
+                <a:extLst>
+                  <a:ext uri="{0D108BD9-81ED-4DB2-BD59-A6C34878D82A}">
+                    <a16:rowId xmlns:a16="http://schemas.microsoft.com/office/drawing/2014/main" val="1487201454"/>
+                  </a:ext>
+                </a:extLst>
+              </a:tr>
+              <a:tr h="356606">
+                <a:tc>
+                  <a:txBody>
+                    <a:bodyPr/>
+                    <a:lstStyle/>
+                    <a:p>
+                      <a:pPr>
+                        <a:buNone/>
+                      </a:pPr>
+                      <a:endParaRPr lang="en-US" sz="1000" dirty="0"/>
+                    </a:p>
+                  </a:txBody>
+                  <a:tcPr anchor="ctr"/>
+                </a:tc>
+                <a:tc>
+                  <a:txBody>
+                    <a:bodyPr/>
+                    <a:lstStyle/>
+                    <a:p>
+                      <a:pPr>
+                        <a:buNone/>
+                      </a:pPr>
+                      <a:r>
+                        <a:rPr lang="en-AU" sz="1000" b="1" dirty="0"/>
+                        <a:t>1.2 </a:t>
+                      </a:r>
+                      <a:r>
+                        <a:rPr lang="en-AU" sz="1000" b="0" dirty="0"/>
+                        <a:t>Optimize Resource Allocation &amp; Cost</a:t>
+                      </a:r>
+                      <a:endParaRPr lang="en-US" sz="1000" b="0" dirty="0"/>
+                    </a:p>
+                  </a:txBody>
+                  <a:tcPr anchor="ctr"/>
+                </a:tc>
+                <a:tc>
+                  <a:txBody>
+                    <a:bodyPr/>
+                    <a:lstStyle/>
+                    <a:p>
+                      <a:pPr>
+                        <a:buNone/>
+                      </a:pPr>
+                      <a:r>
+                        <a:rPr lang="en-AU" sz="1000" b="1" dirty="0"/>
+                        <a:t>1.2.1</a:t>
+                      </a:r>
+                      <a:r>
+                        <a:rPr lang="en-AU" sz="1000" dirty="0"/>
+                        <a:t> Minimize dedicated personnel requirements for prequalification activities compared to current manual processes</a:t>
+                      </a:r>
+                      <a:endParaRPr lang="en-US" sz="1000" dirty="0"/>
+                    </a:p>
+                  </a:txBody>
+                  <a:tcPr anchor="ctr"/>
+                </a:tc>
+                <a:extLst>
+                  <a:ext uri="{0D108BD9-81ED-4DB2-BD59-A6C34878D82A}">
+                    <a16:rowId xmlns:a16="http://schemas.microsoft.com/office/drawing/2014/main" val="1668978004"/>
+                  </a:ext>
+                </a:extLst>
+              </a:tr>
+              <a:tr h="356606">
+                <a:tc>
+                  <a:txBody>
+                    <a:bodyPr/>
+                    <a:lstStyle/>
+                    <a:p>
+                      <a:pPr>
+                        <a:buNone/>
+                      </a:pPr>
+                      <a:endParaRPr lang="en-US" sz="1000" dirty="0"/>
+                    </a:p>
+                  </a:txBody>
+                  <a:tcPr anchor="ctr"/>
+                </a:tc>
+                <a:tc>
+                  <a:txBody>
+                    <a:bodyPr/>
+                    <a:lstStyle/>
+                    <a:p>
+                      <a:pPr>
+                        <a:buNone/>
+                      </a:pPr>
+                      <a:endParaRPr lang="en-US" sz="1000" b="0" dirty="0"/>
+                    </a:p>
+                  </a:txBody>
+                  <a:tcPr anchor="ctr"/>
+                </a:tc>
+                <a:tc>
+                  <a:txBody>
+                    <a:bodyPr/>
+                    <a:lstStyle/>
+                    <a:p>
+                      <a:pPr marL="0" marR="0" lvl="0" indent="0" algn="l" defTabSz="914411" rtl="0" eaLnBrk="1" fontAlgn="auto" latinLnBrk="0" hangingPunct="1">
+                        <a:lnSpc>
+                          <a:spcPct val="100000"/>
+                        </a:lnSpc>
+                        <a:spcBef>
+                          <a:spcPts val="0"/>
+                        </a:spcBef>
+                        <a:spcAft>
+                          <a:spcPts val="0"/>
+                        </a:spcAft>
+                        <a:buClrTx/>
+                        <a:buSzTx/>
+                        <a:buFontTx/>
+                        <a:buNone/>
+                        <a:tabLst/>
+                        <a:defRPr/>
+                      </a:pPr>
+                      <a:r>
+                        <a:rPr lang="en-AU" sz="1000" b="1" dirty="0"/>
+                        <a:t>1.2.2</a:t>
+                      </a:r>
+                      <a:r>
+                        <a:rPr lang="en-AU" sz="1000" dirty="0"/>
+                        <a:t> Achieve self-sufficient platform operation with human input limited to defined touchpoints (supplier contact, document collection, output validation)</a:t>
+                      </a:r>
+                      <a:endParaRPr lang="en-US" sz="1000" dirty="0"/>
+                    </a:p>
+                  </a:txBody>
+                  <a:tcPr anchor="ctr"/>
+                </a:tc>
+                <a:extLst>
+                  <a:ext uri="{0D108BD9-81ED-4DB2-BD59-A6C34878D82A}">
+                    <a16:rowId xmlns:a16="http://schemas.microsoft.com/office/drawing/2014/main" val="1965051329"/>
+                  </a:ext>
+                </a:extLst>
+              </a:tr>
+              <a:tr h="356606">
+                <a:tc>
+                  <a:txBody>
+                    <a:bodyPr/>
+                    <a:lstStyle/>
+                    <a:p>
+                      <a:pPr>
+                        <a:buNone/>
+                      </a:pPr>
+                      <a:r>
+                        <a:rPr lang="en-AU" sz="1000" b="1" dirty="0"/>
+                        <a:t>2. Quality Consistency &amp; Risk Management </a:t>
+                      </a:r>
+                      <a:r>
+                        <a:rPr lang="en-AU" sz="1000" dirty="0"/>
+                        <a:t>Requirement to standardize prequalification outcomes and ensure consistent risk assessment across all supplier evaluations independent of individual reviewer</a:t>
+                      </a:r>
+                      <a:endParaRPr lang="en-US" sz="1000" dirty="0"/>
+                    </a:p>
+                  </a:txBody>
+                  <a:tcPr anchor="ctr"/>
+                </a:tc>
+                <a:tc>
+                  <a:txBody>
+                    <a:bodyPr/>
+                    <a:lstStyle/>
+                    <a:p>
+                      <a:pPr>
+                        <a:buNone/>
+                      </a:pPr>
+                      <a:r>
+                        <a:rPr lang="en-US" sz="1000" b="1" dirty="0"/>
+                        <a:t>2.1 </a:t>
+                      </a:r>
+                      <a:r>
+                        <a:rPr lang="en-US" sz="1000" b="0" dirty="0"/>
+                        <a:t>Standardize Assessment Outcomes</a:t>
+                      </a:r>
+                    </a:p>
+                  </a:txBody>
+                  <a:tcPr anchor="ctr"/>
+                </a:tc>
+                <a:tc>
+                  <a:txBody>
+                    <a:bodyPr/>
+                    <a:lstStyle/>
+                    <a:p>
+                      <a:pPr>
+                        <a:buNone/>
+                      </a:pPr>
+                      <a:r>
+                        <a:rPr lang="en-AU" sz="1000" b="1" dirty="0"/>
+                        <a:t>2.1.1</a:t>
+                      </a:r>
+                      <a:r>
+                        <a:rPr lang="en-AU" sz="1000" dirty="0"/>
+                        <a:t> Deliver consistent prequalification results across all reviews through standardized AI-driven assessment</a:t>
+                      </a:r>
+                      <a:endParaRPr lang="en-US" sz="1000" dirty="0"/>
+                    </a:p>
+                  </a:txBody>
+                  <a:tcPr anchor="ctr"/>
+                </a:tc>
+                <a:extLst>
+                  <a:ext uri="{0D108BD9-81ED-4DB2-BD59-A6C34878D82A}">
+                    <a16:rowId xmlns:a16="http://schemas.microsoft.com/office/drawing/2014/main" val="1059482011"/>
+                  </a:ext>
+                </a:extLst>
+              </a:tr>
+              <a:tr h="461106">
+                <a:tc>
+                  <a:txBody>
+                    <a:bodyPr/>
+                    <a:lstStyle/>
+                    <a:p>
+                      <a:pPr>
+                        <a:buNone/>
+                      </a:pPr>
+                      <a:endParaRPr lang="en-US" sz="1000" dirty="0"/>
+                    </a:p>
+                  </a:txBody>
+                  <a:tcPr anchor="ctr"/>
+                </a:tc>
+                <a:tc>
+                  <a:txBody>
+                    <a:bodyPr/>
+                    <a:lstStyle/>
+                    <a:p>
+                      <a:pPr>
+                        <a:buNone/>
+                      </a:pPr>
+                      <a:endParaRPr lang="en-US" sz="1000" dirty="0"/>
+                    </a:p>
+                  </a:txBody>
+                  <a:tcPr anchor="ctr"/>
+                </a:tc>
+                <a:tc>
+                  <a:txBody>
+                    <a:bodyPr/>
+                    <a:lstStyle/>
+                    <a:p>
+                      <a:pPr>
+                        <a:buNone/>
+                      </a:pPr>
+                      <a:r>
+                        <a:rPr lang="en-AU" sz="1000" b="1" dirty="0"/>
+                        <a:t>2.1.2</a:t>
+                      </a:r>
+                      <a:r>
+                        <a:rPr lang="en-AU" sz="1000" dirty="0"/>
+                        <a:t> Eliminate outcome variability dependent on individual reviewer expertise and interpretation</a:t>
+                      </a:r>
+                      <a:endParaRPr lang="en-US" sz="1000" dirty="0"/>
+                    </a:p>
+                  </a:txBody>
+                  <a:tcPr anchor="ctr"/>
+                </a:tc>
+                <a:extLst>
+                  <a:ext uri="{0D108BD9-81ED-4DB2-BD59-A6C34878D82A}">
+                    <a16:rowId xmlns:a16="http://schemas.microsoft.com/office/drawing/2014/main" val="792597312"/>
+                  </a:ext>
+                </a:extLst>
+              </a:tr>
+              <a:tr h="356606">
+                <a:tc>
+                  <a:txBody>
+                    <a:bodyPr/>
+                    <a:lstStyle/>
+                    <a:p>
+                      <a:pPr>
+                        <a:buNone/>
+                      </a:pPr>
+                      <a:endParaRPr lang="en-US" sz="1000" dirty="0"/>
+                    </a:p>
+                  </a:txBody>
+                  <a:tcPr anchor="ctr"/>
+                </a:tc>
+                <a:tc>
+                  <a:txBody>
+                    <a:bodyPr/>
+                    <a:lstStyle/>
+                    <a:p>
+                      <a:pPr>
+                        <a:buNone/>
+                      </a:pPr>
+                      <a:r>
+                        <a:rPr lang="en-AU" sz="1000" b="1" dirty="0"/>
+                        <a:t>2.2</a:t>
+                      </a:r>
+                      <a:r>
+                        <a:rPr lang="en-AU" sz="1000" dirty="0"/>
+                        <a:t> Enhance Risk Detection &amp; Compliance</a:t>
+                      </a:r>
+                      <a:endParaRPr lang="en-US" sz="1000" dirty="0"/>
+                    </a:p>
+                  </a:txBody>
+                  <a:tcPr anchor="ctr"/>
+                </a:tc>
+                <a:tc>
+                  <a:txBody>
+                    <a:bodyPr/>
+                    <a:lstStyle/>
+                    <a:p>
+                      <a:pPr>
+                        <a:buNone/>
+                      </a:pPr>
+                      <a:r>
+                        <a:rPr lang="en-AU" sz="1000" b="1" dirty="0"/>
+                        <a:t>2.2.1 </a:t>
+                      </a:r>
+                      <a:r>
+                        <a:rPr lang="en-AU" sz="1000" dirty="0"/>
+                        <a:t>Implement automated gap analysis of supplier critical risk programs against organizational standards (Phase 2)</a:t>
+                      </a:r>
+                      <a:endParaRPr lang="en-US" sz="1000" dirty="0"/>
+                    </a:p>
+                  </a:txBody>
+                  <a:tcPr anchor="ctr"/>
+                </a:tc>
+                <a:extLst>
+                  <a:ext uri="{0D108BD9-81ED-4DB2-BD59-A6C34878D82A}">
+                    <a16:rowId xmlns:a16="http://schemas.microsoft.com/office/drawing/2014/main" val="1778693383"/>
+                  </a:ext>
+                </a:extLst>
+              </a:tr>
+              <a:tr h="356606">
+                <a:tc>
+                  <a:txBody>
+                    <a:bodyPr/>
+                    <a:lstStyle/>
+                    <a:p>
+                      <a:pPr>
+                        <a:buNone/>
+                      </a:pPr>
+                      <a:endParaRPr lang="en-US" sz="1000" dirty="0"/>
+                    </a:p>
+                  </a:txBody>
+                  <a:tcPr anchor="ctr"/>
+                </a:tc>
+                <a:tc>
+                  <a:txBody>
+                    <a:bodyPr/>
+                    <a:lstStyle/>
+                    <a:p>
+                      <a:pPr>
+                        <a:buNone/>
+                      </a:pPr>
+                      <a:endParaRPr lang="en-US" sz="1000" dirty="0"/>
+                    </a:p>
+                  </a:txBody>
+                  <a:tcPr anchor="ctr"/>
+                </a:tc>
+                <a:tc>
+                  <a:txBody>
+                    <a:bodyPr/>
+                    <a:lstStyle/>
+                    <a:p>
+                      <a:pPr>
+                        <a:buNone/>
+                      </a:pPr>
+                      <a:r>
+                        <a:rPr lang="en-AU" sz="1000" b="1" dirty="0"/>
+                        <a:t>2.2.2</a:t>
+                      </a:r>
+                      <a:r>
+                        <a:rPr lang="en-AU" sz="1000" dirty="0"/>
+                        <a:t> Improve detection of non-conformance and partial compliance in supplier documentation through AI pattern recognition</a:t>
+                      </a:r>
+                      <a:endParaRPr lang="en-US" sz="1000" dirty="0"/>
+                    </a:p>
+                  </a:txBody>
+                  <a:tcPr anchor="ctr"/>
+                </a:tc>
+                <a:extLst>
+                  <a:ext uri="{0D108BD9-81ED-4DB2-BD59-A6C34878D82A}">
+                    <a16:rowId xmlns:a16="http://schemas.microsoft.com/office/drawing/2014/main" val="585409537"/>
+                  </a:ext>
+                </a:extLst>
+              </a:tr>
+              <a:tr h="356606">
+                <a:tc>
+                  <a:txBody>
+                    <a:bodyPr/>
+                    <a:lstStyle/>
+                    <a:p>
+                      <a:pPr marL="0" marR="0" lvl="0" indent="0" algn="l" defTabSz="914411" rtl="0" eaLnBrk="1" fontAlgn="auto" latinLnBrk="0" hangingPunct="1">
+                        <a:lnSpc>
+                          <a:spcPct val="100000"/>
+                        </a:lnSpc>
+                        <a:spcBef>
+                          <a:spcPts val="0"/>
+                        </a:spcBef>
+                        <a:spcAft>
+                          <a:spcPts val="0"/>
+                        </a:spcAft>
+                        <a:buClrTx/>
+                        <a:buSzTx/>
+                        <a:buFontTx/>
+                        <a:buNone/>
+                        <a:tabLst/>
+                        <a:defRPr/>
+                      </a:pPr>
+                      <a:r>
+                        <a:rPr lang="en-AU" sz="1000" b="1" dirty="0"/>
+                        <a:t>3. Scalability &amp; Strategic Capability </a:t>
+                      </a:r>
+                      <a:r>
+                        <a:rPr lang="en-AU" sz="1000" dirty="0"/>
+                        <a:t>Requirement to manage high volumes of new suppliers and establish foundation for AI-driven supplier performance and assurance capability</a:t>
+                      </a:r>
+                      <a:endParaRPr lang="en-US" sz="1000" dirty="0"/>
+                    </a:p>
+                  </a:txBody>
+                  <a:tcPr anchor="ctr"/>
+                </a:tc>
+                <a:tc>
+                  <a:txBody>
+                    <a:bodyPr/>
+                    <a:lstStyle/>
+                    <a:p>
+                      <a:pPr marL="0" marR="0" lvl="0" indent="0" algn="l" defTabSz="914411" rtl="0" eaLnBrk="1" fontAlgn="auto" latinLnBrk="0" hangingPunct="1">
+                        <a:lnSpc>
+                          <a:spcPct val="100000"/>
+                        </a:lnSpc>
+                        <a:spcBef>
+                          <a:spcPts val="0"/>
+                        </a:spcBef>
+                        <a:spcAft>
+                          <a:spcPts val="0"/>
+                        </a:spcAft>
+                        <a:buClrTx/>
+                        <a:buSzTx/>
+                        <a:buFontTx/>
+                        <a:buNone/>
+                        <a:tabLst/>
+                        <a:defRPr/>
+                      </a:pPr>
+                      <a:r>
+                        <a:rPr lang="en-US" sz="1000" b="1" dirty="0"/>
+                        <a:t>3.1 </a:t>
+                      </a:r>
+                      <a:r>
+                        <a:rPr lang="en-US" sz="1000" b="0" dirty="0"/>
+                        <a:t>Scale Prequalification Capacity</a:t>
+                      </a:r>
+                    </a:p>
+                  </a:txBody>
+                  <a:tcPr anchor="ctr"/>
+                </a:tc>
+                <a:tc>
+                  <a:txBody>
+                    <a:bodyPr/>
+                    <a:lstStyle/>
+                    <a:p>
+                      <a:pPr marL="0" marR="0" lvl="0" indent="0" algn="l" defTabSz="914411" rtl="0" eaLnBrk="1" fontAlgn="auto" latinLnBrk="0" hangingPunct="1">
+                        <a:lnSpc>
+                          <a:spcPct val="100000"/>
+                        </a:lnSpc>
+                        <a:spcBef>
+                          <a:spcPts val="0"/>
+                        </a:spcBef>
+                        <a:spcAft>
+                          <a:spcPts val="0"/>
+                        </a:spcAft>
+                        <a:buClrTx/>
+                        <a:buSzTx/>
+                        <a:buFontTx/>
+                        <a:buNone/>
+                        <a:tabLst/>
+                        <a:defRPr/>
+                      </a:pPr>
+                      <a:r>
+                        <a:rPr lang="en-AU" sz="1000" b="1" dirty="0"/>
+                        <a:t>3.1.1</a:t>
+                      </a:r>
+                      <a:r>
+                        <a:rPr lang="en-AU" sz="1000" dirty="0"/>
+                        <a:t> Enable efficient management of high supplier volumes without proportional resource increase</a:t>
+                      </a:r>
+                      <a:endParaRPr lang="en-US" sz="1000" dirty="0"/>
+                    </a:p>
+                  </a:txBody>
+                  <a:tcPr anchor="ctr"/>
+                </a:tc>
+                <a:extLst>
+                  <a:ext uri="{0D108BD9-81ED-4DB2-BD59-A6C34878D82A}">
+                    <a16:rowId xmlns:a16="http://schemas.microsoft.com/office/drawing/2014/main" val="1423214526"/>
+                  </a:ext>
+                </a:extLst>
+              </a:tr>
+              <a:tr h="356606">
+                <a:tc>
+                  <a:txBody>
+                    <a:bodyPr/>
+                    <a:lstStyle/>
+                    <a:p>
+                      <a:pPr>
+                        <a:buNone/>
+                      </a:pPr>
+                      <a:endParaRPr lang="en-US" sz="1000" dirty="0"/>
+                    </a:p>
+                  </a:txBody>
+                  <a:tcPr anchor="ctr"/>
+                </a:tc>
+                <a:tc>
+                  <a:txBody>
+                    <a:bodyPr/>
+                    <a:lstStyle/>
+                    <a:p>
+                      <a:pPr>
+                        <a:buNone/>
+                      </a:pPr>
+                      <a:endParaRPr lang="en-US" sz="1000" dirty="0"/>
+                    </a:p>
+                  </a:txBody>
+                  <a:tcPr anchor="ctr"/>
+                </a:tc>
+                <a:tc>
+                  <a:txBody>
+                    <a:bodyPr/>
+                    <a:lstStyle/>
+                    <a:p>
+                      <a:pPr marL="0" marR="0" lvl="0" indent="0" algn="l" defTabSz="914411" rtl="0" eaLnBrk="1" fontAlgn="auto" latinLnBrk="0" hangingPunct="1">
+                        <a:lnSpc>
+                          <a:spcPct val="100000"/>
+                        </a:lnSpc>
+                        <a:spcBef>
+                          <a:spcPts val="0"/>
+                        </a:spcBef>
+                        <a:spcAft>
+                          <a:spcPts val="0"/>
+                        </a:spcAft>
+                        <a:buClrTx/>
+                        <a:buSzTx/>
+                        <a:buFontTx/>
+                        <a:buNone/>
+                        <a:tabLst/>
+                        <a:defRPr/>
+                      </a:pPr>
+                      <a:r>
+                        <a:rPr lang="en-AU" sz="1000" b="1" dirty="0"/>
+                        <a:t>3.1.2</a:t>
+                      </a:r>
+                      <a:r>
+                        <a:rPr lang="en-AU" sz="1000" dirty="0"/>
+                        <a:t> Support increased supplier onboarding demand aligned with business growth opportunities</a:t>
+                      </a:r>
+                      <a:endParaRPr lang="en-US" sz="1000" dirty="0"/>
+                    </a:p>
+                  </a:txBody>
+                  <a:tcPr anchor="ctr"/>
+                </a:tc>
+                <a:extLst>
+                  <a:ext uri="{0D108BD9-81ED-4DB2-BD59-A6C34878D82A}">
+                    <a16:rowId xmlns:a16="http://schemas.microsoft.com/office/drawing/2014/main" val="42984050"/>
+                  </a:ext>
+                </a:extLst>
+              </a:tr>
+              <a:tr h="356606">
+                <a:tc>
+                  <a:txBody>
+                    <a:bodyPr/>
+                    <a:lstStyle/>
+                    <a:p>
+                      <a:pPr>
+                        <a:buNone/>
+                      </a:pPr>
+                      <a:endParaRPr lang="en-US" sz="1000" dirty="0"/>
+                    </a:p>
+                  </a:txBody>
+                  <a:tcPr anchor="ctr"/>
+                </a:tc>
+                <a:tc>
+                  <a:txBody>
+                    <a:bodyPr/>
+                    <a:lstStyle/>
+                    <a:p>
+                      <a:pPr marL="0" marR="0" lvl="0" indent="0" algn="l" defTabSz="914411" rtl="0" eaLnBrk="1" fontAlgn="auto" latinLnBrk="0" hangingPunct="1">
+                        <a:lnSpc>
+                          <a:spcPct val="100000"/>
+                        </a:lnSpc>
+                        <a:spcBef>
+                          <a:spcPts val="0"/>
+                        </a:spcBef>
+                        <a:spcAft>
+                          <a:spcPts val="0"/>
+                        </a:spcAft>
+                        <a:buClrTx/>
+                        <a:buSzTx/>
+                        <a:buFontTx/>
+                        <a:buNone/>
+                        <a:tabLst/>
+                        <a:defRPr/>
+                      </a:pPr>
+                      <a:r>
+                        <a:rPr lang="en-AU" sz="1000" b="1" dirty="0"/>
+                        <a:t>3.2</a:t>
+                      </a:r>
+                      <a:r>
+                        <a:rPr lang="en-AU" sz="1000" dirty="0"/>
+                        <a:t> Build Strategic AI Foundation</a:t>
+                      </a:r>
+                      <a:endParaRPr lang="en-US" sz="1000" dirty="0"/>
+                    </a:p>
+                  </a:txBody>
+                  <a:tcPr anchor="ctr"/>
+                </a:tc>
+                <a:tc>
+                  <a:txBody>
+                    <a:bodyPr/>
+                    <a:lstStyle/>
+                    <a:p>
+                      <a:pPr marL="0" marR="0" lvl="0" indent="0" algn="l" defTabSz="914411" rtl="0" eaLnBrk="1" fontAlgn="auto" latinLnBrk="0" hangingPunct="1">
+                        <a:lnSpc>
+                          <a:spcPct val="100000"/>
+                        </a:lnSpc>
+                        <a:spcBef>
+                          <a:spcPts val="0"/>
+                        </a:spcBef>
+                        <a:spcAft>
+                          <a:spcPts val="0"/>
+                        </a:spcAft>
+                        <a:buClrTx/>
+                        <a:buSzTx/>
+                        <a:buFontTx/>
+                        <a:buNone/>
+                        <a:tabLst/>
+                        <a:defRPr/>
+                      </a:pPr>
+                      <a:r>
+                        <a:rPr lang="en-AU" sz="1000" b="1" dirty="0"/>
+                        <a:t>3.2.1 </a:t>
+                      </a:r>
+                      <a:r>
+                        <a:rPr lang="en-AU" sz="1000" dirty="0"/>
+                        <a:t>Establish platform roadmap for incorporating emerging AI capabilities as technology evolves</a:t>
+                      </a:r>
+                      <a:endParaRPr lang="en-US" sz="1000" dirty="0"/>
+                    </a:p>
+                  </a:txBody>
+                  <a:tcPr anchor="ctr"/>
+                </a:tc>
+                <a:extLst>
+                  <a:ext uri="{0D108BD9-81ED-4DB2-BD59-A6C34878D82A}">
+                    <a16:rowId xmlns:a16="http://schemas.microsoft.com/office/drawing/2014/main" val="3002222801"/>
+                  </a:ext>
+                </a:extLst>
+              </a:tr>
+              <a:tr h="356606">
+                <a:tc>
+                  <a:txBody>
+                    <a:bodyPr/>
+                    <a:lstStyle/>
+                    <a:p>
+                      <a:pPr>
+                        <a:buNone/>
+                      </a:pPr>
+                      <a:endParaRPr lang="en-US" sz="1000" dirty="0"/>
+                    </a:p>
+                  </a:txBody>
+                  <a:tcPr anchor="ctr"/>
+                </a:tc>
+                <a:tc>
+                  <a:txBody>
+                    <a:bodyPr/>
+                    <a:lstStyle/>
+                    <a:p>
+                      <a:pPr>
+                        <a:buNone/>
+                      </a:pPr>
+                      <a:endParaRPr lang="en-US" sz="1000" dirty="0"/>
+                    </a:p>
+                  </a:txBody>
+                  <a:tcPr anchor="ctr"/>
+                </a:tc>
+                <a:tc>
+                  <a:txBody>
+                    <a:bodyPr/>
+                    <a:lstStyle/>
+                    <a:p>
+                      <a:pPr marL="0" marR="0" lvl="0" indent="0" algn="l" defTabSz="914411" rtl="0" eaLnBrk="1" fontAlgn="auto" latinLnBrk="0" hangingPunct="1">
+                        <a:lnSpc>
+                          <a:spcPct val="100000"/>
+                        </a:lnSpc>
+                        <a:spcBef>
+                          <a:spcPts val="0"/>
+                        </a:spcBef>
+                        <a:spcAft>
+                          <a:spcPts val="0"/>
+                        </a:spcAft>
+                        <a:buClrTx/>
+                        <a:buSzTx/>
+                        <a:buFontTx/>
+                        <a:buNone/>
+                        <a:tabLst/>
+                        <a:defRPr/>
+                      </a:pPr>
+                      <a:r>
+                        <a:rPr lang="en-AU" sz="1000" b="1" dirty="0"/>
+                        <a:t>3.2.2</a:t>
+                      </a:r>
+                      <a:r>
+                        <a:rPr lang="en-AU" sz="1000" dirty="0"/>
+                        <a:t> Create foundation for broader AI-driven supplier performance monitoring and assurance capability beyond prequalification</a:t>
+                      </a:r>
+                      <a:endParaRPr lang="en-US" sz="1000" dirty="0"/>
+                    </a:p>
+                  </a:txBody>
+                  <a:tcPr anchor="ctr"/>
+                </a:tc>
+                <a:extLst>
+                  <a:ext uri="{0D108BD9-81ED-4DB2-BD59-A6C34878D82A}">
+                    <a16:rowId xmlns:a16="http://schemas.microsoft.com/office/drawing/2014/main" val="2732828702"/>
+                  </a:ext>
+                </a:extLst>
+              </a:tr>
+            </a:tbl>
+          </a:graphicData>
+        </a:graphic>
+      </p:graphicFrame>
     </p:spTree>
     <p:extLst>
       <p:ext uri="{BB962C8B-B14F-4D97-AF65-F5344CB8AC3E}">
-        <p14:creationId xmlns:p14="http://schemas.microsoft.com/office/powerpoint/2010/main" val="4020006647"/>
+        <p14:creationId xmlns:p14="http://schemas.microsoft.com/office/powerpoint/2010/main" val="3987844752"/>
       </p:ext>
     </p:extLst>
   </p:cSld>
@@ -5021,14 +5510,14 @@
           <p:nvPr>
             <p:extLst>
               <p:ext uri="{D42A27DB-BD31-4B8C-83A1-F6EECF244321}">
-                <p14:modId xmlns:p14="http://schemas.microsoft.com/office/powerpoint/2010/main" val="3810555129"/>
+                <p14:modId xmlns:p14="http://schemas.microsoft.com/office/powerpoint/2010/main" val="3138114082"/>
               </p:ext>
             </p:extLst>
           </p:nvPr>
         </p:nvGraphicFramePr>
         <p:xfrm>
-          <a:off x="623887" y="1433039"/>
-          <a:ext cx="10726737" cy="1354464"/>
+          <a:off x="633315" y="1342911"/>
+          <a:ext cx="10726737" cy="4609080"/>
         </p:xfrm>
         <a:graphic>
           <a:graphicData uri="http://schemas.openxmlformats.org/drawingml/2006/table">
@@ -5125,13 +5614,25 @@
                   </a:ext>
                 </a:extLst>
               </a:tr>
-              <a:tr h="281466">
-                <a:tc>
-                  <a:txBody>
-                    <a:bodyPr/>
-                    <a:lstStyle/>
-                    <a:p>
-                      <a:endParaRPr lang="en-AU" sz="900" dirty="0"/>
+              <a:tr h="540000">
+                <a:tc>
+                  <a:txBody>
+                    <a:bodyPr/>
+                    <a:lstStyle/>
+                    <a:p>
+                      <a:pPr algn="l" fontAlgn="t">
+                        <a:buNone/>
+                      </a:pPr>
+                      <a:r>
+                        <a:rPr lang="en-AU" sz="1000" b="0" i="0" u="none" strike="noStrike" dirty="0">
+                          <a:solidFill>
+                            <a:srgbClr val="000000"/>
+                          </a:solidFill>
+                          <a:effectLst/>
+                          <a:latin typeface="+mn-lt"/>
+                        </a:rPr>
+                        <a:t>AI output accuracy is insufficient during initial deployment, requiring extensive rework and validation</a:t>
+                      </a:r>
                     </a:p>
                   </a:txBody>
                   <a:tcPr anchor="ctr"/>
@@ -5141,27 +5642,63 @@
                     <a:bodyPr/>
                     <a:lstStyle/>
                     <a:p>
-                      <a:endParaRPr lang="en-AU" sz="900"/>
-                    </a:p>
-                  </a:txBody>
-                  <a:tcPr anchor="ctr"/>
-                </a:tc>
-                <a:tc>
-                  <a:txBody>
-                    <a:bodyPr/>
-                    <a:lstStyle/>
-                    <a:p>
-                      <a:endParaRPr lang="en-AU" sz="900"/>
-                    </a:p>
-                  </a:txBody>
-                  <a:tcPr anchor="ctr"/>
-                </a:tc>
-                <a:tc>
-                  <a:txBody>
-                    <a:bodyPr/>
-                    <a:lstStyle/>
-                    <a:p>
-                      <a:endParaRPr lang="en-AU" sz="900"/>
+                      <a:pPr algn="ctr" fontAlgn="t">
+                        <a:buNone/>
+                      </a:pPr>
+                      <a:r>
+                        <a:rPr lang="en-AU" sz="1000" b="0" i="0" u="none" strike="noStrike">
+                          <a:solidFill>
+                            <a:srgbClr val="000000"/>
+                          </a:solidFill>
+                          <a:effectLst/>
+                          <a:latin typeface="+mn-lt"/>
+                        </a:rPr>
+                        <a:t>H</a:t>
+                      </a:r>
+                    </a:p>
+                  </a:txBody>
+                  <a:tcPr marL="5443" marR="5443" marT="5443" marB="0" anchor="ctr"/>
+                </a:tc>
+                <a:tc>
+                  <a:txBody>
+                    <a:bodyPr/>
+                    <a:lstStyle/>
+                    <a:p>
+                      <a:pPr algn="ctr" fontAlgn="t">
+                        <a:buNone/>
+                      </a:pPr>
+                      <a:r>
+                        <a:rPr lang="en-AU" sz="1000" b="0" i="0" u="none" strike="noStrike">
+                          <a:solidFill>
+                            <a:srgbClr val="000000"/>
+                          </a:solidFill>
+                          <a:effectLst/>
+                          <a:latin typeface="+mn-lt"/>
+                        </a:rPr>
+                        <a:t>M</a:t>
+                      </a:r>
+                    </a:p>
+                  </a:txBody>
+                  <a:tcPr marL="5443" marR="5443" marT="5443" marB="0" anchor="ctr"/>
+                </a:tc>
+                <a:tc>
+                  <a:txBody>
+                    <a:bodyPr/>
+                    <a:lstStyle/>
+                    <a:p>
+                      <a:pPr algn="l" fontAlgn="t">
+                        <a:buNone/>
+                      </a:pPr>
+                      <a:r>
+                        <a:rPr lang="en-AU" sz="1000" b="0" i="0" u="none" strike="noStrike" dirty="0">
+                          <a:solidFill>
+                            <a:srgbClr val="000000"/>
+                          </a:solidFill>
+                          <a:effectLst/>
+                          <a:latin typeface="+mn-lt"/>
+                        </a:rPr>
+                        <a:t>Build trial and error period into Phase 1 to test, refine, and calibrate AI outputs for consistency and accuracy before full deployment</a:t>
+                      </a:r>
                     </a:p>
                   </a:txBody>
                   <a:tcPr anchor="ctr"/>
@@ -5172,13 +5709,25 @@
                   </a:ext>
                 </a:extLst>
               </a:tr>
-              <a:tr h="281466">
-                <a:tc>
-                  <a:txBody>
-                    <a:bodyPr/>
-                    <a:lstStyle/>
-                    <a:p>
-                      <a:endParaRPr lang="en-AU" sz="900" dirty="0"/>
+              <a:tr h="541562">
+                <a:tc>
+                  <a:txBody>
+                    <a:bodyPr/>
+                    <a:lstStyle/>
+                    <a:p>
+                      <a:pPr algn="l" fontAlgn="t">
+                        <a:buNone/>
+                      </a:pPr>
+                      <a:r>
+                        <a:rPr lang="en-AU" sz="1000" b="0" i="0" u="none" strike="noStrike">
+                          <a:solidFill>
+                            <a:srgbClr val="000000"/>
+                          </a:solidFill>
+                          <a:effectLst/>
+                          <a:latin typeface="+mn-lt"/>
+                        </a:rPr>
+                        <a:t>Platform cannot handle diverse document formats or unstructured supplier documentation</a:t>
+                      </a:r>
                     </a:p>
                   </a:txBody>
                   <a:tcPr anchor="ctr"/>
@@ -5188,17 +5737,92 @@
                     <a:bodyPr/>
                     <a:lstStyle/>
                     <a:p>
-                      <a:endParaRPr lang="en-AU" sz="900"/>
+                      <a:pPr algn="ctr" fontAlgn="t">
+                        <a:buNone/>
+                      </a:pPr>
+                      <a:r>
+                        <a:rPr lang="en-AU" sz="1000" b="0" i="0" u="none" strike="noStrike">
+                          <a:solidFill>
+                            <a:srgbClr val="000000"/>
+                          </a:solidFill>
+                          <a:effectLst/>
+                          <a:latin typeface="+mn-lt"/>
+                        </a:rPr>
+                        <a:t>H</a:t>
+                      </a:r>
+                    </a:p>
+                  </a:txBody>
+                  <a:tcPr marL="5443" marR="5443" marT="5443" marB="0" anchor="ctr"/>
+                </a:tc>
+                <a:tc>
+                  <a:txBody>
+                    <a:bodyPr/>
+                    <a:lstStyle/>
+                    <a:p>
+                      <a:pPr algn="ctr" fontAlgn="t">
+                        <a:buNone/>
+                      </a:pPr>
+                      <a:r>
+                        <a:rPr lang="en-AU" sz="1000" b="0" i="0" u="none" strike="noStrike">
+                          <a:solidFill>
+                            <a:srgbClr val="000000"/>
+                          </a:solidFill>
+                          <a:effectLst/>
+                          <a:latin typeface="+mn-lt"/>
+                        </a:rPr>
+                        <a:t>M</a:t>
+                      </a:r>
+                    </a:p>
+                  </a:txBody>
+                  <a:tcPr marL="5443" marR="5443" marT="5443" marB="0" anchor="ctr"/>
+                </a:tc>
+                <a:tc>
+                  <a:txBody>
+                    <a:bodyPr/>
+                    <a:lstStyle/>
+                    <a:p>
+                      <a:pPr algn="l" fontAlgn="t">
+                        <a:buNone/>
+                      </a:pPr>
+                      <a:r>
+                        <a:rPr lang="en-AU" sz="1000" b="0" i="0" u="none" strike="noStrike">
+                          <a:solidFill>
+                            <a:srgbClr val="000000"/>
+                          </a:solidFill>
+                          <a:effectLst/>
+                          <a:latin typeface="+mn-lt"/>
+                        </a:rPr>
+                        <a:t>Phase 1 includes support for multiple document formats; trial period identifies format limitations early; build refinement capability into platform design</a:t>
+                      </a:r>
                     </a:p>
                   </a:txBody>
                   <a:tcPr anchor="ctr"/>
                 </a:tc>
-                <a:tc>
-                  <a:txBody>
-                    <a:bodyPr/>
-                    <a:lstStyle/>
-                    <a:p>
-                      <a:endParaRPr lang="en-AU" sz="900"/>
+                <a:extLst>
+                  <a:ext uri="{0D108BD9-81ED-4DB2-BD59-A6C34878D82A}">
+                    <a16:rowId xmlns:a16="http://schemas.microsoft.com/office/drawing/2014/main" val="2823740310"/>
+                  </a:ext>
+                </a:extLst>
+              </a:tr>
+              <a:tr h="540000">
+                <a:tc>
+                  <a:txBody>
+                    <a:bodyPr/>
+                    <a:lstStyle/>
+                    <a:p>
+                      <a:pPr algn="l" fontAlgn="t">
+                        <a:buNone/>
+                      </a:pPr>
+                      <a:r>
+                        <a:rPr lang="en-AU" sz="1000" b="0" i="0" u="none" strike="noStrike">
+                          <a:solidFill>
+                            <a:srgbClr val="000000"/>
+                          </a:solidFill>
+                          <a:effectLst/>
+                          <a:latin typeface="+mn-lt"/>
+                        </a:rPr>
+                        <a:t>Inconsistent category-specific requirements and safety standards prevent effective automated benchmarking</a:t>
+                      </a:r>
                     </a:p>
                   </a:txBody>
                   <a:tcPr anchor="ctr"/>
@@ -5208,7 +5832,348 @@
                     <a:bodyPr/>
                     <a:lstStyle/>
                     <a:p>
-                      <a:endParaRPr lang="en-AU" sz="900"/>
+                      <a:pPr algn="ctr" fontAlgn="t">
+                        <a:buNone/>
+                      </a:pPr>
+                      <a:r>
+                        <a:rPr lang="en-AU" sz="1000" b="0" i="0" u="none" strike="noStrike">
+                          <a:solidFill>
+                            <a:srgbClr val="000000"/>
+                          </a:solidFill>
+                          <a:effectLst/>
+                          <a:latin typeface="+mn-lt"/>
+                        </a:rPr>
+                        <a:t>H</a:t>
+                      </a:r>
+                    </a:p>
+                  </a:txBody>
+                  <a:tcPr marL="5443" marR="5443" marT="5443" marB="0" anchor="ctr"/>
+                </a:tc>
+                <a:tc>
+                  <a:txBody>
+                    <a:bodyPr/>
+                    <a:lstStyle/>
+                    <a:p>
+                      <a:pPr algn="ctr" fontAlgn="t">
+                        <a:buNone/>
+                      </a:pPr>
+                      <a:r>
+                        <a:rPr lang="en-AU" sz="1000" b="0" i="0" u="none" strike="noStrike" dirty="0">
+                          <a:solidFill>
+                            <a:srgbClr val="000000"/>
+                          </a:solidFill>
+                          <a:effectLst/>
+                          <a:latin typeface="+mn-lt"/>
+                        </a:rPr>
+                        <a:t>L</a:t>
+                      </a:r>
+                    </a:p>
+                  </a:txBody>
+                  <a:tcPr marL="5443" marR="5443" marT="5443" marB="0" anchor="ctr"/>
+                </a:tc>
+                <a:tc>
+                  <a:txBody>
+                    <a:bodyPr/>
+                    <a:lstStyle/>
+                    <a:p>
+                      <a:pPr algn="l" fontAlgn="t">
+                        <a:buNone/>
+                      </a:pPr>
+                      <a:r>
+                        <a:rPr lang="en-AU" sz="1000" b="0" i="0" u="none" strike="noStrike" dirty="0">
+                          <a:solidFill>
+                            <a:srgbClr val="000000"/>
+                          </a:solidFill>
+                          <a:effectLst/>
+                          <a:latin typeface="+mn-lt"/>
+                        </a:rPr>
+                        <a:t>Ensure category-specific requirements and safety management system standards are clearly defined and documented before platform implementation; validate during trial period</a:t>
+                      </a:r>
+                    </a:p>
+                  </a:txBody>
+                  <a:tcPr anchor="ctr"/>
+                </a:tc>
+                <a:extLst>
+                  <a:ext uri="{0D108BD9-81ED-4DB2-BD59-A6C34878D82A}">
+                    <a16:rowId xmlns:a16="http://schemas.microsoft.com/office/drawing/2014/main" val="1203993717"/>
+                  </a:ext>
+                </a:extLst>
+              </a:tr>
+              <a:tr h="540000">
+                <a:tc>
+                  <a:txBody>
+                    <a:bodyPr/>
+                    <a:lstStyle/>
+                    <a:p>
+                      <a:pPr algn="l" fontAlgn="t">
+                        <a:buNone/>
+                      </a:pPr>
+                      <a:r>
+                        <a:rPr lang="en-AU" sz="1000" b="0" i="0" u="none" strike="noStrike">
+                          <a:solidFill>
+                            <a:srgbClr val="000000"/>
+                          </a:solidFill>
+                          <a:effectLst/>
+                          <a:latin typeface="+mn-lt"/>
+                        </a:rPr>
+                        <a:t>Human reviewers do not trust AI-generated outputs, leading to redundant manual verification</a:t>
+                      </a:r>
+                    </a:p>
+                  </a:txBody>
+                  <a:tcPr anchor="ctr"/>
+                </a:tc>
+                <a:tc>
+                  <a:txBody>
+                    <a:bodyPr/>
+                    <a:lstStyle/>
+                    <a:p>
+                      <a:pPr algn="ctr" fontAlgn="t">
+                        <a:buNone/>
+                      </a:pPr>
+                      <a:r>
+                        <a:rPr lang="en-AU" sz="1000" b="0" i="0" u="none" strike="noStrike">
+                          <a:solidFill>
+                            <a:srgbClr val="000000"/>
+                          </a:solidFill>
+                          <a:effectLst/>
+                          <a:latin typeface="+mn-lt"/>
+                        </a:rPr>
+                        <a:t>M</a:t>
+                      </a:r>
+                    </a:p>
+                  </a:txBody>
+                  <a:tcPr marL="5443" marR="5443" marT="5443" marB="0" anchor="ctr"/>
+                </a:tc>
+                <a:tc>
+                  <a:txBody>
+                    <a:bodyPr/>
+                    <a:lstStyle/>
+                    <a:p>
+                      <a:pPr algn="ctr" fontAlgn="t">
+                        <a:buNone/>
+                      </a:pPr>
+                      <a:r>
+                        <a:rPr lang="en-AU" sz="1000" b="0" i="0" u="none" strike="noStrike">
+                          <a:solidFill>
+                            <a:srgbClr val="000000"/>
+                          </a:solidFill>
+                          <a:effectLst/>
+                          <a:latin typeface="+mn-lt"/>
+                        </a:rPr>
+                        <a:t>M</a:t>
+                      </a:r>
+                    </a:p>
+                  </a:txBody>
+                  <a:tcPr marL="5443" marR="5443" marT="5443" marB="0" anchor="ctr"/>
+                </a:tc>
+                <a:tc>
+                  <a:txBody>
+                    <a:bodyPr/>
+                    <a:lstStyle/>
+                    <a:p>
+                      <a:pPr algn="l" fontAlgn="t">
+                        <a:buNone/>
+                      </a:pPr>
+                      <a:r>
+                        <a:rPr lang="en-AU" sz="1000" b="0" i="0" u="none" strike="noStrike">
+                          <a:solidFill>
+                            <a:srgbClr val="000000"/>
+                          </a:solidFill>
+                          <a:effectLst/>
+                          <a:latin typeface="+mn-lt"/>
+                        </a:rPr>
+                        <a:t>Retain human verification at key decision points; position platform as augmenting (not replacing) professional judgment; demonstrate accuracy through calibration period</a:t>
+                      </a:r>
+                    </a:p>
+                  </a:txBody>
+                  <a:tcPr anchor="ctr"/>
+                </a:tc>
+                <a:extLst>
+                  <a:ext uri="{0D108BD9-81ED-4DB2-BD59-A6C34878D82A}">
+                    <a16:rowId xmlns:a16="http://schemas.microsoft.com/office/drawing/2014/main" val="2880026266"/>
+                  </a:ext>
+                </a:extLst>
+              </a:tr>
+              <a:tr h="540000">
+                <a:tc>
+                  <a:txBody>
+                    <a:bodyPr/>
+                    <a:lstStyle/>
+                    <a:p>
+                      <a:pPr algn="l" fontAlgn="t">
+                        <a:buNone/>
+                      </a:pPr>
+                      <a:r>
+                        <a:rPr lang="en-AU" sz="1000" b="0" i="0" u="none" strike="noStrike">
+                          <a:solidFill>
+                            <a:srgbClr val="000000"/>
+                          </a:solidFill>
+                          <a:effectLst/>
+                          <a:latin typeface="+mn-lt"/>
+                        </a:rPr>
+                        <a:t>Implementation timeline extends beyond planned phases, delaying value realization</a:t>
+                      </a:r>
+                    </a:p>
+                  </a:txBody>
+                  <a:tcPr anchor="ctr"/>
+                </a:tc>
+                <a:tc>
+                  <a:txBody>
+                    <a:bodyPr/>
+                    <a:lstStyle/>
+                    <a:p>
+                      <a:pPr algn="ctr" fontAlgn="t">
+                        <a:buNone/>
+                      </a:pPr>
+                      <a:r>
+                        <a:rPr lang="en-AU" sz="1000" b="0" i="0" u="none" strike="noStrike">
+                          <a:solidFill>
+                            <a:srgbClr val="000000"/>
+                          </a:solidFill>
+                          <a:effectLst/>
+                          <a:latin typeface="+mn-lt"/>
+                        </a:rPr>
+                        <a:t>M</a:t>
+                      </a:r>
+                    </a:p>
+                  </a:txBody>
+                  <a:tcPr marL="5443" marR="5443" marT="5443" marB="0" anchor="ctr"/>
+                </a:tc>
+                <a:tc>
+                  <a:txBody>
+                    <a:bodyPr/>
+                    <a:lstStyle/>
+                    <a:p>
+                      <a:pPr algn="ctr" fontAlgn="t">
+                        <a:buNone/>
+                      </a:pPr>
+                      <a:r>
+                        <a:rPr lang="en-AU" sz="1000" b="0" i="0" u="none" strike="noStrike">
+                          <a:solidFill>
+                            <a:srgbClr val="000000"/>
+                          </a:solidFill>
+                          <a:effectLst/>
+                          <a:latin typeface="+mn-lt"/>
+                        </a:rPr>
+                        <a:t>M</a:t>
+                      </a:r>
+                    </a:p>
+                  </a:txBody>
+                  <a:tcPr marL="5443" marR="5443" marT="5443" marB="0" anchor="ctr"/>
+                </a:tc>
+                <a:tc>
+                  <a:txBody>
+                    <a:bodyPr/>
+                    <a:lstStyle/>
+                    <a:p>
+                      <a:pPr algn="l" fontAlgn="t">
+                        <a:buNone/>
+                      </a:pPr>
+                      <a:r>
+                        <a:rPr lang="en-AU" sz="1000" b="0" i="0" u="none" strike="noStrike" dirty="0">
+                          <a:solidFill>
+                            <a:srgbClr val="000000"/>
+                          </a:solidFill>
+                          <a:effectLst/>
+                          <a:latin typeface="+mn-lt"/>
+                        </a:rPr>
+                        <a:t>Phased delivery approach allows early value realization in Phase 1; focus Phase 1 on core automation capability; build in contingency time for calibration</a:t>
+                      </a:r>
+                    </a:p>
+                  </a:txBody>
+                  <a:tcPr anchor="ctr"/>
+                </a:tc>
+                <a:extLst>
+                  <a:ext uri="{0D108BD9-81ED-4DB2-BD59-A6C34878D82A}">
+                    <a16:rowId xmlns:a16="http://schemas.microsoft.com/office/drawing/2014/main" val="38362406"/>
+                  </a:ext>
+                </a:extLst>
+              </a:tr>
+              <a:tr h="540000">
+                <a:tc>
+                  <a:txBody>
+                    <a:bodyPr/>
+                    <a:lstStyle/>
+                    <a:p>
+                      <a:pPr algn="l" fontAlgn="t">
+                        <a:buNone/>
+                      </a:pPr>
+                      <a:r>
+                        <a:rPr lang="en-AU" sz="1000" b="0" i="0" u="none" strike="noStrike">
+                          <a:solidFill>
+                            <a:srgbClr val="000000"/>
+                          </a:solidFill>
+                          <a:effectLst/>
+                          <a:latin typeface="+mn-lt"/>
+                        </a:rPr>
+                        <a:t>Resource availability for human validation touchpoints is insufficient during deployment</a:t>
+                      </a:r>
+                    </a:p>
+                  </a:txBody>
+                  <a:tcPr anchor="ctr"/>
+                </a:tc>
+                <a:tc>
+                  <a:txBody>
+                    <a:bodyPr/>
+                    <a:lstStyle/>
+                    <a:p>
+                      <a:pPr algn="ctr" fontAlgn="t">
+                        <a:buNone/>
+                      </a:pPr>
+                      <a:r>
+                        <a:rPr lang="en-AU" sz="1000" b="0" i="0" u="none" strike="noStrike">
+                          <a:solidFill>
+                            <a:srgbClr val="000000"/>
+                          </a:solidFill>
+                          <a:effectLst/>
+                          <a:latin typeface="+mn-lt"/>
+                        </a:rPr>
+                        <a:t>M</a:t>
+                      </a:r>
+                    </a:p>
+                  </a:txBody>
+                  <a:tcPr marL="5443" marR="5443" marT="5443" marB="0" anchor="ctr"/>
+                </a:tc>
+                <a:tc>
+                  <a:txBody>
+                    <a:bodyPr/>
+                    <a:lstStyle/>
+                    <a:p>
+                      <a:pPr algn="ctr" fontAlgn="t">
+                        <a:buNone/>
+                      </a:pPr>
+                      <a:r>
+                        <a:rPr lang="en-AU" sz="1000" b="0" i="0" u="none" strike="noStrike">
+                          <a:solidFill>
+                            <a:srgbClr val="000000"/>
+                          </a:solidFill>
+                          <a:effectLst/>
+                          <a:latin typeface="+mn-lt"/>
+                        </a:rPr>
+                        <a:t>M</a:t>
+                      </a:r>
+                    </a:p>
+                  </a:txBody>
+                  <a:tcPr marL="5443" marR="5443" marT="5443" marB="0" anchor="ctr"/>
+                </a:tc>
+                <a:tc>
+                  <a:txBody>
+                    <a:bodyPr/>
+                    <a:lstStyle/>
+                    <a:p>
+                      <a:pPr algn="l" fontAlgn="t">
+                        <a:buNone/>
+                      </a:pPr>
+                      <a:r>
+                        <a:rPr lang="en-AU" sz="1000" b="0" i="0" u="none" strike="noStrike">
+                          <a:solidFill>
+                            <a:srgbClr val="000000"/>
+                          </a:solidFill>
+                          <a:effectLst/>
+                          <a:latin typeface="+mn-lt"/>
+                        </a:rPr>
+                        <a:t>Clearly define and communicate required human touchpoints; ensure validation resources are allocated before deployment; design self-sufficient platform to minimize touchpoint volume</a:t>
+                      </a:r>
                     </a:p>
                   </a:txBody>
                   <a:tcPr anchor="ctr"/>
@@ -5219,13 +6184,25 @@
                   </a:ext>
                 </a:extLst>
               </a:tr>
-              <a:tr h="281466">
-                <a:tc>
-                  <a:txBody>
-                    <a:bodyPr/>
-                    <a:lstStyle/>
-                    <a:p>
-                      <a:endParaRPr lang="en-AU" sz="900"/>
+              <a:tr h="540000">
+                <a:tc>
+                  <a:txBody>
+                    <a:bodyPr/>
+                    <a:lstStyle/>
+                    <a:p>
+                      <a:pPr algn="l" fontAlgn="t">
+                        <a:buNone/>
+                      </a:pPr>
+                      <a:r>
+                        <a:rPr lang="en-AU" sz="1000" b="0" i="0" u="none" strike="noStrike">
+                          <a:solidFill>
+                            <a:srgbClr val="000000"/>
+                          </a:solidFill>
+                          <a:effectLst/>
+                          <a:latin typeface="+mn-lt"/>
+                        </a:rPr>
+                        <a:t>Emerging AI technology advances faster than platform can adapt, causing capability obsolescence</a:t>
+                      </a:r>
                     </a:p>
                   </a:txBody>
                   <a:tcPr anchor="ctr"/>
@@ -5235,27 +6212,63 @@
                     <a:bodyPr/>
                     <a:lstStyle/>
                     <a:p>
-                      <a:endParaRPr lang="en-AU" sz="900"/>
-                    </a:p>
-                  </a:txBody>
-                  <a:tcPr anchor="ctr"/>
-                </a:tc>
-                <a:tc>
-                  <a:txBody>
-                    <a:bodyPr/>
-                    <a:lstStyle/>
-                    <a:p>
-                      <a:endParaRPr lang="en-AU" sz="900"/>
-                    </a:p>
-                  </a:txBody>
-                  <a:tcPr anchor="ctr"/>
-                </a:tc>
-                <a:tc>
-                  <a:txBody>
-                    <a:bodyPr/>
-                    <a:lstStyle/>
-                    <a:p>
-                      <a:endParaRPr lang="en-AU" sz="900"/>
+                      <a:pPr algn="ctr" fontAlgn="t">
+                        <a:buNone/>
+                      </a:pPr>
+                      <a:r>
+                        <a:rPr lang="en-AU" sz="1000" b="0" i="0" u="none" strike="noStrike">
+                          <a:solidFill>
+                            <a:srgbClr val="000000"/>
+                          </a:solidFill>
+                          <a:effectLst/>
+                          <a:latin typeface="+mn-lt"/>
+                        </a:rPr>
+                        <a:t>M</a:t>
+                      </a:r>
+                    </a:p>
+                  </a:txBody>
+                  <a:tcPr marL="5443" marR="5443" marT="5443" marB="0" anchor="ctr"/>
+                </a:tc>
+                <a:tc>
+                  <a:txBody>
+                    <a:bodyPr/>
+                    <a:lstStyle/>
+                    <a:p>
+                      <a:pPr algn="ctr" fontAlgn="t">
+                        <a:buNone/>
+                      </a:pPr>
+                      <a:r>
+                        <a:rPr lang="en-AU" sz="1000" b="0" i="0" u="none" strike="noStrike">
+                          <a:solidFill>
+                            <a:srgbClr val="000000"/>
+                          </a:solidFill>
+                          <a:effectLst/>
+                          <a:latin typeface="+mn-lt"/>
+                        </a:rPr>
+                        <a:t>L</a:t>
+                      </a:r>
+                    </a:p>
+                  </a:txBody>
+                  <a:tcPr marL="5443" marR="5443" marT="5443" marB="0" anchor="ctr"/>
+                </a:tc>
+                <a:tc>
+                  <a:txBody>
+                    <a:bodyPr/>
+                    <a:lstStyle/>
+                    <a:p>
+                      <a:pPr algn="l" fontAlgn="t">
+                        <a:buNone/>
+                      </a:pPr>
+                      <a:r>
+                        <a:rPr lang="en-AU" sz="1000" b="0" i="0" u="none" strike="noStrike">
+                          <a:solidFill>
+                            <a:srgbClr val="000000"/>
+                          </a:solidFill>
+                          <a:effectLst/>
+                          <a:latin typeface="+mn-lt"/>
+                        </a:rPr>
+                        <a:t>Build ongoing review of emerging AI capabilities into platform roadmap; design platform architecture for adaptability; plan regular capability assessments</a:t>
+                      </a:r>
                     </a:p>
                   </a:txBody>
                   <a:tcPr anchor="ctr"/>
@@ -5266,13 +6279,25 @@
                   </a:ext>
                 </a:extLst>
               </a:tr>
-              <a:tr h="281466">
-                <a:tc>
-                  <a:txBody>
-                    <a:bodyPr/>
-                    <a:lstStyle/>
-                    <a:p>
-                      <a:endParaRPr lang="en-AU" sz="900"/>
+              <a:tr h="540000">
+                <a:tc>
+                  <a:txBody>
+                    <a:bodyPr/>
+                    <a:lstStyle/>
+                    <a:p>
+                      <a:pPr algn="l" fontAlgn="t">
+                        <a:buNone/>
+                      </a:pPr>
+                      <a:r>
+                        <a:rPr lang="en-AU" sz="1000" b="0" i="0" u="none" strike="noStrike" dirty="0">
+                          <a:solidFill>
+                            <a:srgbClr val="000000"/>
+                          </a:solidFill>
+                          <a:effectLst/>
+                          <a:latin typeface="+mn-lt"/>
+                        </a:rPr>
+                        <a:t>Scope creep into broader supplier management functions beyond prequalification</a:t>
+                      </a:r>
                     </a:p>
                   </a:txBody>
                   <a:tcPr anchor="ctr"/>
@@ -5282,27 +6307,63 @@
                     <a:bodyPr/>
                     <a:lstStyle/>
                     <a:p>
-                      <a:endParaRPr lang="en-AU" sz="900" dirty="0"/>
-                    </a:p>
-                  </a:txBody>
-                  <a:tcPr anchor="ctr"/>
-                </a:tc>
-                <a:tc>
-                  <a:txBody>
-                    <a:bodyPr/>
-                    <a:lstStyle/>
-                    <a:p>
-                      <a:endParaRPr lang="en-AU" sz="900"/>
-                    </a:p>
-                  </a:txBody>
-                  <a:tcPr anchor="ctr"/>
-                </a:tc>
-                <a:tc>
-                  <a:txBody>
-                    <a:bodyPr/>
-                    <a:lstStyle/>
-                    <a:p>
-                      <a:endParaRPr lang="en-AU" sz="900" dirty="0"/>
+                      <a:pPr algn="ctr" fontAlgn="t">
+                        <a:buNone/>
+                      </a:pPr>
+                      <a:r>
+                        <a:rPr lang="en-AU" sz="1000" b="0" i="0" u="none" strike="noStrike">
+                          <a:solidFill>
+                            <a:srgbClr val="000000"/>
+                          </a:solidFill>
+                          <a:effectLst/>
+                          <a:latin typeface="+mn-lt"/>
+                        </a:rPr>
+                        <a:t>L</a:t>
+                      </a:r>
+                    </a:p>
+                  </a:txBody>
+                  <a:tcPr marL="5443" marR="5443" marT="5443" marB="0" anchor="ctr"/>
+                </a:tc>
+                <a:tc>
+                  <a:txBody>
+                    <a:bodyPr/>
+                    <a:lstStyle/>
+                    <a:p>
+                      <a:pPr algn="ctr" fontAlgn="t">
+                        <a:buNone/>
+                      </a:pPr>
+                      <a:r>
+                        <a:rPr lang="en-AU" sz="1000" b="0" i="0" u="none" strike="noStrike" dirty="0">
+                          <a:solidFill>
+                            <a:srgbClr val="000000"/>
+                          </a:solidFill>
+                          <a:effectLst/>
+                          <a:latin typeface="+mn-lt"/>
+                        </a:rPr>
+                        <a:t>M</a:t>
+                      </a:r>
+                    </a:p>
+                  </a:txBody>
+                  <a:tcPr marL="5443" marR="5443" marT="5443" marB="0" anchor="ctr"/>
+                </a:tc>
+                <a:tc>
+                  <a:txBody>
+                    <a:bodyPr/>
+                    <a:lstStyle/>
+                    <a:p>
+                      <a:pPr algn="l" fontAlgn="t">
+                        <a:buNone/>
+                      </a:pPr>
+                      <a:r>
+                        <a:rPr lang="en-AU" sz="1000" b="0" i="0" u="none" strike="noStrike" dirty="0">
+                          <a:solidFill>
+                            <a:srgbClr val="000000"/>
+                          </a:solidFill>
+                          <a:effectLst/>
+                          <a:latin typeface="+mn-lt"/>
+                        </a:rPr>
+                        <a:t>Maintain clear scope boundaries; position Phase 3 as foundation for future capabilities but not full implementation; manage stakeholder expectations through governance</a:t>
+                      </a:r>
                     </a:p>
                   </a:txBody>
                   <a:tcPr anchor="ctr"/>
@@ -5568,204 +6629,989 @@
           </a:p>
         </p:txBody>
       </p:sp>
-      <p:sp>
-        <p:nvSpPr>
-          <p:cNvPr id="3" name="Content Placeholder 2">
+      <p:graphicFrame>
+        <p:nvGraphicFramePr>
+          <p:cNvPr id="3" name="Table 2">
             <a:extLst>
               <a:ext uri="{FF2B5EF4-FFF2-40B4-BE49-F238E27FC236}">
-                <a16:creationId xmlns:a16="http://schemas.microsoft.com/office/drawing/2014/main" id="{5B964B81-5724-7D25-162E-440E723A01D9}"/>
+                <a16:creationId xmlns:a16="http://schemas.microsoft.com/office/drawing/2014/main" id="{6B24C4A7-A314-0620-B37D-0D1021DF3874}"/>
               </a:ext>
             </a:extLst>
           </p:cNvPr>
-          <p:cNvSpPr>
-            <a:spLocks noGrp="1"/>
-          </p:cNvSpPr>
+          <p:cNvGraphicFramePr>
+            <a:graphicFrameLocks noGrp="1"/>
+          </p:cNvGraphicFramePr>
           <p:nvPr>
-            <p:ph idx="1"/>
+            <p:extLst>
+              <p:ext uri="{D42A27DB-BD31-4B8C-83A1-F6EECF244321}">
+                <p14:modId xmlns:p14="http://schemas.microsoft.com/office/powerpoint/2010/main" val="1136481867"/>
+              </p:ext>
+            </p:extLst>
           </p:nvPr>
-        </p:nvSpPr>
-        <p:spPr>
-          <a:xfrm>
-            <a:off x="623888" y="1151164"/>
-            <a:ext cx="10726737" cy="4931229"/>
-          </a:xfrm>
-        </p:spPr>
-        <p:txBody>
-          <a:bodyPr vert="horz" lIns="72000" tIns="0" rIns="72000" bIns="0" rtlCol="0" anchor="t">
-            <a:normAutofit/>
-          </a:bodyPr>
-          <a:lstStyle/>
-          <a:p>
-            <a:pPr algn="just">
-              <a:lnSpc>
-                <a:spcPct val="150000"/>
-              </a:lnSpc>
-              <a:spcBef>
-                <a:spcPts val="1200"/>
-              </a:spcBef>
-            </a:pPr>
-            <a:r>
-              <a:rPr lang="en-AU" sz="1200" b="1" dirty="0">
-                <a:latin typeface="+mn-lt"/>
-                <a:cs typeface="Times New Roman" panose="02020603050405020304" pitchFamily="18" charset="0"/>
-              </a:rPr>
-              <a:t>Regulatory Compliance: </a:t>
-            </a:r>
-            <a:r>
-              <a:rPr lang="en-AU" sz="1200" dirty="0">
-                <a:latin typeface="+mn-lt"/>
-                <a:cs typeface="Times New Roman" panose="02020603050405020304" pitchFamily="18" charset="0"/>
-              </a:rPr>
-              <a:t>Platform must ensure compliance with organizational procurement and safety standards (fixed requirement)</a:t>
-            </a:r>
-          </a:p>
-          <a:p>
-            <a:pPr algn="just">
-              <a:lnSpc>
-                <a:spcPct val="150000"/>
-              </a:lnSpc>
-              <a:spcBef>
-                <a:spcPts val="1200"/>
-              </a:spcBef>
-            </a:pPr>
-            <a:r>
-              <a:rPr lang="en-AU" sz="1200" b="1" dirty="0">
-                <a:latin typeface="+mn-lt"/>
-                <a:cs typeface="Times New Roman" panose="02020603050405020304" pitchFamily="18" charset="0"/>
-              </a:rPr>
-              <a:t>Human Oversight Requirement: </a:t>
-            </a:r>
-            <a:r>
-              <a:rPr lang="en-AU" sz="1200" dirty="0">
-                <a:latin typeface="+mn-lt"/>
-                <a:cs typeface="Times New Roman" panose="02020603050405020304" pitchFamily="18" charset="0"/>
-              </a:rPr>
-              <a:t>Human verification must be retained at key decision points - cannot be fully automated (fixed governance requirement)</a:t>
-            </a:r>
-          </a:p>
-          <a:p>
-            <a:pPr algn="just">
-              <a:lnSpc>
-                <a:spcPct val="150000"/>
-              </a:lnSpc>
-              <a:spcBef>
-                <a:spcPts val="1200"/>
-              </a:spcBef>
-            </a:pPr>
-            <a:r>
-              <a:rPr lang="en-AU" sz="1200" b="1" dirty="0">
-                <a:latin typeface="+mn-lt"/>
-                <a:cs typeface="Times New Roman" panose="02020603050405020304" pitchFamily="18" charset="0"/>
-              </a:rPr>
-              <a:t>Phased Delivery: </a:t>
-            </a:r>
-            <a:r>
-              <a:rPr lang="en-AU" sz="1200" dirty="0">
-                <a:latin typeface="+mn-lt"/>
-                <a:cs typeface="Times New Roman" panose="02020603050405020304" pitchFamily="18" charset="0"/>
-              </a:rPr>
-              <a:t>Must implement in defined phases to manage risk - cannot deploy all capabilities simultaneously (fixed approach)</a:t>
-            </a:r>
-          </a:p>
-          <a:p>
-            <a:pPr algn="just">
-              <a:lnSpc>
-                <a:spcPct val="150000"/>
-              </a:lnSpc>
-              <a:spcBef>
-                <a:spcPts val="1200"/>
-              </a:spcBef>
-            </a:pPr>
-            <a:r>
-              <a:rPr lang="en-AU" sz="1200" b="1" dirty="0">
-                <a:latin typeface="+mn-lt"/>
-                <a:cs typeface="Times New Roman" panose="02020603050405020304" pitchFamily="18" charset="0"/>
-              </a:rPr>
-              <a:t>Existing Workflow Integration: </a:t>
-            </a:r>
-            <a:r>
-              <a:rPr lang="en-AU" sz="1200" dirty="0">
-                <a:latin typeface="+mn-lt"/>
-                <a:cs typeface="Times New Roman" panose="02020603050405020304" pitchFamily="18" charset="0"/>
-              </a:rPr>
-              <a:t>Must work within current supplier management processes without requiring major system overhauls (organizational constraint)</a:t>
-            </a:r>
-          </a:p>
-          <a:p>
-            <a:pPr algn="just">
-              <a:lnSpc>
-                <a:spcPct val="150000"/>
-              </a:lnSpc>
-              <a:spcBef>
-                <a:spcPts val="1200"/>
-              </a:spcBef>
-            </a:pPr>
-            <a:r>
-              <a:rPr lang="en-AU" sz="1200" b="1" dirty="0">
-                <a:latin typeface="+mn-lt"/>
-                <a:cs typeface="Times New Roman" panose="02020603050405020304" pitchFamily="18" charset="0"/>
-              </a:rPr>
-              <a:t>Audit Trail Requirements: </a:t>
-            </a:r>
-            <a:r>
-              <a:rPr lang="en-AU" sz="1200" dirty="0">
-                <a:latin typeface="+mn-lt"/>
-                <a:cs typeface="Times New Roman" panose="02020603050405020304" pitchFamily="18" charset="0"/>
-              </a:rPr>
-              <a:t>Must maintain complete audit trail of all decisions and assessments for regulatory and internal audit (fixed compliance requirement)</a:t>
-            </a:r>
-          </a:p>
-          <a:p>
-            <a:pPr algn="just">
-              <a:lnSpc>
-                <a:spcPct val="150000"/>
-              </a:lnSpc>
-              <a:spcBef>
-                <a:spcPts val="1200"/>
-              </a:spcBef>
-            </a:pPr>
-            <a:r>
-              <a:rPr lang="en-AU" sz="1200" b="1" dirty="0">
-                <a:latin typeface="+mn-lt"/>
-                <a:cs typeface="Times New Roman" panose="02020603050405020304" pitchFamily="18" charset="0"/>
-              </a:rPr>
-              <a:t>Data Security</a:t>
-            </a:r>
-            <a:r>
-              <a:rPr lang="en-AU" sz="1200" dirty="0">
-                <a:latin typeface="+mn-lt"/>
-                <a:cs typeface="Times New Roman" panose="02020603050405020304" pitchFamily="18" charset="0"/>
-              </a:rPr>
-              <a:t>: Must maintain secure repository for all supplier documentation with appropriate access controls (fixed security requirement)</a:t>
-            </a:r>
-          </a:p>
-          <a:p>
-            <a:pPr algn="just">
-              <a:lnSpc>
-                <a:spcPct val="150000"/>
-              </a:lnSpc>
-              <a:spcBef>
-                <a:spcPts val="1200"/>
-              </a:spcBef>
-            </a:pPr>
-            <a:r>
-              <a:rPr lang="en-AU" sz="1200" b="1" dirty="0">
-                <a:latin typeface="+mn-lt"/>
-                <a:cs typeface="Times New Roman" panose="02020603050405020304" pitchFamily="18" charset="0"/>
-              </a:rPr>
-              <a:t>Supplier Documentation Standards: </a:t>
-            </a:r>
-            <a:r>
-              <a:rPr lang="en-AU" sz="1200" dirty="0">
-                <a:latin typeface="+mn-lt"/>
-                <a:cs typeface="Times New Roman" panose="02020603050405020304" pitchFamily="18" charset="0"/>
-              </a:rPr>
-              <a:t>Platform effectiveness dependent on suppliers providing documentation in interpretable formats (external constraint)</a:t>
-            </a:r>
-            <a:endParaRPr lang="en-US" dirty="0"/>
-          </a:p>
-        </p:txBody>
-      </p:sp>
+        </p:nvGraphicFramePr>
+        <p:xfrm>
+          <a:off x="1734796" y="1145135"/>
+          <a:ext cx="8263784" cy="4761426"/>
+        </p:xfrm>
+        <a:graphic>
+          <a:graphicData uri="http://schemas.openxmlformats.org/drawingml/2006/table">
+            <a:tbl>
+              <a:tblPr firstRow="1" bandRow="1">
+                <a:tableStyleId>{5C22544A-7EE6-4342-B048-85BDC9FD1C3A}</a:tableStyleId>
+              </a:tblPr>
+              <a:tblGrid>
+                <a:gridCol w="1888622">
+                  <a:extLst>
+                    <a:ext uri="{9D8B030D-6E8A-4147-A177-3AD203B41FA5}">
+                      <a16:colId xmlns:a16="http://schemas.microsoft.com/office/drawing/2014/main" val="3745185145"/>
+                    </a:ext>
+                  </a:extLst>
+                </a:gridCol>
+                <a:gridCol w="6375162">
+                  <a:extLst>
+                    <a:ext uri="{9D8B030D-6E8A-4147-A177-3AD203B41FA5}">
+                      <a16:colId xmlns:a16="http://schemas.microsoft.com/office/drawing/2014/main" val="4038123176"/>
+                    </a:ext>
+                  </a:extLst>
+                </a:gridCol>
+              </a:tblGrid>
+              <a:tr h="250977">
+                <a:tc>
+                  <a:txBody>
+                    <a:bodyPr/>
+                    <a:lstStyle/>
+                    <a:p>
+                      <a:pPr algn="l" fontAlgn="b">
+                        <a:buNone/>
+                      </a:pPr>
+                      <a:r>
+                        <a:rPr lang="en-AU" sz="1000" b="1" i="0" u="none" strike="noStrike" dirty="0">
+                          <a:solidFill>
+                            <a:srgbClr val="FFFFFF"/>
+                          </a:solidFill>
+                          <a:effectLst/>
+                          <a:latin typeface="+mn-lt"/>
+                        </a:rPr>
+                        <a:t>Category</a:t>
+                      </a:r>
+                    </a:p>
+                  </a:txBody>
+                  <a:tcPr anchor="b"/>
+                </a:tc>
+                <a:tc>
+                  <a:txBody>
+                    <a:bodyPr/>
+                    <a:lstStyle/>
+                    <a:p>
+                      <a:pPr algn="l" fontAlgn="b">
+                        <a:buNone/>
+                      </a:pPr>
+                      <a:r>
+                        <a:rPr lang="en-AU" sz="1000" b="1" i="0" u="none" strike="noStrike" dirty="0">
+                          <a:solidFill>
+                            <a:srgbClr val="FFFFFF"/>
+                          </a:solidFill>
+                          <a:effectLst/>
+                          <a:latin typeface="+mn-lt"/>
+                        </a:rPr>
+                        <a:t>Constraint</a:t>
+                      </a:r>
+                    </a:p>
+                  </a:txBody>
+                  <a:tcPr anchor="b"/>
+                </a:tc>
+                <a:extLst>
+                  <a:ext uri="{0D108BD9-81ED-4DB2-BD59-A6C34878D82A}">
+                    <a16:rowId xmlns:a16="http://schemas.microsoft.com/office/drawing/2014/main" val="2991126565"/>
+                  </a:ext>
+                </a:extLst>
+              </a:tr>
+              <a:tr h="250977">
+                <a:tc rowSpan="3">
+                  <a:txBody>
+                    <a:bodyPr/>
+                    <a:lstStyle/>
+                    <a:p>
+                      <a:pPr algn="l" fontAlgn="b">
+                        <a:buNone/>
+                      </a:pPr>
+                      <a:r>
+                        <a:rPr lang="en-AU" sz="1000" b="1" i="0" u="none" strike="noStrike" dirty="0">
+                          <a:solidFill>
+                            <a:srgbClr val="000000"/>
+                          </a:solidFill>
+                          <a:effectLst/>
+                          <a:latin typeface="+mn-lt"/>
+                        </a:rPr>
+                        <a:t>Timeline Constraints</a:t>
+                      </a:r>
+                    </a:p>
+                  </a:txBody>
+                  <a:tcPr anchor="ctr"/>
+                </a:tc>
+                <a:tc>
+                  <a:txBody>
+                    <a:bodyPr/>
+                    <a:lstStyle/>
+                    <a:p>
+                      <a:pPr algn="l" fontAlgn="b">
+                        <a:buNone/>
+                      </a:pPr>
+                      <a:r>
+                        <a:rPr lang="en-AU" sz="1000" b="0" i="0" u="none" strike="noStrike" dirty="0">
+                          <a:solidFill>
+                            <a:srgbClr val="000000"/>
+                          </a:solidFill>
+                          <a:effectLst/>
+                          <a:latin typeface="+mn-lt"/>
+                        </a:rPr>
+                        <a:t>Must be delivered in 3 sequential phases (Phase 1 → Phase 2 → Phase 3)</a:t>
+                      </a:r>
+                    </a:p>
+                  </a:txBody>
+                  <a:tcPr anchor="b"/>
+                </a:tc>
+                <a:extLst>
+                  <a:ext uri="{0D108BD9-81ED-4DB2-BD59-A6C34878D82A}">
+                    <a16:rowId xmlns:a16="http://schemas.microsoft.com/office/drawing/2014/main" val="315123135"/>
+                  </a:ext>
+                </a:extLst>
+              </a:tr>
+              <a:tr h="250977">
+                <a:tc vMerge="1">
+                  <a:txBody>
+                    <a:bodyPr/>
+                    <a:lstStyle/>
+                    <a:p>
+                      <a:pPr algn="l" fontAlgn="b">
+                        <a:buNone/>
+                      </a:pPr>
+                      <a:endParaRPr lang="en-AU" sz="1000" b="1" i="0" u="none" strike="noStrike" dirty="0">
+                        <a:solidFill>
+                          <a:srgbClr val="000000"/>
+                        </a:solidFill>
+                        <a:effectLst/>
+                        <a:latin typeface="+mn-lt"/>
+                      </a:endParaRPr>
+                    </a:p>
+                  </a:txBody>
+                  <a:tcPr anchor="b"/>
+                </a:tc>
+                <a:tc>
+                  <a:txBody>
+                    <a:bodyPr/>
+                    <a:lstStyle/>
+                    <a:p>
+                      <a:pPr algn="l" fontAlgn="b">
+                        <a:buNone/>
+                      </a:pPr>
+                      <a:r>
+                        <a:rPr lang="en-AU" sz="1000" b="0" i="0" u="none" strike="noStrike" dirty="0">
+                          <a:solidFill>
+                            <a:srgbClr val="000000"/>
+                          </a:solidFill>
+                          <a:effectLst/>
+                          <a:latin typeface="+mn-lt"/>
+                        </a:rPr>
+                        <a:t>Phase 1 must include a mandatory trial and error period for AI calibration before full deployment</a:t>
+                      </a:r>
+                    </a:p>
+                  </a:txBody>
+                  <a:tcPr anchor="b"/>
+                </a:tc>
+                <a:extLst>
+                  <a:ext uri="{0D108BD9-81ED-4DB2-BD59-A6C34878D82A}">
+                    <a16:rowId xmlns:a16="http://schemas.microsoft.com/office/drawing/2014/main" val="1533000325"/>
+                  </a:ext>
+                </a:extLst>
+              </a:tr>
+              <a:tr h="250977">
+                <a:tc vMerge="1">
+                  <a:txBody>
+                    <a:bodyPr/>
+                    <a:lstStyle/>
+                    <a:p>
+                      <a:pPr algn="l" fontAlgn="b">
+                        <a:buNone/>
+                      </a:pPr>
+                      <a:endParaRPr lang="en-AU" sz="1000" b="1" i="0" u="none" strike="noStrike" dirty="0">
+                        <a:solidFill>
+                          <a:srgbClr val="000000"/>
+                        </a:solidFill>
+                        <a:effectLst/>
+                        <a:latin typeface="+mn-lt"/>
+                      </a:endParaRPr>
+                    </a:p>
+                  </a:txBody>
+                  <a:tcPr anchor="b"/>
+                </a:tc>
+                <a:tc>
+                  <a:txBody>
+                    <a:bodyPr/>
+                    <a:lstStyle/>
+                    <a:p>
+                      <a:pPr algn="l" fontAlgn="b">
+                        <a:buNone/>
+                      </a:pPr>
+                      <a:r>
+                        <a:rPr lang="en-AU" sz="1000" b="0" i="0" u="none" strike="noStrike" dirty="0">
+                          <a:solidFill>
+                            <a:srgbClr val="000000"/>
+                          </a:solidFill>
+                          <a:effectLst/>
+                          <a:latin typeface="+mn-lt"/>
+                        </a:rPr>
+                        <a:t>Value realization is dependent on successful completion of each phase before advancing</a:t>
+                      </a:r>
+                    </a:p>
+                  </a:txBody>
+                  <a:tcPr anchor="b"/>
+                </a:tc>
+                <a:extLst>
+                  <a:ext uri="{0D108BD9-81ED-4DB2-BD59-A6C34878D82A}">
+                    <a16:rowId xmlns:a16="http://schemas.microsoft.com/office/drawing/2014/main" val="3042076473"/>
+                  </a:ext>
+                </a:extLst>
+              </a:tr>
+              <a:tr h="250977">
+                <a:tc rowSpan="3">
+                  <a:txBody>
+                    <a:bodyPr/>
+                    <a:lstStyle/>
+                    <a:p>
+                      <a:pPr algn="l" fontAlgn="b">
+                        <a:buNone/>
+                      </a:pPr>
+                      <a:r>
+                        <a:rPr lang="en-AU" sz="1000" b="1" i="0" u="none" strike="noStrike" dirty="0">
+                          <a:solidFill>
+                            <a:srgbClr val="000000"/>
+                          </a:solidFill>
+                          <a:effectLst/>
+                          <a:latin typeface="+mn-lt"/>
+                        </a:rPr>
+                        <a:t>Technical Constraints</a:t>
+                      </a:r>
+                    </a:p>
+                  </a:txBody>
+                  <a:tcPr anchor="ctr"/>
+                </a:tc>
+                <a:tc>
+                  <a:txBody>
+                    <a:bodyPr/>
+                    <a:lstStyle/>
+                    <a:p>
+                      <a:pPr algn="l" fontAlgn="b">
+                        <a:buNone/>
+                      </a:pPr>
+                      <a:r>
+                        <a:rPr lang="en-AU" sz="1000" b="0" i="0" u="none" strike="noStrike" dirty="0">
+                          <a:solidFill>
+                            <a:srgbClr val="000000"/>
+                          </a:solidFill>
+                          <a:effectLst/>
+                          <a:latin typeface="+mn-lt"/>
+                        </a:rPr>
+                        <a:t>Platform must support multiple document formats for supplier information</a:t>
+                      </a:r>
+                    </a:p>
+                  </a:txBody>
+                  <a:tcPr anchor="b"/>
+                </a:tc>
+                <a:extLst>
+                  <a:ext uri="{0D108BD9-81ED-4DB2-BD59-A6C34878D82A}">
+                    <a16:rowId xmlns:a16="http://schemas.microsoft.com/office/drawing/2014/main" val="2294227785"/>
+                  </a:ext>
+                </a:extLst>
+              </a:tr>
+              <a:tr h="250977">
+                <a:tc vMerge="1">
+                  <a:txBody>
+                    <a:bodyPr/>
+                    <a:lstStyle/>
+                    <a:p>
+                      <a:pPr algn="l" fontAlgn="b">
+                        <a:buNone/>
+                      </a:pPr>
+                      <a:endParaRPr lang="en-AU" sz="1000" b="1" i="0" u="none" strike="noStrike" dirty="0">
+                        <a:solidFill>
+                          <a:srgbClr val="000000"/>
+                        </a:solidFill>
+                        <a:effectLst/>
+                        <a:latin typeface="+mn-lt"/>
+                      </a:endParaRPr>
+                    </a:p>
+                  </a:txBody>
+                  <a:tcPr anchor="b"/>
+                </a:tc>
+                <a:tc>
+                  <a:txBody>
+                    <a:bodyPr/>
+                    <a:lstStyle/>
+                    <a:p>
+                      <a:pPr algn="l" fontAlgn="b">
+                        <a:buNone/>
+                      </a:pPr>
+                      <a:r>
+                        <a:rPr lang="en-AU" sz="1000" b="0" i="0" u="none" strike="noStrike" dirty="0">
+                          <a:solidFill>
+                            <a:srgbClr val="000000"/>
+                          </a:solidFill>
+                          <a:effectLst/>
+                          <a:latin typeface="+mn-lt"/>
+                        </a:rPr>
+                        <a:t>Must integrate with existing supplier contact and document collection processes (human touchpoint)</a:t>
+                      </a:r>
+                    </a:p>
+                  </a:txBody>
+                  <a:tcPr anchor="b"/>
+                </a:tc>
+                <a:extLst>
+                  <a:ext uri="{0D108BD9-81ED-4DB2-BD59-A6C34878D82A}">
+                    <a16:rowId xmlns:a16="http://schemas.microsoft.com/office/drawing/2014/main" val="4183609419"/>
+                  </a:ext>
+                </a:extLst>
+              </a:tr>
+              <a:tr h="250977">
+                <a:tc vMerge="1">
+                  <a:txBody>
+                    <a:bodyPr/>
+                    <a:lstStyle/>
+                    <a:p>
+                      <a:pPr algn="l" fontAlgn="b">
+                        <a:buNone/>
+                      </a:pPr>
+                      <a:endParaRPr lang="en-AU" sz="1000" b="1" i="0" u="none" strike="noStrike" dirty="0">
+                        <a:solidFill>
+                          <a:srgbClr val="000000"/>
+                        </a:solidFill>
+                        <a:effectLst/>
+                        <a:latin typeface="+mn-lt"/>
+                      </a:endParaRPr>
+                    </a:p>
+                  </a:txBody>
+                  <a:tcPr anchor="b"/>
+                </a:tc>
+                <a:tc>
+                  <a:txBody>
+                    <a:bodyPr/>
+                    <a:lstStyle/>
+                    <a:p>
+                      <a:pPr algn="l" fontAlgn="b">
+                        <a:buNone/>
+                      </a:pPr>
+                      <a:r>
+                        <a:rPr lang="en-AU" sz="1000" b="0" i="0" u="none" strike="noStrike" dirty="0">
+                          <a:solidFill>
+                            <a:srgbClr val="000000"/>
+                          </a:solidFill>
+                          <a:effectLst/>
+                          <a:latin typeface="+mn-lt"/>
+                        </a:rPr>
+                        <a:t>AI capabilities are limited by current state of technology and will require ongoing evolution</a:t>
+                      </a:r>
+                    </a:p>
+                  </a:txBody>
+                  <a:tcPr anchor="b"/>
+                </a:tc>
+                <a:extLst>
+                  <a:ext uri="{0D108BD9-81ED-4DB2-BD59-A6C34878D82A}">
+                    <a16:rowId xmlns:a16="http://schemas.microsoft.com/office/drawing/2014/main" val="137338708"/>
+                  </a:ext>
+                </a:extLst>
+              </a:tr>
+              <a:tr h="250977">
+                <a:tc rowSpan="3">
+                  <a:txBody>
+                    <a:bodyPr/>
+                    <a:lstStyle/>
+                    <a:p>
+                      <a:pPr algn="l" fontAlgn="b">
+                        <a:buNone/>
+                      </a:pPr>
+                      <a:r>
+                        <a:rPr lang="en-AU" sz="1000" b="1" i="0" u="none" strike="noStrike" dirty="0">
+                          <a:solidFill>
+                            <a:srgbClr val="000000"/>
+                          </a:solidFill>
+                          <a:effectLst/>
+                          <a:latin typeface="+mn-lt"/>
+                        </a:rPr>
+                        <a:t>Resource Constraints</a:t>
+                      </a:r>
+                    </a:p>
+                  </a:txBody>
+                  <a:tcPr anchor="ctr"/>
+                </a:tc>
+                <a:tc>
+                  <a:txBody>
+                    <a:bodyPr/>
+                    <a:lstStyle/>
+                    <a:p>
+                      <a:pPr algn="l" fontAlgn="b">
+                        <a:buNone/>
+                      </a:pPr>
+                      <a:r>
+                        <a:rPr lang="en-AU" sz="1000" b="0" i="0" u="none" strike="noStrike" dirty="0">
+                          <a:solidFill>
+                            <a:srgbClr val="000000"/>
+                          </a:solidFill>
+                          <a:effectLst/>
+                          <a:latin typeface="+mn-lt"/>
+                        </a:rPr>
+                        <a:t>Human reviewers must remain available for validation and approval at defined touchpoints</a:t>
+                      </a:r>
+                    </a:p>
+                  </a:txBody>
+                  <a:tcPr anchor="b"/>
+                </a:tc>
+                <a:extLst>
+                  <a:ext uri="{0D108BD9-81ED-4DB2-BD59-A6C34878D82A}">
+                    <a16:rowId xmlns:a16="http://schemas.microsoft.com/office/drawing/2014/main" val="1532205137"/>
+                  </a:ext>
+                </a:extLst>
+              </a:tr>
+              <a:tr h="250977">
+                <a:tc vMerge="1">
+                  <a:txBody>
+                    <a:bodyPr/>
+                    <a:lstStyle/>
+                    <a:p>
+                      <a:pPr algn="l" fontAlgn="b">
+                        <a:buNone/>
+                      </a:pPr>
+                      <a:endParaRPr lang="en-AU" sz="1000" b="1" i="0" u="none" strike="noStrike" dirty="0">
+                        <a:solidFill>
+                          <a:srgbClr val="000000"/>
+                        </a:solidFill>
+                        <a:effectLst/>
+                        <a:latin typeface="+mn-lt"/>
+                      </a:endParaRPr>
+                    </a:p>
+                  </a:txBody>
+                  <a:tcPr anchor="b"/>
+                </a:tc>
+                <a:tc>
+                  <a:txBody>
+                    <a:bodyPr/>
+                    <a:lstStyle/>
+                    <a:p>
+                      <a:pPr algn="l" fontAlgn="b">
+                        <a:buNone/>
+                      </a:pPr>
+                      <a:r>
+                        <a:rPr lang="en-AU" sz="1000" b="0" i="0" u="none" strike="noStrike" dirty="0">
+                          <a:solidFill>
+                            <a:srgbClr val="000000"/>
+                          </a:solidFill>
+                          <a:effectLst/>
+                          <a:latin typeface="+mn-lt"/>
+                        </a:rPr>
+                        <a:t>Dedicated personnel still required for supplier contact, document collection, and final approval</a:t>
+                      </a:r>
+                    </a:p>
+                  </a:txBody>
+                  <a:tcPr anchor="b"/>
+                </a:tc>
+                <a:extLst>
+                  <a:ext uri="{0D108BD9-81ED-4DB2-BD59-A6C34878D82A}">
+                    <a16:rowId xmlns:a16="http://schemas.microsoft.com/office/drawing/2014/main" val="2406325426"/>
+                  </a:ext>
+                </a:extLst>
+              </a:tr>
+              <a:tr h="250977">
+                <a:tc vMerge="1">
+                  <a:txBody>
+                    <a:bodyPr/>
+                    <a:lstStyle/>
+                    <a:p>
+                      <a:pPr algn="l" fontAlgn="b">
+                        <a:buNone/>
+                      </a:pPr>
+                      <a:endParaRPr lang="en-AU" sz="1000" b="1" i="0" u="none" strike="noStrike" dirty="0">
+                        <a:solidFill>
+                          <a:srgbClr val="000000"/>
+                        </a:solidFill>
+                        <a:effectLst/>
+                        <a:latin typeface="+mn-lt"/>
+                      </a:endParaRPr>
+                    </a:p>
+                  </a:txBody>
+                  <a:tcPr anchor="b"/>
+                </a:tc>
+                <a:tc>
+                  <a:txBody>
+                    <a:bodyPr/>
+                    <a:lstStyle/>
+                    <a:p>
+                      <a:pPr algn="l" fontAlgn="b">
+                        <a:buNone/>
+                      </a:pPr>
+                      <a:r>
+                        <a:rPr lang="en-AU" sz="1000" b="0" i="0" u="none" strike="noStrike" dirty="0">
+                          <a:solidFill>
+                            <a:srgbClr val="000000"/>
+                          </a:solidFill>
+                          <a:effectLst/>
+                          <a:latin typeface="+mn-lt"/>
+                        </a:rPr>
+                        <a:t>Manual risk assessment expertise may be required during Phase 1 and 2 transition</a:t>
+                      </a:r>
+                    </a:p>
+                  </a:txBody>
+                  <a:tcPr anchor="b"/>
+                </a:tc>
+                <a:extLst>
+                  <a:ext uri="{0D108BD9-81ED-4DB2-BD59-A6C34878D82A}">
+                    <a16:rowId xmlns:a16="http://schemas.microsoft.com/office/drawing/2014/main" val="2464914125"/>
+                  </a:ext>
+                </a:extLst>
+              </a:tr>
+              <a:tr h="250977">
+                <a:tc rowSpan="3">
+                  <a:txBody>
+                    <a:bodyPr/>
+                    <a:lstStyle/>
+                    <a:p>
+                      <a:pPr algn="l" fontAlgn="b">
+                        <a:buNone/>
+                      </a:pPr>
+                      <a:r>
+                        <a:rPr lang="en-AU" sz="1000" b="1" i="0" u="none" strike="noStrike" dirty="0">
+                          <a:solidFill>
+                            <a:srgbClr val="000000"/>
+                          </a:solidFill>
+                          <a:effectLst/>
+                          <a:latin typeface="+mn-lt"/>
+                        </a:rPr>
+                        <a:t>Operational Constraints</a:t>
+                      </a:r>
+                    </a:p>
+                  </a:txBody>
+                  <a:tcPr anchor="ctr"/>
+                </a:tc>
+                <a:tc>
+                  <a:txBody>
+                    <a:bodyPr/>
+                    <a:lstStyle/>
+                    <a:p>
+                      <a:pPr algn="l" fontAlgn="b">
+                        <a:buNone/>
+                      </a:pPr>
+                      <a:r>
+                        <a:rPr lang="en-AU" sz="1000" b="0" i="0" u="none" strike="noStrike" dirty="0">
+                          <a:solidFill>
+                            <a:srgbClr val="000000"/>
+                          </a:solidFill>
+                          <a:effectLst/>
+                          <a:latin typeface="+mn-lt"/>
+                        </a:rPr>
+                        <a:t>Human verification must be retained at key decision points (non-negotiable requirement)</a:t>
+                      </a:r>
+                    </a:p>
+                  </a:txBody>
+                  <a:tcPr anchor="b"/>
+                </a:tc>
+                <a:extLst>
+                  <a:ext uri="{0D108BD9-81ED-4DB2-BD59-A6C34878D82A}">
+                    <a16:rowId xmlns:a16="http://schemas.microsoft.com/office/drawing/2014/main" val="26071471"/>
+                  </a:ext>
+                </a:extLst>
+              </a:tr>
+              <a:tr h="250977">
+                <a:tc vMerge="1">
+                  <a:txBody>
+                    <a:bodyPr/>
+                    <a:lstStyle/>
+                    <a:p>
+                      <a:pPr algn="l" fontAlgn="b">
+                        <a:buNone/>
+                      </a:pPr>
+                      <a:endParaRPr lang="en-AU" sz="1000" b="1" i="0" u="none" strike="noStrike" dirty="0">
+                        <a:solidFill>
+                          <a:srgbClr val="000000"/>
+                        </a:solidFill>
+                        <a:effectLst/>
+                        <a:latin typeface="+mn-lt"/>
+                      </a:endParaRPr>
+                    </a:p>
+                  </a:txBody>
+                  <a:tcPr anchor="b"/>
+                </a:tc>
+                <a:tc>
+                  <a:txBody>
+                    <a:bodyPr/>
+                    <a:lstStyle/>
+                    <a:p>
+                      <a:pPr algn="l" fontAlgn="b">
+                        <a:buNone/>
+                      </a:pPr>
+                      <a:r>
+                        <a:rPr lang="en-AU" sz="1000" b="0" i="0" u="none" strike="noStrike" dirty="0">
+                          <a:solidFill>
+                            <a:srgbClr val="000000"/>
+                          </a:solidFill>
+                          <a:effectLst/>
+                          <a:latin typeface="+mn-lt"/>
+                        </a:rPr>
+                        <a:t>Platform must augment, not replace, professional judgment in prequalification decisions</a:t>
+                      </a:r>
+                    </a:p>
+                  </a:txBody>
+                  <a:tcPr anchor="b"/>
+                </a:tc>
+                <a:extLst>
+                  <a:ext uri="{0D108BD9-81ED-4DB2-BD59-A6C34878D82A}">
+                    <a16:rowId xmlns:a16="http://schemas.microsoft.com/office/drawing/2014/main" val="2931911082"/>
+                  </a:ext>
+                </a:extLst>
+              </a:tr>
+              <a:tr h="250977">
+                <a:tc vMerge="1">
+                  <a:txBody>
+                    <a:bodyPr/>
+                    <a:lstStyle/>
+                    <a:p>
+                      <a:pPr algn="l" fontAlgn="b">
+                        <a:buNone/>
+                      </a:pPr>
+                      <a:endParaRPr lang="en-AU" sz="1000" b="1" i="0" u="none" strike="noStrike" dirty="0">
+                        <a:solidFill>
+                          <a:srgbClr val="000000"/>
+                        </a:solidFill>
+                        <a:effectLst/>
+                        <a:latin typeface="+mn-lt"/>
+                      </a:endParaRPr>
+                    </a:p>
+                  </a:txBody>
+                  <a:tcPr anchor="b"/>
+                </a:tc>
+                <a:tc>
+                  <a:txBody>
+                    <a:bodyPr/>
+                    <a:lstStyle/>
+                    <a:p>
+                      <a:pPr algn="l" fontAlgn="b">
+                        <a:buNone/>
+                      </a:pPr>
+                      <a:r>
+                        <a:rPr lang="en-AU" sz="1000" b="0" i="0" u="none" strike="noStrike" dirty="0">
+                          <a:solidFill>
+                            <a:srgbClr val="000000"/>
+                          </a:solidFill>
+                          <a:effectLst/>
+                          <a:latin typeface="+mn-lt"/>
+                        </a:rPr>
+                        <a:t>Existing supplier onboarding processes must continue during platform development and deployment</a:t>
+                      </a:r>
+                    </a:p>
+                  </a:txBody>
+                  <a:tcPr anchor="b"/>
+                </a:tc>
+                <a:extLst>
+                  <a:ext uri="{0D108BD9-81ED-4DB2-BD59-A6C34878D82A}">
+                    <a16:rowId xmlns:a16="http://schemas.microsoft.com/office/drawing/2014/main" val="944453742"/>
+                  </a:ext>
+                </a:extLst>
+              </a:tr>
+              <a:tr h="250977">
+                <a:tc rowSpan="3">
+                  <a:txBody>
+                    <a:bodyPr/>
+                    <a:lstStyle/>
+                    <a:p>
+                      <a:pPr algn="l" fontAlgn="b">
+                        <a:buNone/>
+                      </a:pPr>
+                      <a:r>
+                        <a:rPr lang="en-AU" sz="1000" b="1" i="0" u="none" strike="noStrike" dirty="0">
+                          <a:solidFill>
+                            <a:srgbClr val="000000"/>
+                          </a:solidFill>
+                          <a:effectLst/>
+                          <a:latin typeface="+mn-lt"/>
+                        </a:rPr>
+                        <a:t>Governance Constraints</a:t>
+                      </a:r>
+                    </a:p>
+                  </a:txBody>
+                  <a:tcPr anchor="ctr"/>
+                </a:tc>
+                <a:tc>
+                  <a:txBody>
+                    <a:bodyPr/>
+                    <a:lstStyle/>
+                    <a:p>
+                      <a:pPr algn="l" fontAlgn="b">
+                        <a:buNone/>
+                      </a:pPr>
+                      <a:r>
+                        <a:rPr lang="en-AU" sz="1000" b="0" i="0" u="none" strike="noStrike" dirty="0">
+                          <a:solidFill>
+                            <a:srgbClr val="000000"/>
+                          </a:solidFill>
+                          <a:effectLst/>
+                          <a:latin typeface="+mn-lt"/>
+                        </a:rPr>
+                        <a:t>Phased delivery is mandatory to manage implementation risk</a:t>
+                      </a:r>
+                    </a:p>
+                  </a:txBody>
+                  <a:tcPr anchor="b"/>
+                </a:tc>
+                <a:extLst>
+                  <a:ext uri="{0D108BD9-81ED-4DB2-BD59-A6C34878D82A}">
+                    <a16:rowId xmlns:a16="http://schemas.microsoft.com/office/drawing/2014/main" val="749982338"/>
+                  </a:ext>
+                </a:extLst>
+              </a:tr>
+              <a:tr h="250977">
+                <a:tc vMerge="1">
+                  <a:txBody>
+                    <a:bodyPr/>
+                    <a:lstStyle/>
+                    <a:p>
+                      <a:pPr algn="l" fontAlgn="b">
+                        <a:buNone/>
+                      </a:pPr>
+                      <a:endParaRPr lang="en-AU" sz="1000" b="1" i="0" u="none" strike="noStrike" dirty="0">
+                        <a:solidFill>
+                          <a:srgbClr val="000000"/>
+                        </a:solidFill>
+                        <a:effectLst/>
+                        <a:latin typeface="+mn-lt"/>
+                      </a:endParaRPr>
+                    </a:p>
+                  </a:txBody>
+                  <a:tcPr anchor="b"/>
+                </a:tc>
+                <a:tc>
+                  <a:txBody>
+                    <a:bodyPr/>
+                    <a:lstStyle/>
+                    <a:p>
+                      <a:pPr algn="l" fontAlgn="b">
+                        <a:buNone/>
+                      </a:pPr>
+                      <a:r>
+                        <a:rPr lang="en-AU" sz="1000" b="0" i="0" u="none" strike="noStrike" dirty="0">
+                          <a:solidFill>
+                            <a:srgbClr val="000000"/>
+                          </a:solidFill>
+                          <a:effectLst/>
+                          <a:latin typeface="+mn-lt"/>
+                        </a:rPr>
+                        <a:t>Trial period results must validate accuracy and consistency before full deployment approval</a:t>
+                      </a:r>
+                    </a:p>
+                  </a:txBody>
+                  <a:tcPr anchor="b"/>
+                </a:tc>
+                <a:extLst>
+                  <a:ext uri="{0D108BD9-81ED-4DB2-BD59-A6C34878D82A}">
+                    <a16:rowId xmlns:a16="http://schemas.microsoft.com/office/drawing/2014/main" val="2016672397"/>
+                  </a:ext>
+                </a:extLst>
+              </a:tr>
+              <a:tr h="250977">
+                <a:tc vMerge="1">
+                  <a:txBody>
+                    <a:bodyPr/>
+                    <a:lstStyle/>
+                    <a:p>
+                      <a:pPr algn="l" fontAlgn="b">
+                        <a:buNone/>
+                      </a:pPr>
+                      <a:endParaRPr lang="en-AU" sz="1000" b="1" i="0" u="none" strike="noStrike" dirty="0">
+                        <a:solidFill>
+                          <a:srgbClr val="000000"/>
+                        </a:solidFill>
+                        <a:effectLst/>
+                        <a:latin typeface="+mn-lt"/>
+                      </a:endParaRPr>
+                    </a:p>
+                  </a:txBody>
+                  <a:tcPr anchor="b"/>
+                </a:tc>
+                <a:tc>
+                  <a:txBody>
+                    <a:bodyPr/>
+                    <a:lstStyle/>
+                    <a:p>
+                      <a:pPr algn="l" fontAlgn="b">
+                        <a:buNone/>
+                      </a:pPr>
+                      <a:r>
+                        <a:rPr lang="en-AU" sz="1000" b="0" i="0" u="none" strike="noStrike" dirty="0">
+                          <a:solidFill>
+                            <a:srgbClr val="000000"/>
+                          </a:solidFill>
+                          <a:effectLst/>
+                          <a:latin typeface="+mn-lt"/>
+                        </a:rPr>
+                        <a:t>Platform must maintain audit trails and compliance with organizational governance requirements</a:t>
+                      </a:r>
+                    </a:p>
+                  </a:txBody>
+                  <a:tcPr anchor="b"/>
+                </a:tc>
+                <a:extLst>
+                  <a:ext uri="{0D108BD9-81ED-4DB2-BD59-A6C34878D82A}">
+                    <a16:rowId xmlns:a16="http://schemas.microsoft.com/office/drawing/2014/main" val="1626780896"/>
+                  </a:ext>
+                </a:extLst>
+              </a:tr>
+              <a:tr h="250977">
+                <a:tc rowSpan="3">
+                  <a:txBody>
+                    <a:bodyPr/>
+                    <a:lstStyle/>
+                    <a:p>
+                      <a:pPr algn="l" fontAlgn="b">
+                        <a:buNone/>
+                      </a:pPr>
+                      <a:r>
+                        <a:rPr lang="en-AU" sz="1000" b="1" i="0" u="none" strike="noStrike" dirty="0">
+                          <a:solidFill>
+                            <a:srgbClr val="000000"/>
+                          </a:solidFill>
+                          <a:effectLst/>
+                          <a:latin typeface="+mn-lt"/>
+                        </a:rPr>
+                        <a:t>Quality Constraints</a:t>
+                      </a:r>
+                    </a:p>
+                  </a:txBody>
+                  <a:tcPr anchor="ctr"/>
+                </a:tc>
+                <a:tc>
+                  <a:txBody>
+                    <a:bodyPr/>
+                    <a:lstStyle/>
+                    <a:p>
+                      <a:pPr algn="l" fontAlgn="b">
+                        <a:buNone/>
+                      </a:pPr>
+                      <a:r>
+                        <a:rPr lang="en-AU" sz="1000" b="0" i="0" u="none" strike="noStrike" dirty="0">
+                          <a:solidFill>
+                            <a:srgbClr val="000000"/>
+                          </a:solidFill>
+                          <a:effectLst/>
+                          <a:latin typeface="+mn-lt"/>
+                        </a:rPr>
+                        <a:t>AI outputs must meet defined accuracy and consistency standards through calibration</a:t>
+                      </a:r>
+                    </a:p>
+                  </a:txBody>
+                  <a:tcPr anchor="b"/>
+                </a:tc>
+                <a:extLst>
+                  <a:ext uri="{0D108BD9-81ED-4DB2-BD59-A6C34878D82A}">
+                    <a16:rowId xmlns:a16="http://schemas.microsoft.com/office/drawing/2014/main" val="3858279909"/>
+                  </a:ext>
+                </a:extLst>
+              </a:tr>
+              <a:tr h="0">
+                <a:tc vMerge="1">
+                  <a:txBody>
+                    <a:bodyPr/>
+                    <a:lstStyle/>
+                    <a:p>
+                      <a:pPr algn="l" fontAlgn="b">
+                        <a:buNone/>
+                      </a:pPr>
+                      <a:endParaRPr lang="en-AU" sz="1000" b="0" i="0" u="none" strike="noStrike" dirty="0">
+                        <a:solidFill>
+                          <a:srgbClr val="000000"/>
+                        </a:solidFill>
+                        <a:effectLst/>
+                        <a:latin typeface="+mn-lt"/>
+                      </a:endParaRPr>
+                    </a:p>
+                  </a:txBody>
+                  <a:tcPr anchor="b"/>
+                </a:tc>
+                <a:tc>
+                  <a:txBody>
+                    <a:bodyPr/>
+                    <a:lstStyle/>
+                    <a:p>
+                      <a:pPr algn="l" fontAlgn="b">
+                        <a:buNone/>
+                      </a:pPr>
+                      <a:r>
+                        <a:rPr lang="en-AU" sz="1000" b="0" i="0" u="none" strike="noStrike" dirty="0">
+                          <a:solidFill>
+                            <a:srgbClr val="000000"/>
+                          </a:solidFill>
+                          <a:effectLst/>
+                          <a:latin typeface="+mn-lt"/>
+                        </a:rPr>
+                        <a:t>Platform must deliver consistent prequalification outcomes across all reviewers</a:t>
+                      </a:r>
+                    </a:p>
+                  </a:txBody>
+                  <a:tcPr anchor="b"/>
+                </a:tc>
+                <a:extLst>
+                  <a:ext uri="{0D108BD9-81ED-4DB2-BD59-A6C34878D82A}">
+                    <a16:rowId xmlns:a16="http://schemas.microsoft.com/office/drawing/2014/main" val="1385712632"/>
+                  </a:ext>
+                </a:extLst>
+              </a:tr>
+              <a:tr h="250977">
+                <a:tc vMerge="1">
+                  <a:txBody>
+                    <a:bodyPr/>
+                    <a:lstStyle/>
+                    <a:p>
+                      <a:pPr algn="l" fontAlgn="b">
+                        <a:buNone/>
+                      </a:pPr>
+                      <a:endParaRPr lang="en-AU" sz="1000" b="0" i="0" u="none" strike="noStrike" dirty="0">
+                        <a:solidFill>
+                          <a:srgbClr val="000000"/>
+                        </a:solidFill>
+                        <a:effectLst/>
+                        <a:latin typeface="+mn-lt"/>
+                      </a:endParaRPr>
+                    </a:p>
+                  </a:txBody>
+                  <a:tcPr anchor="b"/>
+                </a:tc>
+                <a:tc>
+                  <a:txBody>
+                    <a:bodyPr/>
+                    <a:lstStyle/>
+                    <a:p>
+                      <a:pPr algn="l" fontAlgn="b">
+                        <a:buNone/>
+                      </a:pPr>
+                      <a:r>
+                        <a:rPr lang="en-AU" sz="1000" b="0" i="0" u="none" strike="noStrike" dirty="0">
+                          <a:solidFill>
+                            <a:srgbClr val="000000"/>
+                          </a:solidFill>
+                          <a:effectLst/>
+                          <a:latin typeface="+mn-lt"/>
+                        </a:rPr>
+                        <a:t>Critical Risk verification must align with organizational Critical Risk standards and requirements</a:t>
+                      </a:r>
+                    </a:p>
+                  </a:txBody>
+                  <a:tcPr anchor="b"/>
+                </a:tc>
+                <a:extLst>
+                  <a:ext uri="{0D108BD9-81ED-4DB2-BD59-A6C34878D82A}">
+                    <a16:rowId xmlns:a16="http://schemas.microsoft.com/office/drawing/2014/main" val="816331923"/>
+                  </a:ext>
+                </a:extLst>
+              </a:tr>
+            </a:tbl>
+          </a:graphicData>
+        </a:graphic>
+      </p:graphicFrame>
     </p:spTree>
     <p:extLst>
       <p:ext uri="{BB962C8B-B14F-4D97-AF65-F5344CB8AC3E}">
@@ -5931,276 +7777,501 @@
           </a:p>
         </p:txBody>
       </p:sp>
-      <p:sp>
-        <p:nvSpPr>
-          <p:cNvPr id="3" name="Content Placeholder 2">
+      <p:graphicFrame>
+        <p:nvGraphicFramePr>
+          <p:cNvPr id="5" name="Table 4">
             <a:extLst>
               <a:ext uri="{FF2B5EF4-FFF2-40B4-BE49-F238E27FC236}">
-                <a16:creationId xmlns:a16="http://schemas.microsoft.com/office/drawing/2014/main" id="{69027C4C-647A-775A-6585-AB3492B00AAC}"/>
+                <a16:creationId xmlns:a16="http://schemas.microsoft.com/office/drawing/2014/main" id="{461F6F24-3886-7C21-23A7-ED96E0C9DEE6}"/>
               </a:ext>
             </a:extLst>
           </p:cNvPr>
-          <p:cNvSpPr>
-            <a:spLocks noGrp="1"/>
-          </p:cNvSpPr>
+          <p:cNvGraphicFramePr>
+            <a:graphicFrameLocks noGrp="1"/>
+          </p:cNvGraphicFramePr>
           <p:nvPr>
-            <p:ph idx="1"/>
+            <p:extLst>
+              <p:ext uri="{D42A27DB-BD31-4B8C-83A1-F6EECF244321}">
+                <p14:modId xmlns:p14="http://schemas.microsoft.com/office/powerpoint/2010/main" val="3848268959"/>
+              </p:ext>
+            </p:extLst>
           </p:nvPr>
-        </p:nvSpPr>
-        <p:spPr>
-          <a:xfrm>
-            <a:off x="623888" y="1151164"/>
-            <a:ext cx="10873698" cy="4931229"/>
-          </a:xfrm>
-        </p:spPr>
-        <p:txBody>
-          <a:bodyPr vert="horz" lIns="72000" tIns="0" rIns="72000" bIns="0" rtlCol="0" anchor="t">
-            <a:normAutofit/>
-          </a:bodyPr>
-          <a:lstStyle/>
-          <a:p>
-            <a:pPr algn="just">
-              <a:lnSpc>
-                <a:spcPct val="150000"/>
-              </a:lnSpc>
-              <a:spcBef>
-                <a:spcPts val="1200"/>
-              </a:spcBef>
-            </a:pPr>
-            <a:r>
-              <a:rPr lang="en-AU" sz="1200" b="1" dirty="0">
-                <a:latin typeface="+mn-lt"/>
-                <a:cs typeface="Times New Roman" panose="02020603050405020304" pitchFamily="18" charset="0"/>
-              </a:rPr>
-              <a:t>Budget Availability: </a:t>
-            </a:r>
-            <a:r>
-              <a:rPr lang="en-AU" sz="1200" dirty="0">
-                <a:latin typeface="+mn-lt"/>
-                <a:cs typeface="Times New Roman" panose="02020603050405020304" pitchFamily="18" charset="0"/>
-              </a:rPr>
-              <a:t>Funding will be approved and available for all three phases of platform development </a:t>
-            </a:r>
-          </a:p>
-          <a:p>
-            <a:pPr algn="just">
-              <a:lnSpc>
-                <a:spcPct val="150000"/>
-              </a:lnSpc>
-              <a:spcBef>
-                <a:spcPts val="1200"/>
-              </a:spcBef>
-            </a:pPr>
-            <a:r>
-              <a:rPr lang="en-AU" sz="1200" b="1" dirty="0">
-                <a:latin typeface="+mn-lt"/>
-                <a:cs typeface="Times New Roman" panose="02020603050405020304" pitchFamily="18" charset="0"/>
-              </a:rPr>
-              <a:t>Stakeholder Support: </a:t>
-            </a:r>
-            <a:r>
-              <a:rPr lang="en-AU" sz="1200" dirty="0">
-                <a:latin typeface="+mn-lt"/>
-                <a:cs typeface="Times New Roman" panose="02020603050405020304" pitchFamily="18" charset="0"/>
-              </a:rPr>
-              <a:t>Business units and procurement teams will support adoption and provide necessary input during trial period</a:t>
-            </a:r>
-          </a:p>
-          <a:p>
-            <a:pPr algn="just">
-              <a:lnSpc>
-                <a:spcPct val="150000"/>
-              </a:lnSpc>
-              <a:spcBef>
-                <a:spcPts val="1200"/>
-              </a:spcBef>
-            </a:pPr>
-            <a:r>
-              <a:rPr lang="en-AU" sz="1200" b="1" dirty="0">
-                <a:latin typeface="+mn-lt"/>
-                <a:cs typeface="Times New Roman" panose="02020603050405020304" pitchFamily="18" charset="0"/>
-              </a:rPr>
-              <a:t>AI Technology Maturity: </a:t>
-            </a:r>
-            <a:r>
-              <a:rPr lang="en-AU" sz="1200" dirty="0">
-                <a:latin typeface="+mn-lt"/>
-                <a:cs typeface="Times New Roman" panose="02020603050405020304" pitchFamily="18" charset="0"/>
-              </a:rPr>
-              <a:t>Current AI/ML technology is sufficiently mature to deliver required document interpretation and analysis capabilities</a:t>
-            </a:r>
-          </a:p>
-          <a:p>
-            <a:pPr algn="just">
-              <a:lnSpc>
-                <a:spcPct val="150000"/>
-              </a:lnSpc>
-              <a:spcBef>
-                <a:spcPts val="1200"/>
-              </a:spcBef>
-            </a:pPr>
-            <a:r>
-              <a:rPr lang="en-AU" sz="1200" b="1" dirty="0">
-                <a:latin typeface="+mn-lt"/>
-                <a:cs typeface="Times New Roman" panose="02020603050405020304" pitchFamily="18" charset="0"/>
-              </a:rPr>
-              <a:t>Supplier Cooperation: </a:t>
-            </a:r>
-            <a:r>
-              <a:rPr lang="en-AU" sz="1200" dirty="0">
-                <a:latin typeface="+mn-lt"/>
-                <a:cs typeface="Times New Roman" panose="02020603050405020304" pitchFamily="18" charset="0"/>
-              </a:rPr>
-              <a:t>Suppliers will provide documentation in formats that can be processed by the AI platform- </a:t>
-            </a:r>
-          </a:p>
-          <a:p>
-            <a:pPr algn="just">
-              <a:lnSpc>
-                <a:spcPct val="150000"/>
-              </a:lnSpc>
-              <a:spcBef>
-                <a:spcPts val="1200"/>
-              </a:spcBef>
-            </a:pPr>
-            <a:r>
-              <a:rPr lang="en-AU" sz="1200" b="1" dirty="0">
-                <a:latin typeface="+mn-lt"/>
-                <a:cs typeface="Times New Roman" panose="02020603050405020304" pitchFamily="18" charset="0"/>
-              </a:rPr>
-              <a:t>Resource Availability</a:t>
-            </a:r>
-            <a:r>
-              <a:rPr lang="en-AU" sz="1200" dirty="0">
-                <a:latin typeface="+mn-lt"/>
-                <a:cs typeface="Times New Roman" panose="02020603050405020304" pitchFamily="18" charset="0"/>
-              </a:rPr>
-              <a:t>: DTS Project Delivery team has capacity and capability to deliver the platform build- </a:t>
-            </a:r>
-          </a:p>
-          <a:p>
-            <a:pPr algn="just">
-              <a:lnSpc>
-                <a:spcPct val="150000"/>
-              </a:lnSpc>
-              <a:spcBef>
-                <a:spcPts val="1200"/>
-              </a:spcBef>
-            </a:pPr>
-            <a:r>
-              <a:rPr lang="en-AU" sz="1200" b="1" dirty="0">
-                <a:latin typeface="+mn-lt"/>
-                <a:cs typeface="Times New Roman" panose="02020603050405020304" pitchFamily="18" charset="0"/>
-              </a:rPr>
-              <a:t>Category Requirements Defined: </a:t>
-            </a:r>
-            <a:r>
-              <a:rPr lang="en-AU" sz="1200" dirty="0">
-                <a:latin typeface="+mn-lt"/>
-                <a:cs typeface="Times New Roman" panose="02020603050405020304" pitchFamily="18" charset="0"/>
-              </a:rPr>
-              <a:t>MinRes category-specific requirements and safety management standards are documented and stable enough for AI benchmarking.</a:t>
-            </a:r>
-          </a:p>
-          <a:p>
-            <a:pPr algn="just">
-              <a:lnSpc>
-                <a:spcPct val="150000"/>
-              </a:lnSpc>
-              <a:spcBef>
-                <a:spcPts val="1200"/>
-              </a:spcBef>
-            </a:pPr>
-            <a:r>
-              <a:rPr lang="en-AU" sz="1200" b="1" dirty="0">
-                <a:latin typeface="+mn-lt"/>
-                <a:cs typeface="Times New Roman" panose="02020603050405020304" pitchFamily="18" charset="0"/>
-              </a:rPr>
-              <a:t>Integration Feasibility: </a:t>
-            </a:r>
-            <a:r>
-              <a:rPr lang="en-AU" sz="1200" dirty="0">
-                <a:latin typeface="+mn-lt"/>
-                <a:cs typeface="Times New Roman" panose="02020603050405020304" pitchFamily="18" charset="0"/>
-              </a:rPr>
-              <a:t>Existing supplier management systems can support data integration or export capabilities</a:t>
-            </a:r>
-          </a:p>
-          <a:p>
-            <a:pPr algn="just">
-              <a:lnSpc>
-                <a:spcPct val="150000"/>
-              </a:lnSpc>
-              <a:spcBef>
-                <a:spcPts val="1200"/>
-              </a:spcBef>
-            </a:pPr>
-            <a:r>
-              <a:rPr lang="en-AU" sz="1200" b="1" dirty="0">
-                <a:latin typeface="+mn-lt"/>
-                <a:cs typeface="Times New Roman" panose="02020603050405020304" pitchFamily="18" charset="0"/>
-              </a:rPr>
-              <a:t>Trial Period Success: </a:t>
-            </a:r>
-            <a:r>
-              <a:rPr lang="en-AU" sz="1200" dirty="0">
-                <a:latin typeface="+mn-lt"/>
-                <a:cs typeface="Times New Roman" panose="02020603050405020304" pitchFamily="18" charset="0"/>
-              </a:rPr>
-              <a:t>Phase 1 trial will validate AI accuracy and consistency within reasonable timeframes</a:t>
-            </a:r>
-          </a:p>
-          <a:p>
-            <a:pPr algn="just">
-              <a:lnSpc>
-                <a:spcPct val="150000"/>
-              </a:lnSpc>
-              <a:spcBef>
-                <a:spcPts val="1200"/>
-              </a:spcBef>
-            </a:pPr>
-            <a:r>
-              <a:rPr lang="en-AU" sz="1200" b="1" dirty="0">
-                <a:latin typeface="+mn-lt"/>
-                <a:cs typeface="Times New Roman" panose="02020603050405020304" pitchFamily="18" charset="0"/>
-              </a:rPr>
-              <a:t>Change Management Support: </a:t>
-            </a:r>
-            <a:r>
-              <a:rPr lang="en-AU" sz="1200" dirty="0">
-                <a:latin typeface="+mn-lt"/>
-                <a:cs typeface="Times New Roman" panose="02020603050405020304" pitchFamily="18" charset="0"/>
-              </a:rPr>
-              <a:t>Organizational change management resources will be available to support user adoption</a:t>
-            </a:r>
-          </a:p>
-          <a:p>
-            <a:pPr algn="just">
-              <a:lnSpc>
-                <a:spcPct val="150000"/>
-              </a:lnSpc>
-              <a:spcBef>
-                <a:spcPts val="1200"/>
-              </a:spcBef>
-            </a:pPr>
-            <a:r>
-              <a:rPr lang="en-AU" sz="1200" b="1" dirty="0">
-                <a:latin typeface="+mn-lt"/>
-                <a:cs typeface="Times New Roman" panose="02020603050405020304" pitchFamily="18" charset="0"/>
-              </a:rPr>
-              <a:t>Technical Infrastructure: </a:t>
-            </a:r>
-            <a:r>
-              <a:rPr lang="en-AU" sz="1200" dirty="0">
-                <a:latin typeface="+mn-lt"/>
-                <a:cs typeface="Times New Roman" panose="02020603050405020304" pitchFamily="18" charset="0"/>
-              </a:rPr>
-              <a:t>Necessary infrastructure (cloud/compute resources, security frameworks) is available or can be procured</a:t>
-            </a:r>
-            <a:endParaRPr lang="en-US" dirty="0"/>
-          </a:p>
-        </p:txBody>
-      </p:sp>
+        </p:nvGraphicFramePr>
+        <p:xfrm>
+          <a:off x="1108807" y="1387882"/>
+          <a:ext cx="10070822" cy="4378920"/>
+        </p:xfrm>
+        <a:graphic>
+          <a:graphicData uri="http://schemas.openxmlformats.org/drawingml/2006/table">
+            <a:tbl>
+              <a:tblPr firstRow="1" bandRow="1">
+                <a:tableStyleId>{5C22544A-7EE6-4342-B048-85BDC9FD1C3A}</a:tableStyleId>
+              </a:tblPr>
+              <a:tblGrid>
+                <a:gridCol w="2676380">
+                  <a:extLst>
+                    <a:ext uri="{9D8B030D-6E8A-4147-A177-3AD203B41FA5}">
+                      <a16:colId xmlns:a16="http://schemas.microsoft.com/office/drawing/2014/main" val="3242179819"/>
+                    </a:ext>
+                  </a:extLst>
+                </a:gridCol>
+                <a:gridCol w="7394442">
+                  <a:extLst>
+                    <a:ext uri="{9D8B030D-6E8A-4147-A177-3AD203B41FA5}">
+                      <a16:colId xmlns:a16="http://schemas.microsoft.com/office/drawing/2014/main" val="2927003683"/>
+                    </a:ext>
+                  </a:extLst>
+                </a:gridCol>
+              </a:tblGrid>
+              <a:tr h="318928">
+                <a:tc>
+                  <a:txBody>
+                    <a:bodyPr/>
+                    <a:lstStyle/>
+                    <a:p>
+                      <a:r>
+                        <a:rPr lang="en-US" sz="1200" dirty="0"/>
+                        <a:t>Category</a:t>
+                      </a:r>
+                      <a:endParaRPr lang="en-AU" sz="1200" dirty="0"/>
+                    </a:p>
+                  </a:txBody>
+                  <a:tcPr/>
+                </a:tc>
+                <a:tc>
+                  <a:txBody>
+                    <a:bodyPr/>
+                    <a:lstStyle/>
+                    <a:p>
+                      <a:r>
+                        <a:rPr lang="en-US" sz="1200" dirty="0"/>
+                        <a:t>Assumption</a:t>
+                      </a:r>
+                      <a:endParaRPr lang="en-AU" sz="1200" dirty="0"/>
+                    </a:p>
+                  </a:txBody>
+                  <a:tcPr/>
+                </a:tc>
+                <a:extLst>
+                  <a:ext uri="{0D108BD9-81ED-4DB2-BD59-A6C34878D82A}">
+                    <a16:rowId xmlns:a16="http://schemas.microsoft.com/office/drawing/2014/main" val="3789084030"/>
+                  </a:ext>
+                </a:extLst>
+              </a:tr>
+              <a:tr h="393199">
+                <a:tc>
+                  <a:txBody>
+                    <a:bodyPr/>
+                    <a:lstStyle/>
+                    <a:p>
+                      <a:r>
+                        <a:rPr lang="en-AU" sz="1200" b="0" dirty="0">
+                          <a:latin typeface="+mn-lt"/>
+                          <a:cs typeface="Times New Roman" panose="02020603050405020304" pitchFamily="18" charset="0"/>
+                        </a:rPr>
+                        <a:t>Budget Availability</a:t>
+                      </a:r>
+                      <a:endParaRPr lang="en-AU" sz="1200" b="0" dirty="0"/>
+                    </a:p>
+                  </a:txBody>
+                  <a:tcPr/>
+                </a:tc>
+                <a:tc>
+                  <a:txBody>
+                    <a:bodyPr/>
+                    <a:lstStyle/>
+                    <a:p>
+                      <a:r>
+                        <a:rPr lang="en-AU" sz="1200" dirty="0">
+                          <a:latin typeface="+mn-lt"/>
+                          <a:cs typeface="Times New Roman" panose="02020603050405020304" pitchFamily="18" charset="0"/>
+                        </a:rPr>
+                        <a:t>Funding will be approved and available for all three phases of platform development </a:t>
+                      </a:r>
+                      <a:endParaRPr lang="en-AU" sz="1200" dirty="0"/>
+                    </a:p>
+                  </a:txBody>
+                  <a:tcPr/>
+                </a:tc>
+                <a:extLst>
+                  <a:ext uri="{0D108BD9-81ED-4DB2-BD59-A6C34878D82A}">
+                    <a16:rowId xmlns:a16="http://schemas.microsoft.com/office/drawing/2014/main" val="1257846580"/>
+                  </a:ext>
+                </a:extLst>
+              </a:tr>
+              <a:tr h="393199">
+                <a:tc>
+                  <a:txBody>
+                    <a:bodyPr/>
+                    <a:lstStyle/>
+                    <a:p>
+                      <a:r>
+                        <a:rPr lang="en-AU" sz="1200" b="0" dirty="0">
+                          <a:latin typeface="+mn-lt"/>
+                          <a:cs typeface="Times New Roman" panose="02020603050405020304" pitchFamily="18" charset="0"/>
+                        </a:rPr>
+                        <a:t>Stakeholder Support</a:t>
+                      </a:r>
+                      <a:endParaRPr lang="en-AU" sz="1200" b="0" dirty="0"/>
+                    </a:p>
+                  </a:txBody>
+                  <a:tcPr/>
+                </a:tc>
+                <a:tc>
+                  <a:txBody>
+                    <a:bodyPr/>
+                    <a:lstStyle/>
+                    <a:p>
+                      <a:r>
+                        <a:rPr lang="en-AU" sz="1200" dirty="0">
+                          <a:latin typeface="+mn-lt"/>
+                          <a:cs typeface="Times New Roman" panose="02020603050405020304" pitchFamily="18" charset="0"/>
+                        </a:rPr>
+                        <a:t>Business units and procurement teams will support adoption and provide necessary input during trial period</a:t>
+                      </a:r>
+                      <a:endParaRPr lang="en-AU" sz="1200" dirty="0"/>
+                    </a:p>
+                  </a:txBody>
+                  <a:tcPr/>
+                </a:tc>
+                <a:extLst>
+                  <a:ext uri="{0D108BD9-81ED-4DB2-BD59-A6C34878D82A}">
+                    <a16:rowId xmlns:a16="http://schemas.microsoft.com/office/drawing/2014/main" val="1867189343"/>
+                  </a:ext>
+                </a:extLst>
+              </a:tr>
+              <a:tr h="393199">
+                <a:tc>
+                  <a:txBody>
+                    <a:bodyPr/>
+                    <a:lstStyle/>
+                    <a:p>
+                      <a:r>
+                        <a:rPr lang="en-AU" sz="1200" b="0" dirty="0">
+                          <a:latin typeface="+mn-lt"/>
+                          <a:cs typeface="Times New Roman" panose="02020603050405020304" pitchFamily="18" charset="0"/>
+                        </a:rPr>
+                        <a:t>AI Technology Maturity</a:t>
+                      </a:r>
+                      <a:endParaRPr lang="en-AU" sz="1200" b="0" dirty="0"/>
+                    </a:p>
+                  </a:txBody>
+                  <a:tcPr/>
+                </a:tc>
+                <a:tc>
+                  <a:txBody>
+                    <a:bodyPr/>
+                    <a:lstStyle/>
+                    <a:p>
+                      <a:r>
+                        <a:rPr lang="en-AU" sz="1200" dirty="0">
+                          <a:latin typeface="+mn-lt"/>
+                          <a:cs typeface="Times New Roman" panose="02020603050405020304" pitchFamily="18" charset="0"/>
+                        </a:rPr>
+                        <a:t>Current AI/ML technology is sufficiently mature to deliver required document interpretation and analysis capabilities</a:t>
+                      </a:r>
+                      <a:endParaRPr lang="en-AU" sz="1200" dirty="0"/>
+                    </a:p>
+                  </a:txBody>
+                  <a:tcPr/>
+                </a:tc>
+                <a:extLst>
+                  <a:ext uri="{0D108BD9-81ED-4DB2-BD59-A6C34878D82A}">
+                    <a16:rowId xmlns:a16="http://schemas.microsoft.com/office/drawing/2014/main" val="1627000995"/>
+                  </a:ext>
+                </a:extLst>
+              </a:tr>
+              <a:tr h="393199">
+                <a:tc>
+                  <a:txBody>
+                    <a:bodyPr/>
+                    <a:lstStyle/>
+                    <a:p>
+                      <a:r>
+                        <a:rPr lang="en-AU" sz="1200" b="0" dirty="0">
+                          <a:latin typeface="+mn-lt"/>
+                          <a:cs typeface="Times New Roman" panose="02020603050405020304" pitchFamily="18" charset="0"/>
+                        </a:rPr>
+                        <a:t>Supplier Cooperation</a:t>
+                      </a:r>
+                      <a:endParaRPr lang="en-AU" sz="1200" b="0" dirty="0"/>
+                    </a:p>
+                  </a:txBody>
+                  <a:tcPr/>
+                </a:tc>
+                <a:tc>
+                  <a:txBody>
+                    <a:bodyPr/>
+                    <a:lstStyle/>
+                    <a:p>
+                      <a:r>
+                        <a:rPr lang="en-AU" sz="1200" dirty="0">
+                          <a:latin typeface="+mn-lt"/>
+                          <a:cs typeface="Times New Roman" panose="02020603050405020304" pitchFamily="18" charset="0"/>
+                        </a:rPr>
+                        <a:t>Suppliers will provide documentation in formats that can be processed by the AI platform</a:t>
+                      </a:r>
+                      <a:endParaRPr lang="en-AU" sz="1200" dirty="0"/>
+                    </a:p>
+                  </a:txBody>
+                  <a:tcPr/>
+                </a:tc>
+                <a:extLst>
+                  <a:ext uri="{0D108BD9-81ED-4DB2-BD59-A6C34878D82A}">
+                    <a16:rowId xmlns:a16="http://schemas.microsoft.com/office/drawing/2014/main" val="723936410"/>
+                  </a:ext>
+                </a:extLst>
+              </a:tr>
+              <a:tr h="393199">
+                <a:tc>
+                  <a:txBody>
+                    <a:bodyPr/>
+                    <a:lstStyle/>
+                    <a:p>
+                      <a:r>
+                        <a:rPr lang="en-AU" sz="1200" b="0" dirty="0">
+                          <a:latin typeface="+mn-lt"/>
+                          <a:cs typeface="Times New Roman" panose="02020603050405020304" pitchFamily="18" charset="0"/>
+                        </a:rPr>
+                        <a:t>Resource Availability</a:t>
+                      </a:r>
+                      <a:endParaRPr lang="en-AU" sz="1200" b="0" dirty="0"/>
+                    </a:p>
+                  </a:txBody>
+                  <a:tcPr/>
+                </a:tc>
+                <a:tc>
+                  <a:txBody>
+                    <a:bodyPr/>
+                    <a:lstStyle/>
+                    <a:p>
+                      <a:r>
+                        <a:rPr lang="en-AU" sz="1200" dirty="0">
+                          <a:latin typeface="+mn-lt"/>
+                          <a:cs typeface="Times New Roman" panose="02020603050405020304" pitchFamily="18" charset="0"/>
+                        </a:rPr>
+                        <a:t>DTS Project Delivery team has capacity and capability to deliver the platform build</a:t>
+                      </a:r>
+                      <a:endParaRPr lang="en-AU" sz="1200" dirty="0"/>
+                    </a:p>
+                  </a:txBody>
+                  <a:tcPr/>
+                </a:tc>
+                <a:extLst>
+                  <a:ext uri="{0D108BD9-81ED-4DB2-BD59-A6C34878D82A}">
+                    <a16:rowId xmlns:a16="http://schemas.microsoft.com/office/drawing/2014/main" val="497502933"/>
+                  </a:ext>
+                </a:extLst>
+              </a:tr>
+              <a:tr h="393199">
+                <a:tc>
+                  <a:txBody>
+                    <a:bodyPr/>
+                    <a:lstStyle/>
+                    <a:p>
+                      <a:r>
+                        <a:rPr lang="en-AU" sz="1200" b="0" dirty="0">
+                          <a:latin typeface="+mn-lt"/>
+                          <a:cs typeface="Times New Roman" panose="02020603050405020304" pitchFamily="18" charset="0"/>
+                        </a:rPr>
+                        <a:t>Category Requirements Defined</a:t>
+                      </a:r>
+                      <a:endParaRPr lang="en-AU" sz="1200" b="0" dirty="0"/>
+                    </a:p>
+                  </a:txBody>
+                  <a:tcPr/>
+                </a:tc>
+                <a:tc>
+                  <a:txBody>
+                    <a:bodyPr/>
+                    <a:lstStyle/>
+                    <a:p>
+                      <a:r>
+                        <a:rPr lang="en-AU" sz="1200" dirty="0">
+                          <a:latin typeface="+mn-lt"/>
+                          <a:cs typeface="Times New Roman" panose="02020603050405020304" pitchFamily="18" charset="0"/>
+                        </a:rPr>
+                        <a:t>MinRes category-specific requirements and safety management standards are documented and stable enough for AI benchmarking</a:t>
+                      </a:r>
+                      <a:endParaRPr lang="en-AU" sz="1200" dirty="0"/>
+                    </a:p>
+                  </a:txBody>
+                  <a:tcPr/>
+                </a:tc>
+                <a:extLst>
+                  <a:ext uri="{0D108BD9-81ED-4DB2-BD59-A6C34878D82A}">
+                    <a16:rowId xmlns:a16="http://schemas.microsoft.com/office/drawing/2014/main" val="3288531204"/>
+                  </a:ext>
+                </a:extLst>
+              </a:tr>
+              <a:tr h="393199">
+                <a:tc>
+                  <a:txBody>
+                    <a:bodyPr/>
+                    <a:lstStyle/>
+                    <a:p>
+                      <a:r>
+                        <a:rPr lang="en-AU" sz="1200" b="0" dirty="0">
+                          <a:latin typeface="+mn-lt"/>
+                          <a:cs typeface="Times New Roman" panose="02020603050405020304" pitchFamily="18" charset="0"/>
+                        </a:rPr>
+                        <a:t>Integration Feasibility</a:t>
+                      </a:r>
+                      <a:endParaRPr lang="en-AU" sz="1200" b="0" dirty="0"/>
+                    </a:p>
+                  </a:txBody>
+                  <a:tcPr/>
+                </a:tc>
+                <a:tc>
+                  <a:txBody>
+                    <a:bodyPr/>
+                    <a:lstStyle/>
+                    <a:p>
+                      <a:r>
+                        <a:rPr lang="en-AU" sz="1200">
+                          <a:latin typeface="+mn-lt"/>
+                          <a:cs typeface="Times New Roman" panose="02020603050405020304" pitchFamily="18" charset="0"/>
+                        </a:rPr>
+                        <a:t>Existing supplier management systems can support data integration or export capabilities</a:t>
+                      </a:r>
+                      <a:endParaRPr lang="en-AU" sz="1200" dirty="0"/>
+                    </a:p>
+                  </a:txBody>
+                  <a:tcPr/>
+                </a:tc>
+                <a:extLst>
+                  <a:ext uri="{0D108BD9-81ED-4DB2-BD59-A6C34878D82A}">
+                    <a16:rowId xmlns:a16="http://schemas.microsoft.com/office/drawing/2014/main" val="1374522053"/>
+                  </a:ext>
+                </a:extLst>
+              </a:tr>
+              <a:tr h="393199">
+                <a:tc>
+                  <a:txBody>
+                    <a:bodyPr/>
+                    <a:lstStyle/>
+                    <a:p>
+                      <a:r>
+                        <a:rPr lang="en-AU" sz="1200" b="0" dirty="0">
+                          <a:latin typeface="+mn-lt"/>
+                          <a:cs typeface="Times New Roman" panose="02020603050405020304" pitchFamily="18" charset="0"/>
+                        </a:rPr>
+                        <a:t>Trial Period Success</a:t>
+                      </a:r>
+                      <a:endParaRPr lang="en-AU" sz="1200" b="0" dirty="0"/>
+                    </a:p>
+                  </a:txBody>
+                  <a:tcPr/>
+                </a:tc>
+                <a:tc>
+                  <a:txBody>
+                    <a:bodyPr/>
+                    <a:lstStyle/>
+                    <a:p>
+                      <a:r>
+                        <a:rPr lang="en-AU" sz="1200">
+                          <a:latin typeface="+mn-lt"/>
+                          <a:cs typeface="Times New Roman" panose="02020603050405020304" pitchFamily="18" charset="0"/>
+                        </a:rPr>
+                        <a:t>Phase 1 trial will validate AI accuracy and consistency within reasonable timeframes</a:t>
+                      </a:r>
+                      <a:endParaRPr lang="en-AU" sz="1200" dirty="0"/>
+                    </a:p>
+                  </a:txBody>
+                  <a:tcPr/>
+                </a:tc>
+                <a:extLst>
+                  <a:ext uri="{0D108BD9-81ED-4DB2-BD59-A6C34878D82A}">
+                    <a16:rowId xmlns:a16="http://schemas.microsoft.com/office/drawing/2014/main" val="1606785013"/>
+                  </a:ext>
+                </a:extLst>
+              </a:tr>
+              <a:tr h="393199">
+                <a:tc>
+                  <a:txBody>
+                    <a:bodyPr/>
+                    <a:lstStyle/>
+                    <a:p>
+                      <a:r>
+                        <a:rPr lang="en-AU" sz="1200" b="0" dirty="0">
+                          <a:latin typeface="+mn-lt"/>
+                          <a:cs typeface="Times New Roman" panose="02020603050405020304" pitchFamily="18" charset="0"/>
+                        </a:rPr>
+                        <a:t>Change Management Support</a:t>
+                      </a:r>
+                      <a:endParaRPr lang="en-AU" sz="1200" b="0" dirty="0"/>
+                    </a:p>
+                  </a:txBody>
+                  <a:tcPr/>
+                </a:tc>
+                <a:tc>
+                  <a:txBody>
+                    <a:bodyPr/>
+                    <a:lstStyle/>
+                    <a:p>
+                      <a:r>
+                        <a:rPr lang="en-AU" sz="1200" dirty="0">
+                          <a:latin typeface="+mn-lt"/>
+                          <a:cs typeface="Times New Roman" panose="02020603050405020304" pitchFamily="18" charset="0"/>
+                        </a:rPr>
+                        <a:t>Organizational change management resources will be available to support user adoption</a:t>
+                      </a:r>
+                      <a:endParaRPr lang="en-AU" sz="1200" dirty="0"/>
+                    </a:p>
+                  </a:txBody>
+                  <a:tcPr/>
+                </a:tc>
+                <a:extLst>
+                  <a:ext uri="{0D108BD9-81ED-4DB2-BD59-A6C34878D82A}">
+                    <a16:rowId xmlns:a16="http://schemas.microsoft.com/office/drawing/2014/main" val="3607509290"/>
+                  </a:ext>
+                </a:extLst>
+              </a:tr>
+              <a:tr h="393199">
+                <a:tc>
+                  <a:txBody>
+                    <a:bodyPr/>
+                    <a:lstStyle/>
+                    <a:p>
+                      <a:r>
+                        <a:rPr lang="en-AU" sz="1200" b="0" dirty="0">
+                          <a:latin typeface="+mn-lt"/>
+                          <a:cs typeface="Times New Roman" panose="02020603050405020304" pitchFamily="18" charset="0"/>
+                        </a:rPr>
+                        <a:t>Technical Infrastructure</a:t>
+                      </a:r>
+                      <a:endParaRPr lang="en-AU" sz="1200" b="0" dirty="0"/>
+                    </a:p>
+                  </a:txBody>
+                  <a:tcPr/>
+                </a:tc>
+                <a:tc>
+                  <a:txBody>
+                    <a:bodyPr/>
+                    <a:lstStyle/>
+                    <a:p>
+                      <a:r>
+                        <a:rPr lang="en-AU" sz="1200" dirty="0">
+                          <a:latin typeface="+mn-lt"/>
+                          <a:cs typeface="Times New Roman" panose="02020603050405020304" pitchFamily="18" charset="0"/>
+                        </a:rPr>
+                        <a:t>Necessary infrastructure (cloud/compute resources, security frameworks) is available or can be procured</a:t>
+                      </a:r>
+                      <a:endParaRPr lang="en-AU" sz="1200" dirty="0"/>
+                    </a:p>
+                  </a:txBody>
+                  <a:tcPr/>
+                </a:tc>
+                <a:extLst>
+                  <a:ext uri="{0D108BD9-81ED-4DB2-BD59-A6C34878D82A}">
+                    <a16:rowId xmlns:a16="http://schemas.microsoft.com/office/drawing/2014/main" val="1421245817"/>
+                  </a:ext>
+                </a:extLst>
+              </a:tr>
+            </a:tbl>
+          </a:graphicData>
+        </a:graphic>
+      </p:graphicFrame>
     </p:spTree>
     <p:extLst>
       <p:ext uri="{BB962C8B-B14F-4D97-AF65-F5344CB8AC3E}">
